--- a/Support_Soutenance_P12_Sport_Data_Solution_Fatou_THIAM.pptx
+++ b/Support_Soutenance_P12_Sport_Data_Solution_Fatou_THIAM.pptx
@@ -1519,7 +1519,7 @@
           </a:prstGeom>
           <a:extLst>
             <a:ext uri="{C572A759-6A51-4108-AA02-DFA0A04FC94B}">
-              <ma14:wrappingTextBoxFlag xmlns:ma14="http://schemas.microsoft.com/office/mac/drawingml/2011/main" xmlns="" val="0"/>
+              <ma14:wrappingTextBoxFlag xmlns="" xmlns:ma14="http://schemas.microsoft.com/office/mac/drawingml/2011/main" val="0"/>
             </a:ext>
           </a:extLst>
         </p:spPr>
@@ -1594,7 +1594,7 @@
           </a:prstGeom>
           <a:extLst>
             <a:ext uri="{C572A759-6A51-4108-AA02-DFA0A04FC94B}">
-              <ma14:wrappingTextBoxFlag xmlns:ma14="http://schemas.microsoft.com/office/mac/drawingml/2011/main" xmlns="" val="0"/>
+              <ma14:wrappingTextBoxFlag xmlns="" xmlns:ma14="http://schemas.microsoft.com/office/mac/drawingml/2011/main" val="0"/>
             </a:ext>
           </a:extLst>
         </p:spPr>
@@ -2514,7 +2514,7 @@
           </a:prstGeom>
           <a:extLst>
             <a:ext uri="{C572A759-6A51-4108-AA02-DFA0A04FC94B}">
-              <ma14:wrappingTextBoxFlag xmlns:ma14="http://schemas.microsoft.com/office/mac/drawingml/2011/main" xmlns="" val="0"/>
+              <ma14:wrappingTextBoxFlag xmlns="" xmlns:ma14="http://schemas.microsoft.com/office/mac/drawingml/2011/main" val="0"/>
             </a:ext>
           </a:extLst>
         </p:spPr>
@@ -2531,11 +2531,7 @@
           </a:lstStyle>
           <a:p>
             <a:pPr algn="l"/>
-            <a:fld id="{F7021451-1387-4CA6-816F-3879F97B5CBC}" type="slidenum">
-              <a:rPr lang="en-US" b="0"/>
-              <a:t>1</a:t>
-            </a:fld>
-            <a:endParaRPr lang="en-US"/>
+            <a:endParaRPr lang="en-US" dirty="0"/>
           </a:p>
         </p:txBody>
       </p:sp>
@@ -2544,11 +2540,11 @@
   <p:clrMapOvr>
     <a:masterClrMapping/>
   </p:clrMapOvr>
-  <mc:AlternateContent xmlns:mc="http://schemas.openxmlformats.org/markup-compatibility/2006">
-    <mc:Choice xmlns:p14="http://schemas.microsoft.com/office/powerpoint/2010/main" Requires="p14">
+  <mc:AlternateContent xmlns:mc="http://schemas.openxmlformats.org/markup-compatibility/2006" xmlns:p14="http://schemas.microsoft.com/office/powerpoint/2010/main">
+    <mc:Choice Requires="p14">
       <p:transition spd="slow" p14:dur="2000"/>
     </mc:Choice>
-    <mc:Fallback>
+    <mc:Fallback xmlns="">
       <p:transition spd="slow"/>
     </mc:Fallback>
   </mc:AlternateContent>
@@ -2581,560 +2577,767 @@
       </p:grpSpPr>
       <p:sp>
         <p:nvSpPr>
-          <p:cNvPr id="2" name="Text 0"/>
-          <p:cNvSpPr/>
-          <p:nvPr/>
-        </p:nvSpPr>
-        <p:spPr>
-          <a:xfrm>
-            <a:off x="594360" y="438912"/>
-            <a:ext cx="11018520" cy="438912"/>
+          <p:cNvPr id="2" name="Rectangle 1"/>
+          <p:cNvSpPr/>
+          <p:nvPr/>
+        </p:nvSpPr>
+        <p:spPr>
+          <a:xfrm>
+            <a:off x="0" y="0"/>
+            <a:ext cx="12192000" cy="182880"/>
+          </a:xfrm>
+          <a:prstGeom prst="rect">
+            <a:avLst/>
+          </a:prstGeom>
+          <a:solidFill>
+            <a:srgbClr val="2E65EB"/>
+          </a:solidFill>
+          <a:ln>
+            <a:noFill/>
+          </a:ln>
+        </p:spPr>
+        <p:style>
+          <a:lnRef idx="1">
+            <a:schemeClr val="accent1"/>
+          </a:lnRef>
+          <a:fillRef idx="3">
+            <a:schemeClr val="accent1"/>
+          </a:fillRef>
+          <a:effectRef idx="2">
+            <a:schemeClr val="accent1"/>
+          </a:effectRef>
+          <a:fontRef idx="minor">
+            <a:schemeClr val="lt1"/>
+          </a:fontRef>
+        </p:style>
+        <p:txBody>
+          <a:bodyPr rtlCol="0" anchor="ctr"/>
+          <a:lstStyle/>
+          <a:p>
+            <a:pPr algn="ctr"/>
+            <a:endParaRPr/>
+          </a:p>
+        </p:txBody>
+      </p:sp>
+      <p:sp>
+        <p:nvSpPr>
+          <p:cNvPr id="3" name="TextBox 2"/>
+          <p:cNvSpPr txBox="1"/>
+          <p:nvPr/>
+        </p:nvSpPr>
+        <p:spPr>
+          <a:xfrm>
+            <a:off x="566928" y="384048"/>
+            <a:ext cx="10972800" cy="502920"/>
           </a:xfrm>
           <a:prstGeom prst="rect">
             <a:avLst/>
           </a:prstGeom>
           <a:noFill/>
-          <a:ln/>
-        </p:spPr>
-        <p:txBody>
-          <a:bodyPr wrap="square" lIns="0" tIns="0" rIns="0" bIns="0" rtlCol="0" anchor="ctr"/>
-          <a:lstStyle/>
-          <a:p>
-            <a:pPr marL="0" indent="0">
-              <a:buNone/>
-            </a:pPr>
-            <a:r>
-              <a:rPr lang="en-US" sz="2600" b="1" dirty="0">
-                <a:solidFill>
-                  <a:srgbClr val="17324D"/>
-                </a:solidFill>
-              </a:rPr>
-              <a:t>9. Restitution Power </a:t>
-            </a:r>
-            <a:r>
-              <a:rPr lang="en-US" sz="2600" b="1" dirty="0" smtClean="0">
-                <a:solidFill>
-                  <a:srgbClr val="17324D"/>
-                </a:solidFill>
-              </a:rPr>
-              <a:t>BI: </a:t>
-            </a:r>
-            <a:r>
-              <a:rPr lang="en-US" sz="2600" b="1" dirty="0" err="1" smtClean="0">
-                <a:solidFill>
-                  <a:srgbClr val="17324D"/>
-                </a:solidFill>
-              </a:rPr>
-              <a:t>indicateurs</a:t>
-            </a:r>
-            <a:r>
-              <a:rPr lang="en-US" sz="2600" b="1" dirty="0" smtClean="0">
-                <a:solidFill>
-                  <a:srgbClr val="17324D"/>
-                </a:solidFill>
-              </a:rPr>
-              <a:t> métier</a:t>
-            </a:r>
-            <a:endParaRPr lang="en-US" sz="2600" dirty="0"/>
-          </a:p>
-        </p:txBody>
-      </p:sp>
-      <p:sp>
-        <p:nvSpPr>
-          <p:cNvPr id="3" name="Text 1"/>
-          <p:cNvSpPr/>
-          <p:nvPr/>
-        </p:nvSpPr>
-        <p:spPr>
-          <a:xfrm>
-            <a:off x="612648" y="932688"/>
-            <a:ext cx="10789920" cy="292608"/>
+        </p:spPr>
+        <p:txBody>
+          <a:bodyPr wrap="none">
+            <a:spAutoFit/>
+          </a:bodyPr>
+          <a:lstStyle/>
+          <a:p>
+            <a:pPr>
+              <a:defRPr sz="2700" b="1">
+                <a:solidFill>
+                  <a:srgbClr val="102F56"/>
+                </a:solidFill>
+                <a:latin typeface="Aptos Display"/>
+              </a:defRPr>
+            </a:pPr>
+            <a:r>
+              <a:t>9. Restitution Power BI : indicateurs métier</a:t>
+            </a:r>
+          </a:p>
+        </p:txBody>
+      </p:sp>
+      <p:sp>
+        <p:nvSpPr>
+          <p:cNvPr id="4" name="TextBox 3"/>
+          <p:cNvSpPr txBox="1"/>
+          <p:nvPr/>
+        </p:nvSpPr>
+        <p:spPr>
+          <a:xfrm>
+            <a:off x="576072" y="987552"/>
+            <a:ext cx="10972800" cy="438912"/>
           </a:xfrm>
           <a:prstGeom prst="rect">
             <a:avLst/>
           </a:prstGeom>
           <a:noFill/>
-          <a:ln/>
-        </p:spPr>
-        <p:txBody>
-          <a:bodyPr wrap="square" lIns="0" tIns="0" rIns="0" bIns="0" rtlCol="0" anchor="ctr"/>
-          <a:lstStyle/>
-          <a:p>
-            <a:pPr marL="0" indent="0">
-              <a:buNone/>
-            </a:pPr>
-            <a:r>
-              <a:rPr lang="en-US" sz="1150" dirty="0">
-                <a:solidFill>
-                  <a:srgbClr val="66788A"/>
-                </a:solidFill>
-              </a:rPr>
-              <a:t>Rendre les résultats exploitables par les décideurs.</a:t>
-            </a:r>
-            <a:endParaRPr lang="en-US" sz="1150" dirty="0"/>
-          </a:p>
-        </p:txBody>
-      </p:sp>
-      <p:sp>
-        <p:nvSpPr>
-          <p:cNvPr id="5" name="Shape 3"/>
-          <p:cNvSpPr/>
-          <p:nvPr/>
-        </p:nvSpPr>
-        <p:spPr>
-          <a:xfrm>
-            <a:off x="685800" y="1417320"/>
-            <a:ext cx="73152" cy="1874520"/>
-          </a:xfrm>
-          <a:prstGeom prst="rect">
+        </p:spPr>
+        <p:txBody>
+          <a:bodyPr wrap="none">
+            <a:spAutoFit/>
+          </a:bodyPr>
+          <a:lstStyle/>
+          <a:p>
+            <a:pPr>
+              <a:defRPr sz="1300">
+                <a:solidFill>
+                  <a:srgbClr val="4E6080"/>
+                </a:solidFill>
+                <a:latin typeface="Aptos"/>
+              </a:defRPr>
+            </a:pPr>
+            <a:r>
+              <a:t>Restituer les résultats métier produits automatiquement par le pipeline.</a:t>
+            </a:r>
+          </a:p>
+        </p:txBody>
+      </p:sp>
+      <p:sp>
+        <p:nvSpPr>
+          <p:cNvPr id="7" name="Rounded Rectangle 6"/>
+          <p:cNvSpPr/>
+          <p:nvPr/>
+        </p:nvSpPr>
+        <p:spPr>
+          <a:xfrm>
+            <a:off x="685800" y="1600200"/>
+            <a:ext cx="2743200" cy="1554480"/>
+          </a:xfrm>
+          <a:prstGeom prst="roundRect">
             <a:avLst/>
           </a:prstGeom>
           <a:solidFill>
-            <a:srgbClr val="2BAE66"/>
+            <a:srgbClr val="F5F8FD"/>
           </a:solidFill>
           <a:ln w="12700">
             <a:solidFill>
-              <a:srgbClr val="2BAE66"/>
+              <a:srgbClr val="E3E9F4"/>
             </a:solidFill>
-            <a:prstDash val="solid"/>
-          </a:ln>
-        </p:spPr>
-      </p:sp>
-      <p:sp>
-        <p:nvSpPr>
-          <p:cNvPr id="6" name="Text 4"/>
-          <p:cNvSpPr/>
-          <p:nvPr/>
-        </p:nvSpPr>
-        <p:spPr>
-          <a:xfrm>
-            <a:off x="914400" y="1581912"/>
-            <a:ext cx="2953512" cy="256032"/>
-          </a:xfrm>
-          <a:prstGeom prst="rect">
-            <a:avLst/>
-          </a:prstGeom>
-          <a:noFill/>
-          <a:ln/>
-        </p:spPr>
-        <p:txBody>
-          <a:bodyPr wrap="square" lIns="0" tIns="0" rIns="0" bIns="0" rtlCol="0" anchor="ctr"/>
-          <a:lstStyle/>
-          <a:p>
-            <a:pPr marL="0" indent="0">
-              <a:buNone/>
-            </a:pPr>
-            <a:r>
-              <a:rPr lang="en-US" sz="1400" b="1" dirty="0">
-                <a:solidFill>
-                  <a:srgbClr val="17324D"/>
-                </a:solidFill>
-              </a:rPr>
-              <a:t>Coût des avantages</a:t>
-            </a:r>
-            <a:endParaRPr lang="en-US" sz="1400" dirty="0"/>
-          </a:p>
-        </p:txBody>
-      </p:sp>
-      <p:sp>
-        <p:nvSpPr>
-          <p:cNvPr id="7" name="Text 5"/>
-          <p:cNvSpPr/>
-          <p:nvPr/>
-        </p:nvSpPr>
-        <p:spPr>
-          <a:xfrm>
-            <a:off x="914400" y="1947672"/>
-            <a:ext cx="2953512" cy="1216152"/>
-          </a:xfrm>
-          <a:prstGeom prst="rect">
-            <a:avLst/>
-          </a:prstGeom>
-          <a:noFill/>
-          <a:ln/>
-        </p:spPr>
-        <p:txBody>
-          <a:bodyPr wrap="square" lIns="254" tIns="254" rIns="254" bIns="254" rtlCol="0" anchor="t"/>
-          <a:lstStyle/>
-          <a:p>
-            <a:pPr marL="0" indent="0">
-              <a:buNone/>
-            </a:pPr>
-            <a:r>
-              <a:rPr lang="en-US" sz="1120" dirty="0">
-                <a:solidFill>
-                  <a:srgbClr val="243447"/>
-                </a:solidFill>
-              </a:rPr>
-              <a:t>Montants potentiels et attribués de la prime sportive pour mesurer l’impact financier.</a:t>
-            </a:r>
-            <a:endParaRPr lang="en-US" sz="1120" dirty="0"/>
-          </a:p>
-        </p:txBody>
-      </p:sp>
-      <p:sp>
-        <p:nvSpPr>
-          <p:cNvPr id="9" name="Shape 7"/>
-          <p:cNvSpPr/>
-          <p:nvPr/>
-        </p:nvSpPr>
-        <p:spPr>
-          <a:xfrm>
-            <a:off x="4434840" y="1417320"/>
-            <a:ext cx="73152" cy="1874520"/>
-          </a:xfrm>
-          <a:prstGeom prst="rect">
+          </a:ln>
+        </p:spPr>
+        <p:style>
+          <a:lnRef idx="1">
+            <a:schemeClr val="accent1"/>
+          </a:lnRef>
+          <a:fillRef idx="3">
+            <a:schemeClr val="accent1"/>
+          </a:fillRef>
+          <a:effectRef idx="2">
+            <a:schemeClr val="accent1"/>
+          </a:effectRef>
+          <a:fontRef idx="minor">
+            <a:schemeClr val="lt1"/>
+          </a:fontRef>
+        </p:style>
+        <p:txBody>
+          <a:bodyPr lIns="109728" tIns="82296" rIns="109728" bIns="54864" rtlCol="0" anchor="ctr"/>
+          <a:lstStyle/>
+          <a:p>
+            <a:pPr algn="ctr">
+              <a:defRPr sz="1300" b="1">
+                <a:solidFill>
+                  <a:srgbClr val="102F56"/>
+                </a:solidFill>
+                <a:latin typeface="Aptos"/>
+              </a:defRPr>
+            </a:pPr>
+            <a:r>
+              <a:t>PRIME SPORTIVE</a:t>
+            </a:r>
+          </a:p>
+          <a:p>
+            <a:pPr algn="ctr">
+              <a:defRPr sz="1100">
+                <a:solidFill>
+                  <a:srgbClr val="4E6080"/>
+                </a:solidFill>
+                <a:latin typeface="Aptos"/>
+              </a:defRPr>
+            </a:pPr>
+            <a:r>
+              <a:t>Montants potentiels et attribués selon les trajets sportifs validés.</a:t>
+            </a:r>
+          </a:p>
+        </p:txBody>
+      </p:sp>
+      <p:sp>
+        <p:nvSpPr>
+          <p:cNvPr id="8" name="Rounded Rectangle 7"/>
+          <p:cNvSpPr/>
+          <p:nvPr/>
+        </p:nvSpPr>
+        <p:spPr>
+          <a:xfrm>
+            <a:off x="3611880" y="1600200"/>
+            <a:ext cx="2743200" cy="1554480"/>
+          </a:xfrm>
+          <a:prstGeom prst="roundRect">
             <a:avLst/>
           </a:prstGeom>
           <a:solidFill>
-            <a:srgbClr val="F59E0B"/>
+            <a:srgbClr val="F5F8FD"/>
           </a:solidFill>
           <a:ln w="12700">
             <a:solidFill>
-              <a:srgbClr val="F59E0B"/>
+              <a:srgbClr val="E3E9F4"/>
             </a:solidFill>
-            <a:prstDash val="solid"/>
-          </a:ln>
-        </p:spPr>
-      </p:sp>
-      <p:sp>
-        <p:nvSpPr>
-          <p:cNvPr id="10" name="Text 8"/>
-          <p:cNvSpPr/>
-          <p:nvPr/>
-        </p:nvSpPr>
-        <p:spPr>
-          <a:xfrm>
-            <a:off x="4663440" y="1581912"/>
-            <a:ext cx="2953512" cy="256032"/>
-          </a:xfrm>
-          <a:prstGeom prst="rect">
-            <a:avLst/>
-          </a:prstGeom>
-          <a:noFill/>
-          <a:ln/>
-        </p:spPr>
-        <p:txBody>
-          <a:bodyPr wrap="square" lIns="0" tIns="0" rIns="0" bIns="0" rtlCol="0" anchor="ctr"/>
-          <a:lstStyle/>
-          <a:p>
-            <a:pPr marL="0" indent="0">
-              <a:buNone/>
-            </a:pPr>
-            <a:r>
-              <a:rPr lang="en-US" sz="1400" b="1" dirty="0">
-                <a:solidFill>
-                  <a:srgbClr val="17324D"/>
-                </a:solidFill>
-              </a:rPr>
-              <a:t>Journées bien-être</a:t>
-            </a:r>
-            <a:endParaRPr lang="en-US" sz="1400" dirty="0"/>
-          </a:p>
-        </p:txBody>
-      </p:sp>
-      <p:sp>
-        <p:nvSpPr>
-          <p:cNvPr id="11" name="Text 9"/>
-          <p:cNvSpPr/>
-          <p:nvPr/>
-        </p:nvSpPr>
-        <p:spPr>
-          <a:xfrm>
-            <a:off x="4663440" y="1947672"/>
-            <a:ext cx="2953512" cy="1216152"/>
-          </a:xfrm>
-          <a:prstGeom prst="rect">
-            <a:avLst/>
-          </a:prstGeom>
-          <a:noFill/>
-          <a:ln/>
-        </p:spPr>
-        <p:txBody>
-          <a:bodyPr wrap="square" lIns="254" tIns="254" rIns="254" bIns="254" rtlCol="0" anchor="t"/>
-          <a:lstStyle/>
-          <a:p>
-            <a:r>
-              <a:rPr lang="fr-FR" sz="1120" dirty="0">
-                <a:solidFill>
-                  <a:srgbClr val="243447"/>
-                </a:solidFill>
-              </a:rPr>
-              <a:t>Éligibilité et nombre de jours attribués selon les activités réalisées au cours des 12 derniers mois.</a:t>
-            </a:r>
-            <a:endParaRPr lang="en-US" sz="1120" dirty="0">
-              <a:solidFill>
-                <a:srgbClr val="243447"/>
-              </a:solidFill>
-            </a:endParaRPr>
-          </a:p>
-        </p:txBody>
-      </p:sp>
-      <p:sp>
-        <p:nvSpPr>
-          <p:cNvPr id="12" name="Shape 10"/>
-          <p:cNvSpPr/>
-          <p:nvPr/>
-        </p:nvSpPr>
-        <p:spPr>
-          <a:xfrm>
-            <a:off x="8183880" y="1417320"/>
-            <a:ext cx="3337560" cy="1874520"/>
+          </a:ln>
+        </p:spPr>
+        <p:style>
+          <a:lnRef idx="1">
+            <a:schemeClr val="accent1"/>
+          </a:lnRef>
+          <a:fillRef idx="3">
+            <a:schemeClr val="accent1"/>
+          </a:fillRef>
+          <a:effectRef idx="2">
+            <a:schemeClr val="accent1"/>
+          </a:effectRef>
+          <a:fontRef idx="minor">
+            <a:schemeClr val="lt1"/>
+          </a:fontRef>
+        </p:style>
+        <p:txBody>
+          <a:bodyPr lIns="109728" tIns="82296" rIns="109728" bIns="54864" rtlCol="0" anchor="ctr"/>
+          <a:lstStyle/>
+          <a:p>
+            <a:pPr algn="ctr">
+              <a:defRPr sz="1300" b="1">
+                <a:solidFill>
+                  <a:srgbClr val="102F56"/>
+                </a:solidFill>
+                <a:latin typeface="Aptos"/>
+              </a:defRPr>
+            </a:pPr>
+            <a:r>
+              <a:t>JOURNÉES BIEN-ÊTRE</a:t>
+            </a:r>
+          </a:p>
+          <a:p>
+            <a:pPr algn="ctr">
+              <a:defRPr sz="1100">
+                <a:solidFill>
+                  <a:srgbClr val="4E6080"/>
+                </a:solidFill>
+                <a:latin typeface="Aptos"/>
+              </a:defRPr>
+            </a:pPr>
+            <a:r>
+              <a:t>5 journées pour les salariés ayant réalisé au moins 15 activités sur 12 mois.</a:t>
+            </a:r>
+          </a:p>
+        </p:txBody>
+      </p:sp>
+      <p:sp>
+        <p:nvSpPr>
+          <p:cNvPr id="9" name="Rounded Rectangle 8"/>
+          <p:cNvSpPr/>
+          <p:nvPr/>
+        </p:nvSpPr>
+        <p:spPr>
+          <a:xfrm>
+            <a:off x="6537960" y="1600200"/>
+            <a:ext cx="2743200" cy="1554480"/>
           </a:xfrm>
           <a:prstGeom prst="roundRect">
-            <a:avLst>
-              <a:gd name="adj" fmla="val 3902"/>
-            </a:avLst>
+            <a:avLst/>
           </a:prstGeom>
           <a:solidFill>
-            <a:srgbClr val="FFFFFF"/>
+            <a:srgbClr val="F5F8FD"/>
           </a:solidFill>
           <a:ln w="12700">
             <a:solidFill>
-              <a:srgbClr val="DCE5EF"/>
+              <a:srgbClr val="E3E9F4"/>
             </a:solidFill>
-            <a:prstDash val="solid"/>
-          </a:ln>
-        </p:spPr>
-      </p:sp>
-      <p:sp>
-        <p:nvSpPr>
-          <p:cNvPr id="13" name="Shape 11"/>
-          <p:cNvSpPr/>
-          <p:nvPr/>
-        </p:nvSpPr>
-        <p:spPr>
-          <a:xfrm>
-            <a:off x="8183880" y="1417320"/>
-            <a:ext cx="73152" cy="1874520"/>
-          </a:xfrm>
-          <a:prstGeom prst="rect">
+          </a:ln>
+        </p:spPr>
+        <p:style>
+          <a:lnRef idx="1">
+            <a:schemeClr val="accent1"/>
+          </a:lnRef>
+          <a:fillRef idx="3">
+            <a:schemeClr val="accent1"/>
+          </a:fillRef>
+          <a:effectRef idx="2">
+            <a:schemeClr val="accent1"/>
+          </a:effectRef>
+          <a:fontRef idx="minor">
+            <a:schemeClr val="lt1"/>
+          </a:fontRef>
+        </p:style>
+        <p:txBody>
+          <a:bodyPr lIns="109728" tIns="82296" rIns="109728" bIns="54864" rtlCol="0" anchor="ctr"/>
+          <a:lstStyle/>
+          <a:p>
+            <a:pPr algn="ctr">
+              <a:defRPr sz="1300" b="1">
+                <a:solidFill>
+                  <a:srgbClr val="102F56"/>
+                </a:solidFill>
+                <a:latin typeface="Aptos"/>
+              </a:defRPr>
+            </a:pPr>
+            <a:r>
+              <a:t>PRATIQUES SPORTIVES</a:t>
+            </a:r>
+          </a:p>
+          <a:p>
+            <a:pPr algn="ctr">
+              <a:defRPr sz="1100">
+                <a:solidFill>
+                  <a:srgbClr val="4E6080"/>
+                </a:solidFill>
+                <a:latin typeface="Aptos"/>
+              </a:defRPr>
+            </a:pPr>
+            <a:r>
+              <a:t>Répartition des activités par sport, salarié et Business Unit.</a:t>
+            </a:r>
+          </a:p>
+        </p:txBody>
+      </p:sp>
+      <p:sp>
+        <p:nvSpPr>
+          <p:cNvPr id="10" name="Rounded Rectangle 9"/>
+          <p:cNvSpPr/>
+          <p:nvPr/>
+        </p:nvSpPr>
+        <p:spPr>
+          <a:xfrm>
+            <a:off x="9464040" y="1600200"/>
+            <a:ext cx="2057400" cy="1554480"/>
+          </a:xfrm>
+          <a:prstGeom prst="roundRect">
             <a:avLst/>
           </a:prstGeom>
           <a:solidFill>
-            <a:srgbClr val="2F6BFF"/>
+            <a:srgbClr val="E2EBFC"/>
           </a:solidFill>
           <a:ln w="12700">
             <a:solidFill>
-              <a:srgbClr val="2F6BFF"/>
+              <a:srgbClr val="E3E9F4"/>
             </a:solidFill>
-            <a:prstDash val="solid"/>
-          </a:ln>
-        </p:spPr>
-      </p:sp>
-      <p:sp>
-        <p:nvSpPr>
-          <p:cNvPr id="14" name="Text 12"/>
-          <p:cNvSpPr/>
-          <p:nvPr/>
-        </p:nvSpPr>
-        <p:spPr>
-          <a:xfrm>
-            <a:off x="8412480" y="1581912"/>
-            <a:ext cx="2953512" cy="256032"/>
-          </a:xfrm>
-          <a:prstGeom prst="rect">
-            <a:avLst/>
-          </a:prstGeom>
-          <a:noFill/>
-          <a:ln/>
-        </p:spPr>
-        <p:txBody>
-          <a:bodyPr wrap="square" lIns="0" tIns="0" rIns="0" bIns="0" rtlCol="0" anchor="ctr"/>
-          <a:lstStyle/>
-          <a:p>
-            <a:pPr marL="0" indent="0">
-              <a:buNone/>
-            </a:pPr>
-            <a:r>
-              <a:rPr lang="en-US" sz="1400" b="1" dirty="0">
-                <a:solidFill>
-                  <a:srgbClr val="17324D"/>
-                </a:solidFill>
-              </a:rPr>
-              <a:t>Pratiques sportives</a:t>
-            </a:r>
-            <a:endParaRPr lang="en-US" sz="1400" dirty="0"/>
-          </a:p>
-        </p:txBody>
-      </p:sp>
-      <p:sp>
-        <p:nvSpPr>
-          <p:cNvPr id="15" name="Text 13"/>
-          <p:cNvSpPr/>
-          <p:nvPr/>
-        </p:nvSpPr>
-        <p:spPr>
-          <a:xfrm>
-            <a:off x="8412480" y="1947672"/>
-            <a:ext cx="2953512" cy="1216152"/>
-          </a:xfrm>
-          <a:prstGeom prst="rect">
-            <a:avLst/>
-          </a:prstGeom>
-          <a:noFill/>
-          <a:ln/>
-        </p:spPr>
-        <p:txBody>
-          <a:bodyPr wrap="square" lIns="254" tIns="254" rIns="254" bIns="254" rtlCol="0" anchor="t"/>
-          <a:lstStyle/>
-          <a:p>
-            <a:pPr marL="0" indent="0">
-              <a:buNone/>
-            </a:pPr>
-            <a:r>
-              <a:rPr lang="en-US" sz="1120" dirty="0">
-                <a:solidFill>
-                  <a:srgbClr val="243447"/>
-                </a:solidFill>
-              </a:rPr>
-              <a:t>Répartition des activités et lecture par salarié / Business Unit.</a:t>
-            </a:r>
-            <a:endParaRPr lang="en-US" sz="1120" dirty="0"/>
-          </a:p>
-        </p:txBody>
-      </p:sp>
-      <p:sp>
-        <p:nvSpPr>
-          <p:cNvPr id="16" name="Shape 14"/>
-          <p:cNvSpPr/>
-          <p:nvPr/>
-        </p:nvSpPr>
-        <p:spPr>
-          <a:xfrm>
-            <a:off x="960120" y="3886200"/>
-            <a:ext cx="10287000" cy="1143000"/>
+          </a:ln>
+        </p:spPr>
+        <p:style>
+          <a:lnRef idx="1">
+            <a:schemeClr val="accent1"/>
+          </a:lnRef>
+          <a:fillRef idx="3">
+            <a:schemeClr val="accent1"/>
+          </a:fillRef>
+          <a:effectRef idx="2">
+            <a:schemeClr val="accent1"/>
+          </a:effectRef>
+          <a:fontRef idx="minor">
+            <a:schemeClr val="lt1"/>
+          </a:fontRef>
+        </p:style>
+        <p:txBody>
+          <a:bodyPr lIns="109728" tIns="82296" rIns="109728" bIns="54864" rtlCol="0" anchor="ctr"/>
+          <a:lstStyle/>
+          <a:p>
+            <a:pPr algn="ctr">
+              <a:defRPr sz="1300" b="1">
+                <a:solidFill>
+                  <a:srgbClr val="102F56"/>
+                </a:solidFill>
+                <a:latin typeface="Aptos"/>
+              </a:defRPr>
+            </a:pPr>
+            <a:r>
+              <a:t>POWER BI</a:t>
+            </a:r>
+          </a:p>
+          <a:p>
+            <a:pPr algn="ctr">
+              <a:defRPr sz="1050">
+                <a:solidFill>
+                  <a:srgbClr val="4E6080"/>
+                </a:solidFill>
+                <a:latin typeface="Aptos"/>
+              </a:defRPr>
+            </a:pPr>
+            <a:r>
+              <a:t>Couche de restitution des résultats métier.</a:t>
+            </a:r>
+          </a:p>
+        </p:txBody>
+      </p:sp>
+      <p:sp>
+        <p:nvSpPr>
+          <p:cNvPr id="11" name="Rounded Rectangle 10"/>
+          <p:cNvSpPr/>
+          <p:nvPr/>
+        </p:nvSpPr>
+        <p:spPr>
+          <a:xfrm>
+            <a:off x="1828800" y="3703320"/>
+            <a:ext cx="1920240" cy="685800"/>
           </a:xfrm>
           <a:prstGeom prst="roundRect">
-            <a:avLst>
-              <a:gd name="adj" fmla="val 6400"/>
-            </a:avLst>
+            <a:avLst/>
           </a:prstGeom>
           <a:solidFill>
-            <a:srgbClr val="EAF0FF"/>
+            <a:srgbClr val="2575F0"/>
           </a:solidFill>
           <a:ln w="12700">
             <a:solidFill>
-              <a:srgbClr val="D7E2FF"/>
+              <a:srgbClr val="E3E9F4"/>
             </a:solidFill>
-            <a:prstDash val="solid"/>
-          </a:ln>
-        </p:spPr>
-      </p:sp>
-      <p:sp>
-        <p:nvSpPr>
-          <p:cNvPr id="17" name="Text 15"/>
-          <p:cNvSpPr/>
-          <p:nvPr/>
-        </p:nvSpPr>
-        <p:spPr>
-          <a:xfrm>
-            <a:off x="1325880" y="4224528"/>
-            <a:ext cx="9555480" cy="457200"/>
-          </a:xfrm>
-          <a:prstGeom prst="rect">
-            <a:avLst/>
-          </a:prstGeom>
-          <a:noFill/>
-          <a:ln/>
-        </p:spPr>
-        <p:txBody>
-          <a:bodyPr wrap="square" lIns="0" tIns="0" rIns="0" bIns="0" rtlCol="0" anchor="ctr"/>
-          <a:lstStyle/>
-          <a:p>
-            <a:pPr marL="0" indent="0" algn="ctr">
-              <a:buNone/>
-            </a:pPr>
-            <a:r>
-              <a:rPr lang="en-US" sz="1700" b="1" dirty="0">
-                <a:solidFill>
-                  <a:srgbClr val="17324D"/>
-                </a:solidFill>
-              </a:rPr>
-              <a:t>Power BI devient la couche de restitution : il ne recalcule pas les règles métier, il visualise les résultats préparés par le pipeline.</a:t>
-            </a:r>
-            <a:endParaRPr lang="en-US" sz="1700" dirty="0"/>
-          </a:p>
-        </p:txBody>
-      </p:sp>
-      <p:sp>
-        <p:nvSpPr>
-          <p:cNvPr id="18" name="Text 16"/>
-          <p:cNvSpPr/>
-          <p:nvPr/>
-        </p:nvSpPr>
-        <p:spPr>
-          <a:xfrm>
-            <a:off x="4114800" y="5303520"/>
-            <a:ext cx="3931920" cy="274320"/>
-          </a:xfrm>
-          <a:prstGeom prst="rect">
-            <a:avLst/>
-          </a:prstGeom>
-          <a:noFill/>
-          <a:ln/>
-        </p:spPr>
-        <p:txBody>
-          <a:bodyPr wrap="square" lIns="0" tIns="0" rIns="0" bIns="0" rtlCol="0" anchor="ctr"/>
-          <a:lstStyle/>
-          <a:p>
-            <a:pPr marL="0" indent="0" algn="ctr">
-              <a:buNone/>
-            </a:pPr>
-            <a:r>
-              <a:rPr lang="en-US" sz="1200" dirty="0">
-                <a:solidFill>
-                  <a:srgbClr val="66788A"/>
-                </a:solidFill>
-              </a:rPr>
-              <a:t>Fichier livré : Sport_data.pbix</a:t>
-            </a:r>
-            <a:endParaRPr lang="en-US" sz="1200" dirty="0"/>
-          </a:p>
-        </p:txBody>
-      </p:sp>
-      <p:sp>
-        <p:nvSpPr>
-          <p:cNvPr id="25" name="Slide Number Placeholder 0"/>
-          <p:cNvSpPr>
-            <a:spLocks noGrp="1"/>
-          </p:cNvSpPr>
-          <p:nvPr>
-            <p:ph type="sldNum" sz="quarter" idx="4294967295"/>
-          </p:nvPr>
-        </p:nvSpPr>
-        <p:spPr>
-          <a:xfrm>
-            <a:off x="11631168" y="6473952"/>
-            <a:ext cx="800000" cy="300000"/>
-          </a:xfrm>
-          <a:prstGeom prst="rect">
-            <a:avLst/>
-          </a:prstGeom>
-          <a:extLst>
-            <a:ext uri="{C572A759-6A51-4108-AA02-DFA0A04FC94B}">
-              <ma14:wrappingTextBoxFlag xmlns:ma14="http://schemas.microsoft.com/office/mac/drawingml/2011/main" xmlns="" val="0"/>
-            </a:ext>
-          </a:extLst>
-        </p:spPr>
-        <p:txBody>
-          <a:bodyPr/>
-          <a:lstStyle>
-            <a:lvl1pPr>
-              <a:defRPr sz="800">
-                <a:solidFill>
-                  <a:srgbClr val="718096"/>
-                </a:solidFill>
+          </a:ln>
+        </p:spPr>
+        <p:style>
+          <a:lnRef idx="1">
+            <a:schemeClr val="accent1"/>
+          </a:lnRef>
+          <a:fillRef idx="3">
+            <a:schemeClr val="accent1"/>
+          </a:fillRef>
+          <a:effectRef idx="2">
+            <a:schemeClr val="accent1"/>
+          </a:effectRef>
+          <a:fontRef idx="minor">
+            <a:schemeClr val="lt1"/>
+          </a:fontRef>
+        </p:style>
+        <p:txBody>
+          <a:bodyPr lIns="109728" tIns="82296" rIns="109728" bIns="54864" rtlCol="0" anchor="ctr"/>
+          <a:lstStyle/>
+          <a:p>
+            <a:pPr algn="ctr">
+              <a:defRPr sz="1150" b="1">
+                <a:solidFill>
+                  <a:srgbClr val="FFFFFF"/>
+                </a:solidFill>
+                <a:latin typeface="Aptos"/>
               </a:defRPr>
-            </a:lvl1pPr>
-          </a:lstStyle>
-          <a:p>
-            <a:pPr algn="l"/>
-            <a:fld id="{F7021451-1387-4CA6-816F-3879F97B5CBC}" type="slidenum">
-              <a:rPr lang="en-US" b="0"/>
-              <a:t>10</a:t>
-            </a:fld>
-            <a:endParaRPr lang="en-US"/>
+            </a:pPr>
+            <a:r>
+              <a:t>Nouvelle version Delta</a:t>
+            </a:r>
+          </a:p>
+        </p:txBody>
+      </p:sp>
+      <p:cxnSp>
+        <p:nvCxnSpPr>
+          <p:cNvPr id="12" name="Connector 11"/>
+          <p:cNvCxnSpPr/>
+          <p:nvPr/>
+        </p:nvCxnSpPr>
+        <p:spPr>
+          <a:xfrm>
+            <a:off x="3749039" y="4050791"/>
+            <a:ext cx="411481" cy="0"/>
+          </a:xfrm>
+          <a:prstGeom prst="line">
+            <a:avLst/>
+          </a:prstGeom>
+          <a:ln w="19050">
+            <a:solidFill>
+              <a:srgbClr val="3C4E6C"/>
+            </a:solidFill>
+          </a:ln>
+        </p:spPr>
+        <p:style>
+          <a:lnRef idx="2">
+            <a:schemeClr val="accent1"/>
+          </a:lnRef>
+          <a:fillRef idx="0">
+            <a:schemeClr val="accent1"/>
+          </a:fillRef>
+          <a:effectRef idx="1">
+            <a:schemeClr val="accent1"/>
+          </a:effectRef>
+          <a:fontRef idx="minor">
+            <a:schemeClr val="tx1"/>
+          </a:fontRef>
+        </p:style>
+      </p:cxnSp>
+      <p:sp>
+        <p:nvSpPr>
+          <p:cNvPr id="13" name="Rounded Rectangle 12"/>
+          <p:cNvSpPr/>
+          <p:nvPr/>
+        </p:nvSpPr>
+        <p:spPr>
+          <a:xfrm>
+            <a:off x="4160520" y="3703320"/>
+            <a:ext cx="1920240" cy="685800"/>
+          </a:xfrm>
+          <a:prstGeom prst="roundRect">
+            <a:avLst/>
+          </a:prstGeom>
+          <a:solidFill>
+            <a:srgbClr val="6D3FE2"/>
+          </a:solidFill>
+          <a:ln w="12700">
+            <a:solidFill>
+              <a:srgbClr val="E3E9F4"/>
+            </a:solidFill>
+          </a:ln>
+        </p:spPr>
+        <p:style>
+          <a:lnRef idx="1">
+            <a:schemeClr val="accent1"/>
+          </a:lnRef>
+          <a:fillRef idx="3">
+            <a:schemeClr val="accent1"/>
+          </a:fillRef>
+          <a:effectRef idx="2">
+            <a:schemeClr val="accent1"/>
+          </a:effectRef>
+          <a:fontRef idx="minor">
+            <a:schemeClr val="lt1"/>
+          </a:fontRef>
+        </p:style>
+        <p:txBody>
+          <a:bodyPr lIns="109728" tIns="82296" rIns="109728" bIns="54864" rtlCol="0" anchor="ctr"/>
+          <a:lstStyle/>
+          <a:p>
+            <a:pPr algn="ctr">
+              <a:defRPr sz="1150" b="1">
+                <a:solidFill>
+                  <a:srgbClr val="FFFFFF"/>
+                </a:solidFill>
+                <a:latin typeface="Aptos"/>
+              </a:defRPr>
+            </a:pPr>
+            <a:r>
+              <a:t>Worker automatique</a:t>
+            </a:r>
+          </a:p>
+        </p:txBody>
+      </p:sp>
+      <p:cxnSp>
+        <p:nvCxnSpPr>
+          <p:cNvPr id="14" name="Connector 13"/>
+          <p:cNvCxnSpPr/>
+          <p:nvPr/>
+        </p:nvCxnSpPr>
+        <p:spPr>
+          <a:xfrm>
+            <a:off x="6080760" y="4050791"/>
+            <a:ext cx="411480" cy="0"/>
+          </a:xfrm>
+          <a:prstGeom prst="line">
+            <a:avLst/>
+          </a:prstGeom>
+          <a:ln w="19050">
+            <a:solidFill>
+              <a:srgbClr val="3C4E6C"/>
+            </a:solidFill>
+          </a:ln>
+        </p:spPr>
+        <p:style>
+          <a:lnRef idx="2">
+            <a:schemeClr val="accent1"/>
+          </a:lnRef>
+          <a:fillRef idx="0">
+            <a:schemeClr val="accent1"/>
+          </a:fillRef>
+          <a:effectRef idx="1">
+            <a:schemeClr val="accent1"/>
+          </a:effectRef>
+          <a:fontRef idx="minor">
+            <a:schemeClr val="tx1"/>
+          </a:fontRef>
+        </p:style>
+      </p:cxnSp>
+      <p:sp>
+        <p:nvSpPr>
+          <p:cNvPr id="15" name="Rounded Rectangle 14"/>
+          <p:cNvSpPr/>
+          <p:nvPr/>
+        </p:nvSpPr>
+        <p:spPr>
+          <a:xfrm>
+            <a:off x="6492240" y="3703320"/>
+            <a:ext cx="1920240" cy="685800"/>
+          </a:xfrm>
+          <a:prstGeom prst="roundRect">
+            <a:avLst/>
+          </a:prstGeom>
+          <a:solidFill>
+            <a:srgbClr val="29AB5E"/>
+          </a:solidFill>
+          <a:ln w="12700">
+            <a:solidFill>
+              <a:srgbClr val="E3E9F4"/>
+            </a:solidFill>
+          </a:ln>
+        </p:spPr>
+        <p:style>
+          <a:lnRef idx="1">
+            <a:schemeClr val="accent1"/>
+          </a:lnRef>
+          <a:fillRef idx="3">
+            <a:schemeClr val="accent1"/>
+          </a:fillRef>
+          <a:effectRef idx="2">
+            <a:schemeClr val="accent1"/>
+          </a:effectRef>
+          <a:fontRef idx="minor">
+            <a:schemeClr val="lt1"/>
+          </a:fontRef>
+        </p:style>
+        <p:txBody>
+          <a:bodyPr lIns="109728" tIns="82296" rIns="109728" bIns="54864" rtlCol="0" anchor="ctr"/>
+          <a:lstStyle/>
+          <a:p>
+            <a:pPr algn="ctr">
+              <a:defRPr sz="1050" b="1">
+                <a:solidFill>
+                  <a:srgbClr val="FFFFFF"/>
+                </a:solidFill>
+                <a:latin typeface="Aptos"/>
+              </a:defRPr>
+            </a:pPr>
+            <a:r>
+              <a:t>employee_benefits</a:t>
+            </a:r>
+          </a:p>
+        </p:txBody>
+      </p:sp>
+      <p:cxnSp>
+        <p:nvCxnSpPr>
+          <p:cNvPr id="16" name="Connector 15"/>
+          <p:cNvCxnSpPr/>
+          <p:nvPr/>
+        </p:nvCxnSpPr>
+        <p:spPr>
+          <a:xfrm>
+            <a:off x="8412480" y="4050791"/>
+            <a:ext cx="411480" cy="0"/>
+          </a:xfrm>
+          <a:prstGeom prst="line">
+            <a:avLst/>
+          </a:prstGeom>
+          <a:ln w="19050">
+            <a:solidFill>
+              <a:srgbClr val="3C4E6C"/>
+            </a:solidFill>
+          </a:ln>
+        </p:spPr>
+        <p:style>
+          <a:lnRef idx="2">
+            <a:schemeClr val="accent1"/>
+          </a:lnRef>
+          <a:fillRef idx="0">
+            <a:schemeClr val="accent1"/>
+          </a:fillRef>
+          <a:effectRef idx="1">
+            <a:schemeClr val="accent1"/>
+          </a:effectRef>
+          <a:fontRef idx="minor">
+            <a:schemeClr val="tx1"/>
+          </a:fontRef>
+        </p:style>
+      </p:cxnSp>
+      <p:sp>
+        <p:nvSpPr>
+          <p:cNvPr id="17" name="Rounded Rectangle 16"/>
+          <p:cNvSpPr/>
+          <p:nvPr/>
+        </p:nvSpPr>
+        <p:spPr>
+          <a:xfrm>
+            <a:off x="8823960" y="3703320"/>
+            <a:ext cx="1600200" cy="685800"/>
+          </a:xfrm>
+          <a:prstGeom prst="roundRect">
+            <a:avLst/>
+          </a:prstGeom>
+          <a:solidFill>
+            <a:srgbClr val="FACD57"/>
+          </a:solidFill>
+          <a:ln w="12700">
+            <a:solidFill>
+              <a:srgbClr val="E3E9F4"/>
+            </a:solidFill>
+          </a:ln>
+        </p:spPr>
+        <p:style>
+          <a:lnRef idx="1">
+            <a:schemeClr val="accent1"/>
+          </a:lnRef>
+          <a:fillRef idx="3">
+            <a:schemeClr val="accent1"/>
+          </a:fillRef>
+          <a:effectRef idx="2">
+            <a:schemeClr val="accent1"/>
+          </a:effectRef>
+          <a:fontRef idx="minor">
+            <a:schemeClr val="lt1"/>
+          </a:fontRef>
+        </p:style>
+        <p:txBody>
+          <a:bodyPr lIns="109728" tIns="82296" rIns="109728" bIns="54864" rtlCol="0" anchor="ctr"/>
+          <a:lstStyle/>
+          <a:p>
+            <a:pPr algn="ctr">
+              <a:defRPr sz="1050" b="1">
+                <a:solidFill>
+                  <a:srgbClr val="14181F"/>
+                </a:solidFill>
+                <a:latin typeface="Aptos"/>
+              </a:defRPr>
+            </a:pPr>
+            <a:r>
+              <a:t>CSV régénérés</a:t>
+            </a:r>
+          </a:p>
+        </p:txBody>
+      </p:sp>
+      <p:sp>
+        <p:nvSpPr>
+          <p:cNvPr id="18" name="Rounded Rectangle 17"/>
+          <p:cNvSpPr/>
+          <p:nvPr/>
+        </p:nvSpPr>
+        <p:spPr>
+          <a:xfrm>
+            <a:off x="777240" y="5989320"/>
+            <a:ext cx="10652760" cy="438912"/>
+          </a:xfrm>
+          <a:prstGeom prst="roundRect">
+            <a:avLst/>
+          </a:prstGeom>
+          <a:solidFill>
+            <a:srgbClr val="E2EBFC"/>
+          </a:solidFill>
+          <a:ln>
+            <a:noFill/>
+          </a:ln>
+        </p:spPr>
+        <p:style>
+          <a:lnRef idx="1">
+            <a:schemeClr val="accent1"/>
+          </a:lnRef>
+          <a:fillRef idx="3">
+            <a:schemeClr val="accent1"/>
+          </a:fillRef>
+          <a:effectRef idx="2">
+            <a:schemeClr val="accent1"/>
+          </a:effectRef>
+          <a:fontRef idx="minor">
+            <a:schemeClr val="lt1"/>
+          </a:fontRef>
+        </p:style>
+        <p:txBody>
+          <a:bodyPr rtlCol="0" anchor="ctr"/>
+          <a:lstStyle/>
+          <a:p>
+            <a:pPr algn="ctr">
+              <a:defRPr sz="1200" b="1">
+                <a:solidFill>
+                  <a:srgbClr val="102F56"/>
+                </a:solidFill>
+                <a:latin typeface="Aptos"/>
+              </a:defRPr>
+            </a:pPr>
+            <a:r>
+              <a:t>Power BI restitue les données préparées par le pipeline ; une actualisation affiche les derniers résultats.</a:t>
+            </a:r>
           </a:p>
         </p:txBody>
       </p:sp>
@@ -3205,15 +3408,7 @@
                   <a:srgbClr val="17324D"/>
                 </a:solidFill>
               </a:rPr>
-              <a:t>10</a:t>
-            </a:r>
-            <a:r>
-              <a:rPr lang="en-US" sz="2600" b="1" dirty="0" smtClean="0">
-                <a:solidFill>
-                  <a:srgbClr val="17324D"/>
-                </a:solidFill>
-              </a:rPr>
-              <a:t>. Tableau de </a:t>
+              <a:t>10. Tableau de </a:t>
             </a:r>
             <a:r>
               <a:rPr lang="en-US" sz="2600" b="1" dirty="0" err="1" smtClean="0">
@@ -3240,51 +3435,6 @@
               <a:t>BI</a:t>
             </a:r>
             <a:endParaRPr lang="en-US" sz="2600" dirty="0"/>
-          </a:p>
-        </p:txBody>
-      </p:sp>
-      <p:sp>
-        <p:nvSpPr>
-          <p:cNvPr id="25" name="Slide Number Placeholder 0"/>
-          <p:cNvSpPr>
-            <a:spLocks noGrp="1"/>
-          </p:cNvSpPr>
-          <p:nvPr>
-            <p:ph type="sldNum" sz="quarter" idx="4294967295"/>
-          </p:nvPr>
-        </p:nvSpPr>
-        <p:spPr>
-          <a:xfrm>
-            <a:off x="11631168" y="6473952"/>
-            <a:ext cx="800000" cy="300000"/>
-          </a:xfrm>
-          <a:prstGeom prst="rect">
-            <a:avLst/>
-          </a:prstGeom>
-          <a:extLst>
-            <a:ext uri="{C572A759-6A51-4108-AA02-DFA0A04FC94B}">
-              <ma14:wrappingTextBoxFlag xmlns:ma14="http://schemas.microsoft.com/office/mac/drawingml/2011/main" xmlns="" val="0"/>
-            </a:ext>
-          </a:extLst>
-        </p:spPr>
-        <p:txBody>
-          <a:bodyPr/>
-          <a:lstStyle>
-            <a:lvl1pPr>
-              <a:defRPr sz="800">
-                <a:solidFill>
-                  <a:srgbClr val="718096"/>
-                </a:solidFill>
-              </a:defRPr>
-            </a:lvl1pPr>
-          </a:lstStyle>
-          <a:p>
-            <a:pPr algn="l"/>
-            <a:fld id="{F7021451-1387-4CA6-816F-3879F97B5CBC}" type="slidenum">
-              <a:rPr lang="en-US" b="0"/>
-              <a:t>11</a:t>
-            </a:fld>
-            <a:endParaRPr lang="en-US"/>
           </a:p>
         </p:txBody>
       </p:sp>
@@ -3346,761 +3496,751 @@
       </p:grpSpPr>
       <p:sp>
         <p:nvSpPr>
-          <p:cNvPr id="2" name="Text 0"/>
-          <p:cNvSpPr/>
-          <p:nvPr/>
-        </p:nvSpPr>
-        <p:spPr>
-          <a:xfrm>
-            <a:off x="594360" y="438912"/>
-            <a:ext cx="11018520" cy="438912"/>
+          <p:cNvPr id="2" name="Rectangle 1"/>
+          <p:cNvSpPr/>
+          <p:nvPr/>
+        </p:nvSpPr>
+        <p:spPr>
+          <a:xfrm>
+            <a:off x="0" y="0"/>
+            <a:ext cx="12192000" cy="182880"/>
+          </a:xfrm>
+          <a:prstGeom prst="rect">
+            <a:avLst/>
+          </a:prstGeom>
+          <a:solidFill>
+            <a:srgbClr val="2E65EB"/>
+          </a:solidFill>
+          <a:ln>
+            <a:noFill/>
+          </a:ln>
+        </p:spPr>
+        <p:style>
+          <a:lnRef idx="1">
+            <a:schemeClr val="accent1"/>
+          </a:lnRef>
+          <a:fillRef idx="3">
+            <a:schemeClr val="accent1"/>
+          </a:fillRef>
+          <a:effectRef idx="2">
+            <a:schemeClr val="accent1"/>
+          </a:effectRef>
+          <a:fontRef idx="minor">
+            <a:schemeClr val="lt1"/>
+          </a:fontRef>
+        </p:style>
+        <p:txBody>
+          <a:bodyPr rtlCol="0" anchor="ctr"/>
+          <a:lstStyle/>
+          <a:p>
+            <a:pPr algn="ctr"/>
+            <a:endParaRPr/>
+          </a:p>
+        </p:txBody>
+      </p:sp>
+      <p:sp>
+        <p:nvSpPr>
+          <p:cNvPr id="3" name="TextBox 2"/>
+          <p:cNvSpPr txBox="1"/>
+          <p:nvPr/>
+        </p:nvSpPr>
+        <p:spPr>
+          <a:xfrm>
+            <a:off x="566928" y="384048"/>
+            <a:ext cx="10972800" cy="502920"/>
           </a:xfrm>
           <a:prstGeom prst="rect">
             <a:avLst/>
           </a:prstGeom>
           <a:noFill/>
-          <a:ln/>
-        </p:spPr>
-        <p:txBody>
-          <a:bodyPr wrap="square" lIns="0" tIns="0" rIns="0" bIns="0" rtlCol="0" anchor="ctr"/>
-          <a:lstStyle/>
-          <a:p>
-            <a:pPr marL="0" indent="0">
-              <a:buNone/>
-            </a:pPr>
-            <a:r>
-              <a:rPr lang="en-US" sz="2600" b="1" dirty="0" smtClean="0">
-                <a:solidFill>
-                  <a:srgbClr val="17324D"/>
-                </a:solidFill>
-              </a:rPr>
-              <a:t>11. </a:t>
-            </a:r>
-            <a:r>
-              <a:rPr lang="en-US" sz="2600" b="1" dirty="0">
-                <a:solidFill>
-                  <a:srgbClr val="17324D"/>
-                </a:solidFill>
-              </a:rPr>
-              <a:t>Notifications Slack et démonstration live</a:t>
-            </a:r>
-            <a:endParaRPr lang="en-US" sz="2600" dirty="0"/>
-          </a:p>
-        </p:txBody>
-      </p:sp>
-      <p:sp>
-        <p:nvSpPr>
-          <p:cNvPr id="3" name="Text 1"/>
-          <p:cNvSpPr/>
-          <p:nvPr/>
-        </p:nvSpPr>
-        <p:spPr>
-          <a:xfrm>
-            <a:off x="612648" y="932688"/>
-            <a:ext cx="10789920" cy="292608"/>
+        </p:spPr>
+        <p:txBody>
+          <a:bodyPr wrap="none">
+            <a:spAutoFit/>
+          </a:bodyPr>
+          <a:lstStyle/>
+          <a:p>
+            <a:pPr>
+              <a:defRPr sz="2700" b="1">
+                <a:solidFill>
+                  <a:srgbClr val="102F56"/>
+                </a:solidFill>
+                <a:latin typeface="Aptos Display"/>
+              </a:defRPr>
+            </a:pPr>
+            <a:r>
+              <a:t>11. Démonstration live : 1 événement → pipeline automatique</a:t>
+            </a:r>
+          </a:p>
+        </p:txBody>
+      </p:sp>
+      <p:sp>
+        <p:nvSpPr>
+          <p:cNvPr id="4" name="TextBox 3"/>
+          <p:cNvSpPr txBox="1"/>
+          <p:nvPr/>
+        </p:nvSpPr>
+        <p:spPr>
+          <a:xfrm>
+            <a:off x="576072" y="987552"/>
+            <a:ext cx="10972800" cy="411480"/>
           </a:xfrm>
           <a:prstGeom prst="rect">
             <a:avLst/>
           </a:prstGeom>
           <a:noFill/>
-          <a:ln/>
-        </p:spPr>
-        <p:txBody>
-          <a:bodyPr wrap="square" lIns="0" tIns="0" rIns="0" bIns="0" rtlCol="0" anchor="ctr"/>
-          <a:lstStyle/>
-          <a:p>
-            <a:pPr marL="0" indent="0">
-              <a:buNone/>
-            </a:pPr>
-            <a:r>
-              <a:rPr lang="en-US" sz="1150" dirty="0">
-                <a:solidFill>
-                  <a:srgbClr val="66788A"/>
-                </a:solidFill>
-              </a:rPr>
-              <a:t>Prouver que le flux réagit à une nouvelle activité.</a:t>
-            </a:r>
-            <a:endParaRPr lang="en-US" sz="1150" dirty="0"/>
-          </a:p>
-        </p:txBody>
-      </p:sp>
-      <p:sp>
-        <p:nvSpPr>
-          <p:cNvPr id="4" name="Shape 2"/>
-          <p:cNvSpPr/>
-          <p:nvPr/>
-        </p:nvSpPr>
-        <p:spPr>
-          <a:xfrm>
-            <a:off x="822960" y="1463040"/>
-            <a:ext cx="4663440" cy="3429000"/>
+        </p:spPr>
+        <p:txBody>
+          <a:bodyPr wrap="none">
+            <a:spAutoFit/>
+          </a:bodyPr>
+          <a:lstStyle/>
+          <a:p>
+            <a:pPr>
+              <a:defRPr sz="1300">
+                <a:solidFill>
+                  <a:srgbClr val="4E6080"/>
+                </a:solidFill>
+                <a:latin typeface="Aptos"/>
+              </a:defRPr>
+            </a:pPr>
+            <a:r>
+              <a:t>Prouver l’automatisation de bout en bout à partir d’une seule nouvelle activité.</a:t>
+            </a:r>
+          </a:p>
+        </p:txBody>
+      </p:sp>
+      <p:sp>
+        <p:nvSpPr>
+          <p:cNvPr id="5" name="Rounded Rectangle 4"/>
+          <p:cNvSpPr/>
+          <p:nvPr/>
+        </p:nvSpPr>
+        <p:spPr>
+          <a:xfrm>
+            <a:off x="411480" y="1828800"/>
+            <a:ext cx="1965960" cy="1417320"/>
           </a:xfrm>
           <a:prstGeom prst="roundRect">
-            <a:avLst>
-              <a:gd name="adj" fmla="val 2667"/>
-            </a:avLst>
+            <a:avLst/>
           </a:prstGeom>
           <a:solidFill>
-            <a:srgbClr val="FFFFFF"/>
+            <a:srgbClr val="102F56"/>
           </a:solidFill>
-          <a:ln w="12700">
+          <a:ln>
+            <a:noFill/>
+          </a:ln>
+        </p:spPr>
+        <p:style>
+          <a:lnRef idx="1">
+            <a:schemeClr val="accent1"/>
+          </a:lnRef>
+          <a:fillRef idx="3">
+            <a:schemeClr val="accent1"/>
+          </a:fillRef>
+          <a:effectRef idx="2">
+            <a:schemeClr val="accent1"/>
+          </a:effectRef>
+          <a:fontRef idx="minor">
+            <a:schemeClr val="lt1"/>
+          </a:fontRef>
+        </p:style>
+        <p:txBody>
+          <a:bodyPr lIns="73152" tIns="73152" rIns="73152" rtlCol="0" anchor="ctr"/>
+          <a:lstStyle/>
+          <a:p>
+            <a:pPr algn="ctr">
+              <a:defRPr sz="1220" b="1">
+                <a:solidFill>
+                  <a:srgbClr val="FFFFFF"/>
+                </a:solidFill>
+                <a:latin typeface="Aptos"/>
+              </a:defRPr>
+            </a:pPr>
+            <a:r>
+              <a:t>① DÉCLENCHEUR</a:t>
+            </a:r>
+          </a:p>
+          <a:p>
+            <a:pPr algn="ctr">
+              <a:defRPr sz="980">
+                <a:solidFill>
+                  <a:srgbClr val="FFFFFF"/>
+                </a:solidFill>
+                <a:latin typeface="Aptos"/>
+              </a:defRPr>
+            </a:pPr>
+            <a:r>
+              <a:t>Nouvelle activité</a:t>
+            </a:r>
+            <a:br/>
+            <a:r>
+              <a:t>PostgreSQL</a:t>
+            </a:r>
+          </a:p>
+        </p:txBody>
+      </p:sp>
+      <p:sp>
+        <p:nvSpPr>
+          <p:cNvPr id="6" name="Rounded Rectangle 5"/>
+          <p:cNvSpPr/>
+          <p:nvPr/>
+        </p:nvSpPr>
+        <p:spPr>
+          <a:xfrm>
+            <a:off x="2761488" y="1828800"/>
+            <a:ext cx="1965960" cy="1417320"/>
+          </a:xfrm>
+          <a:prstGeom prst="roundRect">
+            <a:avLst/>
+          </a:prstGeom>
+          <a:solidFill>
+            <a:srgbClr val="FA9E00"/>
+          </a:solidFill>
+          <a:ln>
+            <a:noFill/>
+          </a:ln>
+        </p:spPr>
+        <p:style>
+          <a:lnRef idx="1">
+            <a:schemeClr val="accent1"/>
+          </a:lnRef>
+          <a:fillRef idx="3">
+            <a:schemeClr val="accent1"/>
+          </a:fillRef>
+          <a:effectRef idx="2">
+            <a:schemeClr val="accent1"/>
+          </a:effectRef>
+          <a:fontRef idx="minor">
+            <a:schemeClr val="lt1"/>
+          </a:fontRef>
+        </p:style>
+        <p:txBody>
+          <a:bodyPr lIns="73152" tIns="73152" rIns="73152" rtlCol="0" anchor="ctr"/>
+          <a:lstStyle/>
+          <a:p>
+            <a:pPr algn="ctr">
+              <a:defRPr sz="1220" b="1">
+                <a:solidFill>
+                  <a:srgbClr val="FFFFFF"/>
+                </a:solidFill>
+                <a:latin typeface="Aptos"/>
+              </a:defRPr>
+            </a:pPr>
+            <a:r>
+              <a:t>② SLACK</a:t>
+            </a:r>
+          </a:p>
+          <a:p>
+            <a:pPr algn="ctr">
+              <a:defRPr sz="980">
+                <a:solidFill>
+                  <a:srgbClr val="FFFFFF"/>
+                </a:solidFill>
+                <a:latin typeface="Aptos"/>
+              </a:defRPr>
+            </a:pPr>
+            <a:r>
+              <a:t>Notification Slack</a:t>
+            </a:r>
+            <a:br/>
+            <a:r>
+              <a:t>automatique</a:t>
+            </a:r>
+          </a:p>
+        </p:txBody>
+      </p:sp>
+      <p:sp>
+        <p:nvSpPr>
+          <p:cNvPr id="7" name="Rounded Rectangle 6"/>
+          <p:cNvSpPr/>
+          <p:nvPr/>
+        </p:nvSpPr>
+        <p:spPr>
+          <a:xfrm>
+            <a:off x="5111496" y="1828800"/>
+            <a:ext cx="1965960" cy="1417320"/>
+          </a:xfrm>
+          <a:prstGeom prst="roundRect">
+            <a:avLst/>
+          </a:prstGeom>
+          <a:solidFill>
+            <a:srgbClr val="14B1C3"/>
+          </a:solidFill>
+          <a:ln>
+            <a:noFill/>
+          </a:ln>
+        </p:spPr>
+        <p:style>
+          <a:lnRef idx="1">
+            <a:schemeClr val="accent1"/>
+          </a:lnRef>
+          <a:fillRef idx="3">
+            <a:schemeClr val="accent1"/>
+          </a:fillRef>
+          <a:effectRef idx="2">
+            <a:schemeClr val="accent1"/>
+          </a:effectRef>
+          <a:fontRef idx="minor">
+            <a:schemeClr val="lt1"/>
+          </a:fontRef>
+        </p:style>
+        <p:txBody>
+          <a:bodyPr lIns="73152" tIns="73152" rIns="73152" rtlCol="0" anchor="ctr"/>
+          <a:lstStyle/>
+          <a:p>
+            <a:pPr algn="ctr">
+              <a:defRPr sz="1220" b="1">
+                <a:solidFill>
+                  <a:srgbClr val="FFFFFF"/>
+                </a:solidFill>
+                <a:latin typeface="Aptos"/>
+              </a:defRPr>
+            </a:pPr>
+            <a:r>
+              <a:t>③ ANALYTIQUE</a:t>
+            </a:r>
+          </a:p>
+          <a:p>
+            <a:pPr algn="ctr">
+              <a:defRPr sz="980">
+                <a:solidFill>
+                  <a:srgbClr val="FFFFFF"/>
+                </a:solidFill>
+                <a:latin typeface="Aptos"/>
+              </a:defRPr>
+            </a:pPr>
+            <a:r>
+              <a:t>Spark → Delta Lake</a:t>
+            </a:r>
+            <a:br/>
+            <a:r>
+              <a:t>Worker automatique</a:t>
+            </a:r>
+          </a:p>
+        </p:txBody>
+      </p:sp>
+      <p:sp>
+        <p:nvSpPr>
+          <p:cNvPr id="8" name="Rounded Rectangle 7"/>
+          <p:cNvSpPr/>
+          <p:nvPr/>
+        </p:nvSpPr>
+        <p:spPr>
+          <a:xfrm>
+            <a:off x="7461504" y="1828800"/>
+            <a:ext cx="1965960" cy="1417320"/>
+          </a:xfrm>
+          <a:prstGeom prst="roundRect">
+            <a:avLst/>
+          </a:prstGeom>
+          <a:solidFill>
+            <a:srgbClr val="6D3FE2"/>
+          </a:solidFill>
+          <a:ln>
+            <a:noFill/>
+          </a:ln>
+        </p:spPr>
+        <p:style>
+          <a:lnRef idx="1">
+            <a:schemeClr val="accent1"/>
+          </a:lnRef>
+          <a:fillRef idx="3">
+            <a:schemeClr val="accent1"/>
+          </a:fillRef>
+          <a:effectRef idx="2">
+            <a:schemeClr val="accent1"/>
+          </a:effectRef>
+          <a:fontRef idx="minor">
+            <a:schemeClr val="lt1"/>
+          </a:fontRef>
+        </p:style>
+        <p:txBody>
+          <a:bodyPr lIns="73152" tIns="73152" rIns="73152" rtlCol="0" anchor="ctr"/>
+          <a:lstStyle/>
+          <a:p>
+            <a:pPr algn="ctr">
+              <a:defRPr sz="1220" b="1">
+                <a:solidFill>
+                  <a:srgbClr val="FFFFFF"/>
+                </a:solidFill>
+                <a:latin typeface="Aptos"/>
+              </a:defRPr>
+            </a:pPr>
+            <a:r>
+              <a:t>④ MÉTIER</a:t>
+            </a:r>
+          </a:p>
+          <a:p>
+            <a:pPr algn="ctr">
+              <a:defRPr sz="980">
+                <a:solidFill>
+                  <a:srgbClr val="FFFFFF"/>
+                </a:solidFill>
+                <a:latin typeface="Aptos"/>
+              </a:defRPr>
+            </a:pPr>
+            <a:r>
+              <a:t>employee_benefits</a:t>
+            </a:r>
+            <a:br/>
+            <a:r>
+              <a:t>+ CSV régénérés</a:t>
+            </a:r>
+          </a:p>
+        </p:txBody>
+      </p:sp>
+      <p:sp>
+        <p:nvSpPr>
+          <p:cNvPr id="9" name="Rounded Rectangle 8"/>
+          <p:cNvSpPr/>
+          <p:nvPr/>
+        </p:nvSpPr>
+        <p:spPr>
+          <a:xfrm>
+            <a:off x="9811512" y="1828800"/>
+            <a:ext cx="1965960" cy="1417320"/>
+          </a:xfrm>
+          <a:prstGeom prst="roundRect">
+            <a:avLst/>
+          </a:prstGeom>
+          <a:solidFill>
+            <a:srgbClr val="29AB5E"/>
+          </a:solidFill>
+          <a:ln>
+            <a:noFill/>
+          </a:ln>
+        </p:spPr>
+        <p:style>
+          <a:lnRef idx="1">
+            <a:schemeClr val="accent1"/>
+          </a:lnRef>
+          <a:fillRef idx="3">
+            <a:schemeClr val="accent1"/>
+          </a:fillRef>
+          <a:effectRef idx="2">
+            <a:schemeClr val="accent1"/>
+          </a:effectRef>
+          <a:fontRef idx="minor">
+            <a:schemeClr val="lt1"/>
+          </a:fontRef>
+        </p:style>
+        <p:txBody>
+          <a:bodyPr lIns="73152" tIns="73152" rIns="73152" rtlCol="0" anchor="ctr"/>
+          <a:lstStyle/>
+          <a:p>
+            <a:pPr algn="ctr">
+              <a:defRPr sz="1220" b="1">
+                <a:solidFill>
+                  <a:srgbClr val="FFFFFF"/>
+                </a:solidFill>
+                <a:latin typeface="Aptos"/>
+              </a:defRPr>
+            </a:pPr>
+            <a:r>
+              <a:t>⑤ RESTITUTION</a:t>
+            </a:r>
+          </a:p>
+          <a:p>
+            <a:pPr algn="ctr">
+              <a:defRPr sz="980">
+                <a:solidFill>
+                  <a:srgbClr val="FFFFFF"/>
+                </a:solidFill>
+                <a:latin typeface="Aptos"/>
+              </a:defRPr>
+            </a:pPr>
+            <a:r>
+              <a:t>Actualisation</a:t>
+            </a:r>
+            <a:br/>
+            <a:r>
+              <a:t>Power BI</a:t>
+            </a:r>
+          </a:p>
+        </p:txBody>
+      </p:sp>
+      <p:cxnSp>
+        <p:nvCxnSpPr>
+          <p:cNvPr id="10" name="Connector 9"/>
+          <p:cNvCxnSpPr/>
+          <p:nvPr/>
+        </p:nvCxnSpPr>
+        <p:spPr>
+          <a:xfrm>
+            <a:off x="2377440" y="2537460"/>
+            <a:ext cx="384048" cy="0"/>
+          </a:xfrm>
+          <a:prstGeom prst="line">
+            <a:avLst/>
+          </a:prstGeom>
+          <a:ln w="19050">
             <a:solidFill>
-              <a:srgbClr val="DCE5EF"/>
+              <a:srgbClr val="3C4E6C"/>
             </a:solidFill>
-            <a:prstDash val="solid"/>
-          </a:ln>
-        </p:spPr>
-      </p:sp>
-      <p:sp>
-        <p:nvSpPr>
-          <p:cNvPr id="5" name="Text 3"/>
-          <p:cNvSpPr/>
-          <p:nvPr/>
-        </p:nvSpPr>
-        <p:spPr>
-          <a:xfrm>
-            <a:off x="1143000" y="1783080"/>
-            <a:ext cx="4023360" cy="274320"/>
+          </a:ln>
+        </p:spPr>
+        <p:style>
+          <a:lnRef idx="2">
+            <a:schemeClr val="accent1"/>
+          </a:lnRef>
+          <a:fillRef idx="0">
+            <a:schemeClr val="accent1"/>
+          </a:fillRef>
+          <a:effectRef idx="1">
+            <a:schemeClr val="accent1"/>
+          </a:effectRef>
+          <a:fontRef idx="minor">
+            <a:schemeClr val="tx1"/>
+          </a:fontRef>
+        </p:style>
+      </p:cxnSp>
+      <p:cxnSp>
+        <p:nvCxnSpPr>
+          <p:cNvPr id="11" name="Connector 10"/>
+          <p:cNvCxnSpPr/>
+          <p:nvPr/>
+        </p:nvCxnSpPr>
+        <p:spPr>
+          <a:xfrm>
+            <a:off x="4727448" y="2537460"/>
+            <a:ext cx="384048" cy="0"/>
+          </a:xfrm>
+          <a:prstGeom prst="line">
+            <a:avLst/>
+          </a:prstGeom>
+          <a:ln w="19050">
+            <a:solidFill>
+              <a:srgbClr val="3C4E6C"/>
+            </a:solidFill>
+          </a:ln>
+        </p:spPr>
+        <p:style>
+          <a:lnRef idx="2">
+            <a:schemeClr val="accent1"/>
+          </a:lnRef>
+          <a:fillRef idx="0">
+            <a:schemeClr val="accent1"/>
+          </a:fillRef>
+          <a:effectRef idx="1">
+            <a:schemeClr val="accent1"/>
+          </a:effectRef>
+          <a:fontRef idx="minor">
+            <a:schemeClr val="tx1"/>
+          </a:fontRef>
+        </p:style>
+      </p:cxnSp>
+      <p:cxnSp>
+        <p:nvCxnSpPr>
+          <p:cNvPr id="12" name="Connector 11"/>
+          <p:cNvCxnSpPr/>
+          <p:nvPr/>
+        </p:nvCxnSpPr>
+        <p:spPr>
+          <a:xfrm>
+            <a:off x="7077456" y="2537460"/>
+            <a:ext cx="384048" cy="0"/>
+          </a:xfrm>
+          <a:prstGeom prst="line">
+            <a:avLst/>
+          </a:prstGeom>
+          <a:ln w="19050">
+            <a:solidFill>
+              <a:srgbClr val="3C4E6C"/>
+            </a:solidFill>
+          </a:ln>
+        </p:spPr>
+        <p:style>
+          <a:lnRef idx="2">
+            <a:schemeClr val="accent1"/>
+          </a:lnRef>
+          <a:fillRef idx="0">
+            <a:schemeClr val="accent1"/>
+          </a:fillRef>
+          <a:effectRef idx="1">
+            <a:schemeClr val="accent1"/>
+          </a:effectRef>
+          <a:fontRef idx="minor">
+            <a:schemeClr val="tx1"/>
+          </a:fontRef>
+        </p:style>
+      </p:cxnSp>
+      <p:cxnSp>
+        <p:nvCxnSpPr>
+          <p:cNvPr id="13" name="Connector 12"/>
+          <p:cNvCxnSpPr/>
+          <p:nvPr/>
+        </p:nvCxnSpPr>
+        <p:spPr>
+          <a:xfrm>
+            <a:off x="9427464" y="2537460"/>
+            <a:ext cx="384048" cy="0"/>
+          </a:xfrm>
+          <a:prstGeom prst="line">
+            <a:avLst/>
+          </a:prstGeom>
+          <a:ln w="19050">
+            <a:solidFill>
+              <a:srgbClr val="3C4E6C"/>
+            </a:solidFill>
+          </a:ln>
+        </p:spPr>
+        <p:style>
+          <a:lnRef idx="2">
+            <a:schemeClr val="accent1"/>
+          </a:lnRef>
+          <a:fillRef idx="0">
+            <a:schemeClr val="accent1"/>
+          </a:fillRef>
+          <a:effectRef idx="1">
+            <a:schemeClr val="accent1"/>
+          </a:effectRef>
+          <a:fontRef idx="minor">
+            <a:schemeClr val="tx1"/>
+          </a:fontRef>
+        </p:style>
+      </p:cxnSp>
+      <p:sp>
+        <p:nvSpPr>
+          <p:cNvPr id="14" name="TextBox 13"/>
+          <p:cNvSpPr txBox="1"/>
+          <p:nvPr/>
+        </p:nvSpPr>
+        <p:spPr>
+          <a:xfrm>
+            <a:off x="2514600" y="3401568"/>
+            <a:ext cx="2468880" cy="384048"/>
           </a:xfrm>
           <a:prstGeom prst="rect">
             <a:avLst/>
           </a:prstGeom>
           <a:noFill/>
-          <a:ln/>
-        </p:spPr>
-        <p:txBody>
-          <a:bodyPr wrap="square" lIns="0" tIns="0" rIns="0" bIns="0" rtlCol="0" anchor="ctr"/>
-          <a:lstStyle/>
-          <a:p>
-            <a:pPr marL="0" indent="0">
-              <a:buNone/>
-            </a:pPr>
-            <a:r>
-              <a:rPr lang="en-US" sz="1600" b="1" dirty="0">
-                <a:solidFill>
-                  <a:srgbClr val="17324D"/>
-                </a:solidFill>
-              </a:rPr>
-              <a:t>Exemple de notification</a:t>
-            </a:r>
-            <a:endParaRPr lang="en-US" sz="1600" dirty="0"/>
-          </a:p>
-        </p:txBody>
-      </p:sp>
-      <p:sp>
-        <p:nvSpPr>
-          <p:cNvPr id="6" name="Text 4"/>
-          <p:cNvSpPr/>
-          <p:nvPr/>
-        </p:nvSpPr>
-        <p:spPr>
-          <a:xfrm>
-            <a:off x="1143000" y="2331720"/>
-            <a:ext cx="3977640" cy="1417320"/>
-          </a:xfrm>
-          <a:prstGeom prst="rect">
-            <a:avLst/>
-          </a:prstGeom>
-          <a:noFill/>
-          <a:ln/>
-        </p:spPr>
-        <p:txBody>
-          <a:bodyPr wrap="square" lIns="381" tIns="381" rIns="381" bIns="381" rtlCol="0" anchor="ctr"/>
-          <a:lstStyle/>
-          <a:p>
-            <a:pPr marL="0" indent="0">
-              <a:buNone/>
-            </a:pPr>
-            <a:r>
-              <a:rPr lang="en-US" sz="1500" dirty="0">
-                <a:solidFill>
-                  <a:srgbClr val="243447"/>
-                </a:solidFill>
-              </a:rPr>
-              <a:t>🏃  Bravo ! Une nouvelle activité sportive vient d’être détectée.</a:t>
-            </a:r>
-            <a:endParaRPr lang="en-US" sz="1500" dirty="0"/>
-          </a:p>
-          <a:p>
-            <a:pPr marL="0" indent="0">
-              <a:buNone/>
-            </a:pPr>
-            <a:endParaRPr lang="en-US" sz="1500" dirty="0"/>
-          </a:p>
-          <a:p>
-            <a:pPr marL="0" indent="0">
-              <a:buNone/>
-            </a:pPr>
-            <a:r>
-              <a:rPr lang="en-US" sz="1500" dirty="0">
-                <a:solidFill>
-                  <a:srgbClr val="243447"/>
-                </a:solidFill>
-              </a:rPr>
-              <a:t>Distance et durée sont formatées pour produire un message lisible dans Slack.</a:t>
-            </a:r>
-            <a:endParaRPr lang="en-US" sz="1500" dirty="0"/>
-          </a:p>
-        </p:txBody>
-      </p:sp>
-      <p:sp>
-        <p:nvSpPr>
-          <p:cNvPr id="7" name="Text 5"/>
-          <p:cNvSpPr/>
-          <p:nvPr/>
-        </p:nvSpPr>
-        <p:spPr>
-          <a:xfrm>
-            <a:off x="1143000" y="4160520"/>
-            <a:ext cx="3977640" cy="320040"/>
-          </a:xfrm>
-          <a:prstGeom prst="rect">
-            <a:avLst/>
-          </a:prstGeom>
-          <a:noFill/>
-          <a:ln/>
-        </p:spPr>
-        <p:txBody>
-          <a:bodyPr wrap="square" lIns="0" tIns="0" rIns="0" bIns="0" rtlCol="0" anchor="ctr"/>
-          <a:lstStyle/>
-          <a:p>
-            <a:pPr marL="0" indent="0">
-              <a:buNone/>
-            </a:pPr>
-            <a:r>
-              <a:rPr lang="en-US" sz="1050" i="1" dirty="0">
-                <a:solidFill>
-                  <a:srgbClr val="66788A"/>
-                </a:solidFill>
-              </a:rPr>
-              <a:t>Le commentaire peut également enrichir le message.</a:t>
-            </a:r>
-            <a:endParaRPr lang="en-US" sz="1050" dirty="0"/>
-          </a:p>
-        </p:txBody>
-      </p:sp>
-      <p:sp>
-        <p:nvSpPr>
-          <p:cNvPr id="8" name="Shape 6"/>
-          <p:cNvSpPr/>
-          <p:nvPr/>
-        </p:nvSpPr>
-        <p:spPr>
-          <a:xfrm>
-            <a:off x="6172200" y="1572768"/>
-            <a:ext cx="457200" cy="457200"/>
-          </a:xfrm>
-          <a:prstGeom prst="ellipse">
+        </p:spPr>
+        <p:txBody>
+          <a:bodyPr wrap="none">
+            <a:spAutoFit/>
+          </a:bodyPr>
+          <a:lstStyle/>
+          <a:p>
+            <a:pPr algn="ctr">
+              <a:defRPr sz="950">
+                <a:solidFill>
+                  <a:srgbClr val="4E6080"/>
+                </a:solidFill>
+                <a:latin typeface="Aptos"/>
+              </a:defRPr>
+            </a:pPr>
+            <a:r>
+              <a:t>Debezium → Redpanda → Consumer Python → Slack</a:t>
+            </a:r>
+          </a:p>
+        </p:txBody>
+      </p:sp>
+      <p:sp>
+        <p:nvSpPr>
+          <p:cNvPr id="15" name="Rounded Rectangle 14"/>
+          <p:cNvSpPr/>
+          <p:nvPr/>
+        </p:nvSpPr>
+        <p:spPr>
+          <a:xfrm>
+            <a:off x="2880360" y="4096512"/>
+            <a:ext cx="6446520" cy="804672"/>
+          </a:xfrm>
+          <a:prstGeom prst="roundRect">
             <a:avLst/>
           </a:prstGeom>
           <a:solidFill>
-            <a:srgbClr val="2F6BFF"/>
+            <a:srgbClr val="E2EBFC"/>
           </a:solidFill>
-          <a:ln w="12700">
+          <a:ln w="15240">
             <a:solidFill>
-              <a:srgbClr val="2F6BFF"/>
+              <a:srgbClr val="2E65EB"/>
             </a:solidFill>
-            <a:prstDash val="solid"/>
-          </a:ln>
-        </p:spPr>
-      </p:sp>
-      <p:sp>
-        <p:nvSpPr>
-          <p:cNvPr id="9" name="Text 7"/>
-          <p:cNvSpPr/>
-          <p:nvPr/>
-        </p:nvSpPr>
-        <p:spPr>
-          <a:xfrm>
-            <a:off x="6172200" y="1709928"/>
-            <a:ext cx="457200" cy="146304"/>
-          </a:xfrm>
-          <a:prstGeom prst="rect">
-            <a:avLst/>
-          </a:prstGeom>
-          <a:noFill/>
-          <a:ln/>
-        </p:spPr>
-        <p:txBody>
-          <a:bodyPr wrap="square" lIns="0" tIns="0" rIns="0" bIns="0" rtlCol="0" anchor="ctr"/>
-          <a:lstStyle/>
-          <a:p>
-            <a:pPr marL="0" indent="0" algn="ctr">
-              <a:buNone/>
-            </a:pPr>
-            <a:r>
-              <a:rPr lang="en-US" sz="1000" b="1" dirty="0">
-                <a:solidFill>
-                  <a:srgbClr val="FFFFFF"/>
-                </a:solidFill>
-              </a:rPr>
-              <a:t>1</a:t>
-            </a:r>
-            <a:endParaRPr lang="en-US" sz="1000" dirty="0"/>
-          </a:p>
-        </p:txBody>
-      </p:sp>
-      <p:sp>
-        <p:nvSpPr>
-          <p:cNvPr id="10" name="Text 8"/>
-          <p:cNvSpPr/>
-          <p:nvPr/>
-        </p:nvSpPr>
-        <p:spPr>
-          <a:xfrm>
-            <a:off x="6858000" y="1618488"/>
-            <a:ext cx="4114800" cy="365760"/>
-          </a:xfrm>
-          <a:prstGeom prst="rect">
-            <a:avLst/>
-          </a:prstGeom>
-          <a:noFill/>
-          <a:ln/>
-        </p:spPr>
-        <p:txBody>
-          <a:bodyPr wrap="square" lIns="0" tIns="0" rIns="0" bIns="0" rtlCol="0" anchor="ctr"/>
-          <a:lstStyle/>
-          <a:p>
-            <a:pPr marL="0" indent="0">
-              <a:buNone/>
-            </a:pPr>
-            <a:r>
-              <a:rPr lang="en-US" sz="1500" b="1" dirty="0">
-                <a:solidFill>
-                  <a:srgbClr val="17324D"/>
-                </a:solidFill>
-              </a:rPr>
-              <a:t>Insérer une activité</a:t>
-            </a:r>
-            <a:endParaRPr lang="en-US" sz="1500" dirty="0"/>
-          </a:p>
-        </p:txBody>
-      </p:sp>
-      <p:sp>
-        <p:nvSpPr>
-          <p:cNvPr id="11" name="Shape 9"/>
-          <p:cNvSpPr/>
-          <p:nvPr/>
-        </p:nvSpPr>
-        <p:spPr>
-          <a:xfrm>
-            <a:off x="6400800" y="2029968"/>
-            <a:ext cx="0" cy="438912"/>
-          </a:xfrm>
-          <a:prstGeom prst="line">
-            <a:avLst/>
-          </a:prstGeom>
-          <a:noFill/>
-          <a:ln w="25400">
-            <a:solidFill>
-              <a:srgbClr val="AAB7C4"/>
-            </a:solidFill>
-            <a:prstDash val="solid"/>
-            <a:headEnd type="none"/>
-            <a:tailEnd type="triangle"/>
-          </a:ln>
-        </p:spPr>
-      </p:sp>
-      <p:sp>
-        <p:nvSpPr>
-          <p:cNvPr id="12" name="Shape 10"/>
-          <p:cNvSpPr/>
-          <p:nvPr/>
-        </p:nvSpPr>
-        <p:spPr>
-          <a:xfrm>
-            <a:off x="6172200" y="2532888"/>
-            <a:ext cx="457200" cy="457200"/>
-          </a:xfrm>
-          <a:prstGeom prst="ellipse">
+          </a:ln>
+        </p:spPr>
+        <p:style>
+          <a:lnRef idx="1">
+            <a:schemeClr val="accent1"/>
+          </a:lnRef>
+          <a:fillRef idx="3">
+            <a:schemeClr val="accent1"/>
+          </a:fillRef>
+          <a:effectRef idx="2">
+            <a:schemeClr val="accent1"/>
+          </a:effectRef>
+          <a:fontRef idx="minor">
+            <a:schemeClr val="lt1"/>
+          </a:fontRef>
+        </p:style>
+        <p:txBody>
+          <a:bodyPr rtlCol="0" anchor="ctr"/>
+          <a:lstStyle/>
+          <a:p>
+            <a:pPr algn="ctr">
+              <a:defRPr sz="1800" b="1">
+                <a:solidFill>
+                  <a:srgbClr val="102F56"/>
+                </a:solidFill>
+                <a:latin typeface="Aptos"/>
+              </a:defRPr>
+            </a:pPr>
+            <a:r>
+              <a:t>AUCUNE INTERVENTION MANUELLE APRÈS L’INSERT</a:t>
+            </a:r>
+          </a:p>
+        </p:txBody>
+      </p:sp>
+      <p:sp>
+        <p:nvSpPr>
+          <p:cNvPr id="16" name="Rounded Rectangle 15"/>
+          <p:cNvSpPr/>
+          <p:nvPr/>
+        </p:nvSpPr>
+        <p:spPr>
+          <a:xfrm>
+            <a:off x="777240" y="5715000"/>
+            <a:ext cx="10652760" cy="457200"/>
+          </a:xfrm>
+          <a:prstGeom prst="roundRect">
             <a:avLst/>
           </a:prstGeom>
           <a:solidFill>
-            <a:srgbClr val="7557D5"/>
+            <a:srgbClr val="E2EBFC"/>
           </a:solidFill>
-          <a:ln w="12700">
-            <a:solidFill>
-              <a:srgbClr val="7557D5"/>
-            </a:solidFill>
-            <a:prstDash val="solid"/>
-          </a:ln>
-        </p:spPr>
-      </p:sp>
-      <p:sp>
-        <p:nvSpPr>
-          <p:cNvPr id="13" name="Text 11"/>
-          <p:cNvSpPr/>
-          <p:nvPr/>
-        </p:nvSpPr>
-        <p:spPr>
-          <a:xfrm>
-            <a:off x="6172200" y="2670048"/>
-            <a:ext cx="457200" cy="146304"/>
-          </a:xfrm>
-          <a:prstGeom prst="rect">
-            <a:avLst/>
-          </a:prstGeom>
-          <a:noFill/>
-          <a:ln/>
-        </p:spPr>
-        <p:txBody>
-          <a:bodyPr wrap="square" lIns="0" tIns="0" rIns="0" bIns="0" rtlCol="0" anchor="ctr"/>
-          <a:lstStyle/>
-          <a:p>
-            <a:pPr marL="0" indent="0" algn="ctr">
-              <a:buNone/>
-            </a:pPr>
-            <a:r>
-              <a:rPr lang="en-US" sz="1000" b="1" dirty="0">
-                <a:solidFill>
-                  <a:srgbClr val="FFFFFF"/>
-                </a:solidFill>
-              </a:rPr>
-              <a:t>2</a:t>
-            </a:r>
-            <a:endParaRPr lang="en-US" sz="1000" dirty="0"/>
-          </a:p>
-        </p:txBody>
-      </p:sp>
-      <p:sp>
-        <p:nvSpPr>
-          <p:cNvPr id="14" name="Text 12"/>
-          <p:cNvSpPr/>
-          <p:nvPr/>
-        </p:nvSpPr>
-        <p:spPr>
-          <a:xfrm>
-            <a:off x="6858000" y="2578608"/>
-            <a:ext cx="4114800" cy="365760"/>
-          </a:xfrm>
-          <a:prstGeom prst="rect">
-            <a:avLst/>
-          </a:prstGeom>
-          <a:noFill/>
-          <a:ln/>
-        </p:spPr>
-        <p:txBody>
-          <a:bodyPr wrap="square" lIns="0" tIns="0" rIns="0" bIns="0" rtlCol="0" anchor="ctr"/>
-          <a:lstStyle/>
-          <a:p>
-            <a:pPr marL="0" indent="0">
-              <a:buNone/>
-            </a:pPr>
-            <a:r>
-              <a:rPr lang="en-US" sz="1500" b="1" dirty="0">
-                <a:solidFill>
-                  <a:srgbClr val="17324D"/>
-                </a:solidFill>
-              </a:rPr>
-              <a:t>Observer Debezium / Redpanda</a:t>
-            </a:r>
-            <a:endParaRPr lang="en-US" sz="1500" dirty="0"/>
-          </a:p>
-        </p:txBody>
-      </p:sp>
-      <p:sp>
-        <p:nvSpPr>
-          <p:cNvPr id="15" name="Shape 13"/>
-          <p:cNvSpPr/>
-          <p:nvPr/>
-        </p:nvSpPr>
-        <p:spPr>
-          <a:xfrm>
-            <a:off x="6400800" y="2990088"/>
-            <a:ext cx="0" cy="438912"/>
-          </a:xfrm>
-          <a:prstGeom prst="line">
-            <a:avLst/>
-          </a:prstGeom>
-          <a:noFill/>
-          <a:ln w="25400">
-            <a:solidFill>
-              <a:srgbClr val="AAB7C4"/>
-            </a:solidFill>
-            <a:prstDash val="solid"/>
-            <a:headEnd type="none"/>
-            <a:tailEnd type="triangle"/>
-          </a:ln>
-        </p:spPr>
-      </p:sp>
-      <p:sp>
-        <p:nvSpPr>
-          <p:cNvPr id="16" name="Shape 14"/>
-          <p:cNvSpPr/>
-          <p:nvPr/>
-        </p:nvSpPr>
-        <p:spPr>
-          <a:xfrm>
-            <a:off x="6172200" y="3493008"/>
-            <a:ext cx="457200" cy="457200"/>
-          </a:xfrm>
-          <a:prstGeom prst="ellipse">
-            <a:avLst/>
-          </a:prstGeom>
-          <a:solidFill>
-            <a:srgbClr val="F59E0B"/>
-          </a:solidFill>
-          <a:ln w="12700">
-            <a:solidFill>
-              <a:srgbClr val="F59E0B"/>
-            </a:solidFill>
-            <a:prstDash val="solid"/>
-          </a:ln>
-        </p:spPr>
-      </p:sp>
-      <p:sp>
-        <p:nvSpPr>
-          <p:cNvPr id="17" name="Text 15"/>
-          <p:cNvSpPr/>
-          <p:nvPr/>
-        </p:nvSpPr>
-        <p:spPr>
-          <a:xfrm>
-            <a:off x="6172200" y="3630168"/>
-            <a:ext cx="457200" cy="146304"/>
-          </a:xfrm>
-          <a:prstGeom prst="rect">
-            <a:avLst/>
-          </a:prstGeom>
-          <a:noFill/>
-          <a:ln/>
-        </p:spPr>
-        <p:txBody>
-          <a:bodyPr wrap="square" lIns="0" tIns="0" rIns="0" bIns="0" rtlCol="0" anchor="ctr"/>
-          <a:lstStyle/>
-          <a:p>
-            <a:pPr marL="0" indent="0" algn="ctr">
-              <a:buNone/>
-            </a:pPr>
-            <a:r>
-              <a:rPr lang="en-US" sz="1000" b="1" dirty="0">
-                <a:solidFill>
-                  <a:srgbClr val="FFFFFF"/>
-                </a:solidFill>
-              </a:rPr>
-              <a:t>3</a:t>
-            </a:r>
-            <a:endParaRPr lang="en-US" sz="1000" dirty="0"/>
-          </a:p>
-        </p:txBody>
-      </p:sp>
-      <p:sp>
-        <p:nvSpPr>
-          <p:cNvPr id="18" name="Text 16"/>
-          <p:cNvSpPr/>
-          <p:nvPr/>
-        </p:nvSpPr>
-        <p:spPr>
-          <a:xfrm>
-            <a:off x="6858000" y="3538728"/>
-            <a:ext cx="4114800" cy="365760"/>
-          </a:xfrm>
-          <a:prstGeom prst="rect">
-            <a:avLst/>
-          </a:prstGeom>
-          <a:noFill/>
-          <a:ln/>
-        </p:spPr>
-        <p:txBody>
-          <a:bodyPr wrap="square" lIns="0" tIns="0" rIns="0" bIns="0" rtlCol="0" anchor="ctr"/>
-          <a:lstStyle/>
-          <a:p>
-            <a:pPr marL="0" indent="0">
-              <a:buNone/>
-            </a:pPr>
-            <a:r>
-              <a:rPr lang="en-US" sz="1500" b="1" dirty="0">
-                <a:solidFill>
-                  <a:srgbClr val="17324D"/>
-                </a:solidFill>
-              </a:rPr>
-              <a:t>Consommer avec PySpark</a:t>
-            </a:r>
-            <a:endParaRPr lang="en-US" sz="1500" dirty="0"/>
-          </a:p>
-        </p:txBody>
-      </p:sp>
-      <p:sp>
-        <p:nvSpPr>
-          <p:cNvPr id="19" name="Shape 17"/>
-          <p:cNvSpPr/>
-          <p:nvPr/>
-        </p:nvSpPr>
-        <p:spPr>
-          <a:xfrm>
-            <a:off x="6400800" y="3950208"/>
-            <a:ext cx="0" cy="438912"/>
-          </a:xfrm>
-          <a:prstGeom prst="line">
-            <a:avLst/>
-          </a:prstGeom>
-          <a:noFill/>
-          <a:ln w="25400">
-            <a:solidFill>
-              <a:srgbClr val="AAB7C4"/>
-            </a:solidFill>
-            <a:prstDash val="solid"/>
-            <a:headEnd type="none"/>
-            <a:tailEnd type="triangle"/>
-          </a:ln>
-        </p:spPr>
-      </p:sp>
-      <p:sp>
-        <p:nvSpPr>
-          <p:cNvPr id="20" name="Shape 18"/>
-          <p:cNvSpPr/>
-          <p:nvPr/>
-        </p:nvSpPr>
-        <p:spPr>
-          <a:xfrm>
-            <a:off x="6172200" y="4453128"/>
-            <a:ext cx="457200" cy="457200"/>
-          </a:xfrm>
-          <a:prstGeom prst="ellipse">
-            <a:avLst/>
-          </a:prstGeom>
-          <a:solidFill>
-            <a:srgbClr val="2BAE66"/>
-          </a:solidFill>
-          <a:ln w="12700">
-            <a:solidFill>
-              <a:srgbClr val="2BAE66"/>
-            </a:solidFill>
-            <a:prstDash val="solid"/>
-          </a:ln>
-        </p:spPr>
-      </p:sp>
-      <p:sp>
-        <p:nvSpPr>
-          <p:cNvPr id="21" name="Text 19"/>
-          <p:cNvSpPr/>
-          <p:nvPr/>
-        </p:nvSpPr>
-        <p:spPr>
-          <a:xfrm>
-            <a:off x="6172200" y="4590288"/>
-            <a:ext cx="457200" cy="146304"/>
-          </a:xfrm>
-          <a:prstGeom prst="rect">
-            <a:avLst/>
-          </a:prstGeom>
-          <a:noFill/>
-          <a:ln/>
-        </p:spPr>
-        <p:txBody>
-          <a:bodyPr wrap="square" lIns="0" tIns="0" rIns="0" bIns="0" rtlCol="0" anchor="ctr"/>
-          <a:lstStyle/>
-          <a:p>
-            <a:pPr marL="0" indent="0" algn="ctr">
-              <a:buNone/>
-            </a:pPr>
-            <a:r>
-              <a:rPr lang="en-US" sz="1000" b="1" dirty="0">
-                <a:solidFill>
-                  <a:srgbClr val="FFFFFF"/>
-                </a:solidFill>
-              </a:rPr>
-              <a:t>4</a:t>
-            </a:r>
-            <a:endParaRPr lang="en-US" sz="1000" dirty="0"/>
-          </a:p>
-        </p:txBody>
-      </p:sp>
-      <p:sp>
-        <p:nvSpPr>
-          <p:cNvPr id="22" name="Text 20"/>
-          <p:cNvSpPr/>
-          <p:nvPr/>
-        </p:nvSpPr>
-        <p:spPr>
-          <a:xfrm>
-            <a:off x="6858000" y="4498848"/>
-            <a:ext cx="4114800" cy="365760"/>
-          </a:xfrm>
-          <a:prstGeom prst="rect">
-            <a:avLst/>
-          </a:prstGeom>
-          <a:noFill/>
-          <a:ln/>
-        </p:spPr>
-        <p:txBody>
-          <a:bodyPr wrap="square" lIns="0" tIns="0" rIns="0" bIns="0" rtlCol="0" anchor="ctr"/>
-          <a:lstStyle/>
-          <a:p>
-            <a:r>
-              <a:rPr lang="fr-FR" sz="1500" b="1" dirty="0">
-                <a:solidFill>
-                  <a:srgbClr val="17324D"/>
-                </a:solidFill>
-              </a:rPr>
-              <a:t>Vérifier la notification </a:t>
-            </a:r>
-            <a:r>
-              <a:rPr lang="fr-FR" sz="1500" b="1" dirty="0" err="1">
-                <a:solidFill>
-                  <a:srgbClr val="17324D"/>
-                </a:solidFill>
-              </a:rPr>
-              <a:t>Slack</a:t>
-            </a:r>
-            <a:r>
-              <a:rPr lang="fr-FR" sz="1500" b="1" dirty="0">
-                <a:solidFill>
-                  <a:srgbClr val="17324D"/>
-                </a:solidFill>
-              </a:rPr>
-              <a:t> + l'écriture Delta</a:t>
-            </a:r>
-            <a:endParaRPr lang="en-US" sz="1500" b="1" dirty="0">
-              <a:solidFill>
-                <a:srgbClr val="17324D"/>
-              </a:solidFill>
-            </a:endParaRPr>
-          </a:p>
-        </p:txBody>
-      </p:sp>
-      <p:sp>
-        <p:nvSpPr>
-          <p:cNvPr id="25" name="Slide Number Placeholder 0"/>
-          <p:cNvSpPr>
-            <a:spLocks noGrp="1"/>
-          </p:cNvSpPr>
-          <p:nvPr>
-            <p:ph type="sldNum" sz="quarter" idx="4294967295"/>
-          </p:nvPr>
-        </p:nvSpPr>
-        <p:spPr>
-          <a:xfrm>
-            <a:off x="11631168" y="6473952"/>
-            <a:ext cx="800000" cy="300000"/>
-          </a:xfrm>
-          <a:prstGeom prst="rect">
-            <a:avLst/>
-          </a:prstGeom>
-          <a:extLst>
-            <a:ext uri="{C572A759-6A51-4108-AA02-DFA0A04FC94B}">
-              <ma14:wrappingTextBoxFlag xmlns:ma14="http://schemas.microsoft.com/office/mac/drawingml/2011/main" xmlns="" val="0"/>
-            </a:ext>
-          </a:extLst>
-        </p:spPr>
-        <p:txBody>
-          <a:bodyPr/>
-          <a:lstStyle>
-            <a:lvl1pPr>
-              <a:defRPr sz="800">
-                <a:solidFill>
-                  <a:srgbClr val="718096"/>
-                </a:solidFill>
+          <a:ln>
+            <a:noFill/>
+          </a:ln>
+        </p:spPr>
+        <p:style>
+          <a:lnRef idx="1">
+            <a:schemeClr val="accent1"/>
+          </a:lnRef>
+          <a:fillRef idx="3">
+            <a:schemeClr val="accent1"/>
+          </a:fillRef>
+          <a:effectRef idx="2">
+            <a:schemeClr val="accent1"/>
+          </a:effectRef>
+          <a:fontRef idx="minor">
+            <a:schemeClr val="lt1"/>
+          </a:fontRef>
+        </p:style>
+        <p:txBody>
+          <a:bodyPr rtlCol="0" anchor="ctr"/>
+          <a:lstStyle/>
+          <a:p>
+            <a:pPr algn="ctr">
+              <a:defRPr sz="1150" b="1">
+                <a:solidFill>
+                  <a:srgbClr val="102F56"/>
+                </a:solidFill>
+                <a:latin typeface="Aptos"/>
               </a:defRPr>
-            </a:lvl1pPr>
-          </a:lstStyle>
-          <a:p>
-            <a:pPr algn="l"/>
-            <a:fld id="{F7021451-1387-4CA6-816F-3879F97B5CBC}" type="slidenum">
-              <a:rPr lang="en-US" b="0"/>
-              <a:t>12</a:t>
-            </a:fld>
-            <a:endParaRPr lang="en-US"/>
+            </a:pPr>
+            <a:r>
+              <a:t>Une seule activité déclenche automatiquement Slack, le traitement analytique, le recalcul métier et la préparation des données Power BI.</a:t>
+            </a:r>
           </a:p>
         </p:txBody>
       </p:sp>
@@ -4138,698 +4278,502 @@
       </p:grpSpPr>
       <p:sp>
         <p:nvSpPr>
-          <p:cNvPr id="2" name="Text 0"/>
-          <p:cNvSpPr/>
-          <p:nvPr/>
-        </p:nvSpPr>
-        <p:spPr>
-          <a:xfrm>
-            <a:off x="502920" y="429768"/>
-            <a:ext cx="11018520" cy="438912"/>
+          <p:cNvPr id="2" name="Rectangle 1"/>
+          <p:cNvSpPr/>
+          <p:nvPr/>
+        </p:nvSpPr>
+        <p:spPr>
+          <a:xfrm>
+            <a:off x="0" y="0"/>
+            <a:ext cx="12192000" cy="182880"/>
+          </a:xfrm>
+          <a:prstGeom prst="rect">
+            <a:avLst/>
+          </a:prstGeom>
+          <a:solidFill>
+            <a:srgbClr val="2E65EB"/>
+          </a:solidFill>
+          <a:ln>
+            <a:noFill/>
+          </a:ln>
+        </p:spPr>
+        <p:style>
+          <a:lnRef idx="1">
+            <a:schemeClr val="accent1"/>
+          </a:lnRef>
+          <a:fillRef idx="3">
+            <a:schemeClr val="accent1"/>
+          </a:fillRef>
+          <a:effectRef idx="2">
+            <a:schemeClr val="accent1"/>
+          </a:effectRef>
+          <a:fontRef idx="minor">
+            <a:schemeClr val="lt1"/>
+          </a:fontRef>
+        </p:style>
+        <p:txBody>
+          <a:bodyPr rtlCol="0" anchor="ctr"/>
+          <a:lstStyle/>
+          <a:p>
+            <a:pPr algn="ctr"/>
+            <a:endParaRPr/>
+          </a:p>
+        </p:txBody>
+      </p:sp>
+      <p:sp>
+        <p:nvSpPr>
+          <p:cNvPr id="3" name="TextBox 2"/>
+          <p:cNvSpPr txBox="1"/>
+          <p:nvPr/>
+        </p:nvSpPr>
+        <p:spPr>
+          <a:xfrm>
+            <a:off x="566928" y="384048"/>
+            <a:ext cx="10972800" cy="502920"/>
           </a:xfrm>
           <a:prstGeom prst="rect">
             <a:avLst/>
           </a:prstGeom>
           <a:noFill/>
-          <a:ln/>
-        </p:spPr>
-        <p:txBody>
-          <a:bodyPr wrap="square" lIns="0" tIns="0" rIns="0" bIns="0" rtlCol="0" anchor="ctr"/>
-          <a:lstStyle/>
-          <a:p>
-            <a:pPr marL="0" indent="0">
-              <a:buNone/>
-            </a:pPr>
-            <a:r>
-              <a:rPr lang="en-US" sz="2600" b="1" dirty="0" smtClean="0">
-                <a:solidFill>
-                  <a:srgbClr val="17324D"/>
-                </a:solidFill>
-              </a:rPr>
-              <a:t>12. </a:t>
-            </a:r>
-            <a:r>
-              <a:rPr lang="en-US" sz="2600" b="1" dirty="0">
-                <a:solidFill>
-                  <a:srgbClr val="17324D"/>
-                </a:solidFill>
-              </a:rPr>
-              <a:t>Bilan, limites et évolutions</a:t>
-            </a:r>
-            <a:endParaRPr lang="en-US" sz="2600" dirty="0"/>
-          </a:p>
-        </p:txBody>
-      </p:sp>
-      <p:sp>
-        <p:nvSpPr>
-          <p:cNvPr id="3" name="Text 1"/>
-          <p:cNvSpPr/>
-          <p:nvPr/>
-        </p:nvSpPr>
-        <p:spPr>
-          <a:xfrm>
-            <a:off x="612648" y="932688"/>
-            <a:ext cx="10789920" cy="292608"/>
+        </p:spPr>
+        <p:txBody>
+          <a:bodyPr wrap="none">
+            <a:spAutoFit/>
+          </a:bodyPr>
+          <a:lstStyle/>
+          <a:p>
+            <a:pPr>
+              <a:defRPr sz="2700" b="1">
+                <a:solidFill>
+                  <a:srgbClr val="102F56"/>
+                </a:solidFill>
+                <a:latin typeface="Aptos Display"/>
+              </a:defRPr>
+            </a:pPr>
+            <a:r>
+              <a:t>12. Bilan, limites et évolutions</a:t>
+            </a:r>
+          </a:p>
+        </p:txBody>
+      </p:sp>
+      <p:sp>
+        <p:nvSpPr>
+          <p:cNvPr id="4" name="TextBox 3"/>
+          <p:cNvSpPr txBox="1"/>
+          <p:nvPr/>
+        </p:nvSpPr>
+        <p:spPr>
+          <a:xfrm>
+            <a:off x="576072" y="987552"/>
+            <a:ext cx="10972800" cy="438912"/>
           </a:xfrm>
           <a:prstGeom prst="rect">
             <a:avLst/>
           </a:prstGeom>
           <a:noFill/>
-          <a:ln/>
-        </p:spPr>
-        <p:txBody>
-          <a:bodyPr wrap="square" lIns="0" tIns="0" rIns="0" bIns="0" rtlCol="0" anchor="ctr"/>
-          <a:lstStyle/>
-          <a:p>
-            <a:pPr marL="0" indent="0">
-              <a:buNone/>
-            </a:pPr>
-            <a:r>
-              <a:rPr lang="en-US" sz="1150" dirty="0">
-                <a:solidFill>
-                  <a:srgbClr val="66788A"/>
-                </a:solidFill>
-              </a:rPr>
-              <a:t>Un POC fonctionnel qui valide la faisabilité technique et prépare une industrialisation.</a:t>
-            </a:r>
-            <a:endParaRPr lang="en-US" sz="1150" dirty="0"/>
-          </a:p>
-        </p:txBody>
-      </p:sp>
-      <p:sp>
-        <p:nvSpPr>
-          <p:cNvPr id="4" name="Shape 2"/>
-          <p:cNvSpPr/>
-          <p:nvPr/>
-        </p:nvSpPr>
-        <p:spPr>
-          <a:xfrm>
-            <a:off x="685800" y="1417320"/>
-            <a:ext cx="3337560" cy="2057400"/>
+        </p:spPr>
+        <p:txBody>
+          <a:bodyPr wrap="none">
+            <a:spAutoFit/>
+          </a:bodyPr>
+          <a:lstStyle/>
+          <a:p>
+            <a:pPr>
+              <a:defRPr sz="1300">
+                <a:solidFill>
+                  <a:srgbClr val="4E6080"/>
+                </a:solidFill>
+                <a:latin typeface="Aptos"/>
+              </a:defRPr>
+            </a:pPr>
+            <a:r>
+              <a:t>Un POC automatisé, observable et résilient qui valide la faisabilité technique.</a:t>
+            </a:r>
+          </a:p>
+        </p:txBody>
+      </p:sp>
+      <p:sp>
+        <p:nvSpPr>
+          <p:cNvPr id="5" name="TextBox 4"/>
+          <p:cNvSpPr txBox="1"/>
+          <p:nvPr/>
+        </p:nvSpPr>
+        <p:spPr>
+          <a:xfrm>
+            <a:off x="576072" y="6565392"/>
+            <a:ext cx="3017520" cy="182880"/>
+          </a:xfrm>
+          <a:prstGeom prst="rect">
+            <a:avLst/>
+          </a:prstGeom>
+          <a:noFill/>
+        </p:spPr>
+        <p:txBody>
+          <a:bodyPr wrap="none">
+            <a:spAutoFit/>
+          </a:bodyPr>
+          <a:lstStyle/>
+          <a:p>
+            <a:pPr>
+              <a:defRPr sz="850">
+                <a:solidFill>
+                  <a:srgbClr val="4E6080"/>
+                </a:solidFill>
+                <a:latin typeface="Aptos"/>
+              </a:defRPr>
+            </a:pPr>
+            <a:r>
+              <a:t>SPORT DATA SOLUTION • PROJET 12</a:t>
+            </a:r>
+          </a:p>
+        </p:txBody>
+      </p:sp>
+      <p:sp>
+        <p:nvSpPr>
+          <p:cNvPr id="6" name="TextBox 5"/>
+          <p:cNvSpPr txBox="1"/>
+          <p:nvPr/>
+        </p:nvSpPr>
+        <p:spPr>
+          <a:xfrm>
+            <a:off x="10424160" y="6565392"/>
+            <a:ext cx="1143000" cy="182880"/>
+          </a:xfrm>
+          <a:prstGeom prst="rect">
+            <a:avLst/>
+          </a:prstGeom>
+          <a:noFill/>
+        </p:spPr>
+        <p:txBody>
+          <a:bodyPr wrap="none">
+            <a:spAutoFit/>
+          </a:bodyPr>
+          <a:lstStyle/>
+          <a:p>
+            <a:pPr algn="r">
+              <a:defRPr sz="850">
+                <a:solidFill>
+                  <a:srgbClr val="4E6080"/>
+                </a:solidFill>
+                <a:latin typeface="Aptos"/>
+              </a:defRPr>
+            </a:pPr>
+            <a:r>
+              <a:t>Fatou THIAM   13</a:t>
+            </a:r>
+          </a:p>
+        </p:txBody>
+      </p:sp>
+      <p:sp>
+        <p:nvSpPr>
+          <p:cNvPr id="7" name="Rounded Rectangle 6"/>
+          <p:cNvSpPr/>
+          <p:nvPr/>
+        </p:nvSpPr>
+        <p:spPr>
+          <a:xfrm>
+            <a:off x="594360" y="1554480"/>
+            <a:ext cx="3657600" cy="4160520"/>
           </a:xfrm>
           <a:prstGeom prst="roundRect">
-            <a:avLst>
-              <a:gd name="adj" fmla="val 3556"/>
-            </a:avLst>
+            <a:avLst/>
           </a:prstGeom>
           <a:solidFill>
-            <a:srgbClr val="FFFFFF"/>
+            <a:srgbClr val="F5F8FD"/>
           </a:solidFill>
           <a:ln w="12700">
             <a:solidFill>
-              <a:srgbClr val="DCE5EF"/>
+              <a:srgbClr val="E3E9F4"/>
             </a:solidFill>
-            <a:prstDash val="solid"/>
-          </a:ln>
-        </p:spPr>
-      </p:sp>
-      <p:sp>
-        <p:nvSpPr>
-          <p:cNvPr id="5" name="Shape 3"/>
-          <p:cNvSpPr/>
-          <p:nvPr/>
-        </p:nvSpPr>
-        <p:spPr>
-          <a:xfrm>
-            <a:off x="685800" y="1417320"/>
-            <a:ext cx="73152" cy="2057400"/>
-          </a:xfrm>
-          <a:prstGeom prst="rect">
+          </a:ln>
+        </p:spPr>
+        <p:style>
+          <a:lnRef idx="1">
+            <a:schemeClr val="accent1"/>
+          </a:lnRef>
+          <a:fillRef idx="3">
+            <a:schemeClr val="accent1"/>
+          </a:fillRef>
+          <a:effectRef idx="2">
+            <a:schemeClr val="accent1"/>
+          </a:effectRef>
+          <a:fontRef idx="minor">
+            <a:schemeClr val="lt1"/>
+          </a:fontRef>
+        </p:style>
+        <p:txBody>
+          <a:bodyPr lIns="109728" tIns="82296" rIns="109728" bIns="54864" rtlCol="0" anchor="ctr"/>
+          <a:lstStyle/>
+          <a:p>
+            <a:pPr algn="ctr">
+              <a:defRPr sz="1300" b="1">
+                <a:solidFill>
+                  <a:srgbClr val="102F56"/>
+                </a:solidFill>
+                <a:latin typeface="Aptos"/>
+              </a:defRPr>
+            </a:pPr>
+            <a:r>
+              <a:t>CE QUI EST VALIDÉ</a:t>
+            </a:r>
+          </a:p>
+          <a:p>
+            <a:pPr algn="ctr">
+              <a:defRPr sz="1100">
+                <a:solidFill>
+                  <a:srgbClr val="4E6080"/>
+                </a:solidFill>
+                <a:latin typeface="Aptos"/>
+              </a:defRPr>
+            </a:pPr>
+            <a:r>
+              <a:t>✓ Architecture automatisée de bout en bout</a:t>
+            </a:r>
+            <a:br/>
+            <a:r>
+              <a:t>✓ CDC et streaming continus</a:t>
+            </a:r>
+            <a:br/>
+            <a:r>
+              <a:t>✓ Notifications Slack automatiques</a:t>
+            </a:r>
+            <a:br/>
+            <a:r>
+              <a:t>✓ Calcul métier et export CSV automatiques</a:t>
+            </a:r>
+            <a:br/>
+            <a:r>
+              <a:t>✓ Checkpoints et reprise sur erreur</a:t>
+            </a:r>
+            <a:br/>
+            <a:r>
+              <a:t>✓ Restitution Power BI</a:t>
+            </a:r>
+          </a:p>
+        </p:txBody>
+      </p:sp>
+      <p:sp>
+        <p:nvSpPr>
+          <p:cNvPr id="8" name="Rounded Rectangle 7"/>
+          <p:cNvSpPr/>
+          <p:nvPr/>
+        </p:nvSpPr>
+        <p:spPr>
+          <a:xfrm>
+            <a:off x="4434840" y="1554480"/>
+            <a:ext cx="3429000" cy="4160520"/>
+          </a:xfrm>
+          <a:prstGeom prst="roundRect">
             <a:avLst/>
           </a:prstGeom>
           <a:solidFill>
-            <a:srgbClr val="2BAE66"/>
+            <a:srgbClr val="F5F8FD"/>
           </a:solidFill>
           <a:ln w="12700">
             <a:solidFill>
-              <a:srgbClr val="2BAE66"/>
+              <a:srgbClr val="E3E9F4"/>
             </a:solidFill>
-            <a:prstDash val="solid"/>
-          </a:ln>
-        </p:spPr>
-      </p:sp>
-      <p:sp>
-        <p:nvSpPr>
-          <p:cNvPr id="6" name="Text 4"/>
-          <p:cNvSpPr/>
-          <p:nvPr/>
-        </p:nvSpPr>
-        <p:spPr>
-          <a:xfrm>
-            <a:off x="914400" y="1581912"/>
-            <a:ext cx="2953512" cy="256032"/>
-          </a:xfrm>
-          <a:prstGeom prst="rect">
-            <a:avLst/>
-          </a:prstGeom>
-          <a:noFill/>
-          <a:ln/>
-        </p:spPr>
-        <p:txBody>
-          <a:bodyPr wrap="square" lIns="0" tIns="0" rIns="0" bIns="0" rtlCol="0" anchor="ctr"/>
-          <a:lstStyle/>
-          <a:p>
-            <a:pPr marL="0" indent="0">
-              <a:buNone/>
-            </a:pPr>
-            <a:r>
-              <a:rPr lang="en-US" sz="1400" b="1" dirty="0">
-                <a:solidFill>
-                  <a:srgbClr val="17324D"/>
-                </a:solidFill>
-              </a:rPr>
-              <a:t>Ce qui est validé</a:t>
-            </a:r>
-            <a:endParaRPr lang="en-US" sz="1400" dirty="0"/>
-          </a:p>
-        </p:txBody>
-      </p:sp>
-      <p:sp>
-        <p:nvSpPr>
-          <p:cNvPr id="7" name="Text 5"/>
-          <p:cNvSpPr/>
-          <p:nvPr/>
-        </p:nvSpPr>
-        <p:spPr>
-          <a:xfrm>
-            <a:off x="914400" y="1947672"/>
-            <a:ext cx="2953512" cy="1399032"/>
-          </a:xfrm>
-          <a:prstGeom prst="rect">
-            <a:avLst/>
-          </a:prstGeom>
-          <a:noFill/>
-          <a:ln/>
-        </p:spPr>
-        <p:txBody>
-          <a:bodyPr wrap="square" lIns="254" tIns="254" rIns="254" bIns="254" rtlCol="0" anchor="t"/>
-          <a:lstStyle/>
-          <a:p>
-            <a:r>
-              <a:rPr lang="en-US" sz="1120" dirty="0">
-                <a:solidFill>
-                  <a:srgbClr val="243447"/>
-                </a:solidFill>
-              </a:rPr>
-              <a:t>Architecture automatisée</a:t>
-            </a:r>
-            <a:endParaRPr lang="en-US" sz="1120" dirty="0"/>
-          </a:p>
-          <a:p>
-            <a:r>
-              <a:rPr lang="en-US" sz="1120" dirty="0">
-                <a:solidFill>
-                  <a:srgbClr val="243447"/>
-                </a:solidFill>
-              </a:rPr>
-              <a:t>CDC et streaming opérationnels</a:t>
-            </a:r>
-            <a:endParaRPr lang="en-US" sz="1120" dirty="0"/>
-          </a:p>
-          <a:p>
-            <a:r>
-              <a:rPr lang="en-US" sz="1120" dirty="0">
-                <a:solidFill>
-                  <a:srgbClr val="243447"/>
-                </a:solidFill>
-              </a:rPr>
-              <a:t>Règles métier calculées</a:t>
-            </a:r>
-            <a:endParaRPr lang="en-US" sz="1120" dirty="0"/>
-          </a:p>
-          <a:p>
-            <a:r>
-              <a:rPr lang="en-US" sz="1120" dirty="0">
-                <a:solidFill>
-                  <a:srgbClr val="243447"/>
-                </a:solidFill>
-              </a:rPr>
-              <a:t>Monitoring historisé</a:t>
-            </a:r>
-            <a:endParaRPr lang="en-US" sz="1120" dirty="0"/>
-          </a:p>
-          <a:p>
-            <a:r>
-              <a:rPr lang="en-US" sz="1120" dirty="0">
-                <a:solidFill>
-                  <a:srgbClr val="243447"/>
-                </a:solidFill>
-              </a:rPr>
-              <a:t>Restitution Power BI</a:t>
-            </a:r>
-            <a:endParaRPr lang="en-US" sz="1120" dirty="0"/>
-          </a:p>
-        </p:txBody>
-      </p:sp>
-      <p:sp>
-        <p:nvSpPr>
-          <p:cNvPr id="8" name="Shape 6"/>
-          <p:cNvSpPr/>
-          <p:nvPr/>
-        </p:nvSpPr>
-        <p:spPr>
-          <a:xfrm>
-            <a:off x="4434840" y="1417320"/>
-            <a:ext cx="3337560" cy="2057400"/>
+          </a:ln>
+        </p:spPr>
+        <p:style>
+          <a:lnRef idx="1">
+            <a:schemeClr val="accent1"/>
+          </a:lnRef>
+          <a:fillRef idx="3">
+            <a:schemeClr val="accent1"/>
+          </a:fillRef>
+          <a:effectRef idx="2">
+            <a:schemeClr val="accent1"/>
+          </a:effectRef>
+          <a:fontRef idx="minor">
+            <a:schemeClr val="lt1"/>
+          </a:fontRef>
+        </p:style>
+        <p:txBody>
+          <a:bodyPr lIns="109728" tIns="82296" rIns="109728" bIns="54864" rtlCol="0" anchor="ctr"/>
+          <a:lstStyle/>
+          <a:p>
+            <a:pPr algn="ctr">
+              <a:defRPr sz="1300" b="1">
+                <a:solidFill>
+                  <a:srgbClr val="102F56"/>
+                </a:solidFill>
+                <a:latin typeface="Aptos"/>
+              </a:defRPr>
+            </a:pPr>
+            <a:r>
+              <a:t>LIMITES DU POC</a:t>
+            </a:r>
+          </a:p>
+          <a:p>
+            <a:pPr algn="ctr">
+              <a:defRPr sz="1070">
+                <a:solidFill>
+                  <a:srgbClr val="4E6080"/>
+                </a:solidFill>
+                <a:latin typeface="Aptos"/>
+              </a:defRPr>
+            </a:pPr>
+            <a:r>
+              <a:t>• Données Strava simulées</a:t>
+            </a:r>
+            <a:br/>
+            <a:r>
+              <a:t>• Environnement Docker local</a:t>
+            </a:r>
+            <a:br/>
+            <a:r>
+              <a:t>• Règles métier paramétrées dans le code</a:t>
+            </a:r>
+            <a:br/>
+            <a:r>
+              <a:t>• Actualisation Power BI Desktop nécessaire</a:t>
+            </a:r>
+            <a:br/>
+            <a:r>
+              <a:t>• POC non dimensionné pour la production</a:t>
+            </a:r>
+          </a:p>
+        </p:txBody>
+      </p:sp>
+      <p:sp>
+        <p:nvSpPr>
+          <p:cNvPr id="9" name="Rounded Rectangle 8"/>
+          <p:cNvSpPr/>
+          <p:nvPr/>
+        </p:nvSpPr>
+        <p:spPr>
+          <a:xfrm>
+            <a:off x="8046720" y="1554480"/>
+            <a:ext cx="3520440" cy="4160520"/>
           </a:xfrm>
           <a:prstGeom prst="roundRect">
-            <a:avLst>
-              <a:gd name="adj" fmla="val 3556"/>
-            </a:avLst>
+            <a:avLst/>
           </a:prstGeom>
           <a:solidFill>
-            <a:srgbClr val="FFFFFF"/>
+            <a:srgbClr val="F5F8FD"/>
           </a:solidFill>
           <a:ln w="12700">
             <a:solidFill>
-              <a:srgbClr val="DCE5EF"/>
+              <a:srgbClr val="E3E9F4"/>
             </a:solidFill>
-            <a:prstDash val="solid"/>
-          </a:ln>
-        </p:spPr>
-      </p:sp>
-      <p:sp>
-        <p:nvSpPr>
-          <p:cNvPr id="9" name="Shape 7"/>
-          <p:cNvSpPr/>
-          <p:nvPr/>
-        </p:nvSpPr>
-        <p:spPr>
-          <a:xfrm>
-            <a:off x="4434840" y="1417320"/>
-            <a:ext cx="73152" cy="2057400"/>
-          </a:xfrm>
-          <a:prstGeom prst="rect">
+          </a:ln>
+        </p:spPr>
+        <p:style>
+          <a:lnRef idx="1">
+            <a:schemeClr val="accent1"/>
+          </a:lnRef>
+          <a:fillRef idx="3">
+            <a:schemeClr val="accent1"/>
+          </a:fillRef>
+          <a:effectRef idx="2">
+            <a:schemeClr val="accent1"/>
+          </a:effectRef>
+          <a:fontRef idx="minor">
+            <a:schemeClr val="lt1"/>
+          </a:fontRef>
+        </p:style>
+        <p:txBody>
+          <a:bodyPr lIns="109728" tIns="82296" rIns="109728" bIns="54864" rtlCol="0" anchor="ctr"/>
+          <a:lstStyle/>
+          <a:p>
+            <a:pPr algn="ctr">
+              <a:defRPr sz="1300" b="1">
+                <a:solidFill>
+                  <a:srgbClr val="102F56"/>
+                </a:solidFill>
+                <a:latin typeface="Aptos"/>
+              </a:defRPr>
+            </a:pPr>
+            <a:r>
+              <a:t>ÉVOLUTIONS</a:t>
+            </a:r>
+          </a:p>
+          <a:p>
+            <a:pPr algn="ctr">
+              <a:defRPr sz="1070">
+                <a:solidFill>
+                  <a:srgbClr val="4E6080"/>
+                </a:solidFill>
+                <a:latin typeface="Aptos"/>
+              </a:defRPr>
+            </a:pPr>
+            <a:r>
+              <a:t>• Connexion directe à Strava</a:t>
+            </a:r>
+            <a:br/>
+            <a:r>
+              <a:t>• Paramètres métier externalisés</a:t>
+            </a:r>
+            <a:br/>
+            <a:r>
+              <a:t>• Monitoring et alerting renforcés</a:t>
+            </a:r>
+            <a:br/>
+            <a:r>
+              <a:t>• Orchestrateur dédié en production</a:t>
+            </a:r>
+            <a:br/>
+            <a:r>
+              <a:t>• Power BI Service</a:t>
+            </a:r>
+            <a:br/>
+            <a:r>
+              <a:t>• Déploiement cloud</a:t>
+            </a:r>
+          </a:p>
+        </p:txBody>
+      </p:sp>
+      <p:sp>
+        <p:nvSpPr>
+          <p:cNvPr id="10" name="Rounded Rectangle 9"/>
+          <p:cNvSpPr/>
+          <p:nvPr/>
+        </p:nvSpPr>
+        <p:spPr>
+          <a:xfrm>
+            <a:off x="777240" y="5989320"/>
+            <a:ext cx="10652760" cy="438912"/>
+          </a:xfrm>
+          <a:prstGeom prst="roundRect">
             <a:avLst/>
           </a:prstGeom>
           <a:solidFill>
-            <a:srgbClr val="F59E0B"/>
+            <a:srgbClr val="E2EBFC"/>
           </a:solidFill>
-          <a:ln w="12700">
-            <a:solidFill>
-              <a:srgbClr val="F59E0B"/>
-            </a:solidFill>
-            <a:prstDash val="solid"/>
-          </a:ln>
-        </p:spPr>
-      </p:sp>
-      <p:sp>
-        <p:nvSpPr>
-          <p:cNvPr id="10" name="Text 8"/>
-          <p:cNvSpPr/>
-          <p:nvPr/>
-        </p:nvSpPr>
-        <p:spPr>
-          <a:xfrm>
-            <a:off x="4663440" y="1581912"/>
-            <a:ext cx="2953512" cy="256032"/>
-          </a:xfrm>
-          <a:prstGeom prst="rect">
-            <a:avLst/>
-          </a:prstGeom>
-          <a:noFill/>
-          <a:ln/>
-        </p:spPr>
-        <p:txBody>
-          <a:bodyPr wrap="square" lIns="0" tIns="0" rIns="0" bIns="0" rtlCol="0" anchor="ctr"/>
-          <a:lstStyle/>
-          <a:p>
-            <a:pPr marL="0" indent="0">
-              <a:buNone/>
-            </a:pPr>
-            <a:r>
-              <a:rPr lang="en-US" sz="1400" b="1" dirty="0">
-                <a:solidFill>
-                  <a:srgbClr val="17324D"/>
-                </a:solidFill>
-              </a:rPr>
-              <a:t>Limites du POC</a:t>
-            </a:r>
-            <a:endParaRPr lang="en-US" sz="1400" dirty="0"/>
-          </a:p>
-        </p:txBody>
-      </p:sp>
-      <p:sp>
-        <p:nvSpPr>
-          <p:cNvPr id="11" name="Text 9"/>
-          <p:cNvSpPr/>
-          <p:nvPr/>
-        </p:nvSpPr>
-        <p:spPr>
-          <a:xfrm>
-            <a:off x="4663440" y="1947672"/>
-            <a:ext cx="2953512" cy="1399032"/>
-          </a:xfrm>
-          <a:prstGeom prst="rect">
-            <a:avLst/>
-          </a:prstGeom>
-          <a:noFill/>
-          <a:ln/>
-        </p:spPr>
-        <p:txBody>
-          <a:bodyPr wrap="square" lIns="254" tIns="254" rIns="254" bIns="254" rtlCol="0" anchor="t"/>
-          <a:lstStyle/>
-          <a:p>
-            <a:r>
-              <a:rPr lang="en-US" sz="1120" dirty="0">
-                <a:solidFill>
-                  <a:srgbClr val="243447"/>
-                </a:solidFill>
-              </a:rPr>
-              <a:t>Données Strava simulées</a:t>
-            </a:r>
-            <a:endParaRPr lang="en-US" sz="1120" dirty="0"/>
-          </a:p>
-          <a:p>
-            <a:r>
-              <a:rPr lang="en-US" sz="1120" dirty="0">
-                <a:solidFill>
-                  <a:srgbClr val="243447"/>
-                </a:solidFill>
-              </a:rPr>
-              <a:t>Exécution locale Docker</a:t>
-            </a:r>
-            <a:endParaRPr lang="en-US" sz="1120" dirty="0"/>
-          </a:p>
-          <a:p>
-            <a:r>
-              <a:rPr lang="en-US" sz="1120" dirty="0">
-                <a:solidFill>
-                  <a:srgbClr val="243447"/>
-                </a:solidFill>
-              </a:rPr>
-              <a:t>Règles encore paramétrées dans le code</a:t>
-            </a:r>
-            <a:endParaRPr lang="en-US" sz="1120" dirty="0"/>
-          </a:p>
-          <a:p>
-            <a:r>
-              <a:rPr lang="en-US" sz="1120" dirty="0">
-                <a:solidFill>
-                  <a:srgbClr val="243447"/>
-                </a:solidFill>
-              </a:rPr>
-              <a:t>POC non dimensionné production</a:t>
-            </a:r>
-            <a:endParaRPr lang="en-US" sz="1120" dirty="0"/>
-          </a:p>
-        </p:txBody>
-      </p:sp>
-      <p:sp>
-        <p:nvSpPr>
-          <p:cNvPr id="12" name="Shape 10"/>
-          <p:cNvSpPr/>
-          <p:nvPr/>
-        </p:nvSpPr>
-        <p:spPr>
-          <a:xfrm>
-            <a:off x="8183880" y="1417320"/>
-            <a:ext cx="3337560" cy="2057400"/>
-          </a:xfrm>
-          <a:prstGeom prst="roundRect">
-            <a:avLst>
-              <a:gd name="adj" fmla="val 3556"/>
-            </a:avLst>
-          </a:prstGeom>
-          <a:solidFill>
-            <a:srgbClr val="FFFFFF"/>
-          </a:solidFill>
-          <a:ln w="12700">
-            <a:solidFill>
-              <a:srgbClr val="DCE5EF"/>
-            </a:solidFill>
-            <a:prstDash val="solid"/>
-          </a:ln>
-        </p:spPr>
-      </p:sp>
-      <p:sp>
-        <p:nvSpPr>
-          <p:cNvPr id="13" name="Shape 11"/>
-          <p:cNvSpPr/>
-          <p:nvPr/>
-        </p:nvSpPr>
-        <p:spPr>
-          <a:xfrm>
-            <a:off x="8183880" y="1417320"/>
-            <a:ext cx="73152" cy="2057400"/>
-          </a:xfrm>
-          <a:prstGeom prst="rect">
-            <a:avLst/>
-          </a:prstGeom>
-          <a:solidFill>
-            <a:srgbClr val="2F6BFF"/>
-          </a:solidFill>
-          <a:ln w="12700">
-            <a:solidFill>
-              <a:srgbClr val="2F6BFF"/>
-            </a:solidFill>
-            <a:prstDash val="solid"/>
-          </a:ln>
-        </p:spPr>
-      </p:sp>
-      <p:sp>
-        <p:nvSpPr>
-          <p:cNvPr id="14" name="Text 12"/>
-          <p:cNvSpPr/>
-          <p:nvPr/>
-        </p:nvSpPr>
-        <p:spPr>
-          <a:xfrm>
-            <a:off x="8412480" y="1581912"/>
-            <a:ext cx="2953512" cy="256032"/>
-          </a:xfrm>
-          <a:prstGeom prst="rect">
-            <a:avLst/>
-          </a:prstGeom>
-          <a:noFill/>
-          <a:ln/>
-        </p:spPr>
-        <p:txBody>
-          <a:bodyPr wrap="square" lIns="0" tIns="0" rIns="0" bIns="0" rtlCol="0" anchor="ctr"/>
-          <a:lstStyle/>
-          <a:p>
-            <a:pPr marL="0" indent="0">
-              <a:buNone/>
-            </a:pPr>
-            <a:r>
-              <a:rPr lang="en-US" sz="1400" b="1" dirty="0">
-                <a:solidFill>
-                  <a:srgbClr val="17324D"/>
-                </a:solidFill>
-              </a:rPr>
-              <a:t>Évolutions</a:t>
-            </a:r>
-            <a:endParaRPr lang="en-US" sz="1400" dirty="0"/>
-          </a:p>
-        </p:txBody>
-      </p:sp>
-      <p:sp>
-        <p:nvSpPr>
-          <p:cNvPr id="15" name="Text 13"/>
-          <p:cNvSpPr/>
-          <p:nvPr/>
-        </p:nvSpPr>
-        <p:spPr>
-          <a:xfrm>
-            <a:off x="8412480" y="1947672"/>
-            <a:ext cx="2953512" cy="1399032"/>
-          </a:xfrm>
-          <a:prstGeom prst="rect">
-            <a:avLst/>
-          </a:prstGeom>
-          <a:noFill/>
-          <a:ln/>
-        </p:spPr>
-        <p:txBody>
-          <a:bodyPr wrap="square" lIns="254" tIns="254" rIns="254" bIns="254" rtlCol="0" anchor="t"/>
-          <a:lstStyle/>
-          <a:p>
-            <a:r>
-              <a:rPr lang="en-US" sz="1120" dirty="0">
-                <a:solidFill>
-                  <a:srgbClr val="243447"/>
-                </a:solidFill>
-              </a:rPr>
-              <a:t>Connexion directe Strava</a:t>
-            </a:r>
-            <a:endParaRPr lang="en-US" sz="1120" dirty="0"/>
-          </a:p>
-          <a:p>
-            <a:r>
-              <a:rPr lang="en-US" sz="1120" dirty="0">
-                <a:solidFill>
-                  <a:srgbClr val="243447"/>
-                </a:solidFill>
-              </a:rPr>
-              <a:t>Paramétrage externalisé</a:t>
-            </a:r>
-            <a:endParaRPr lang="en-US" sz="1120" dirty="0"/>
-          </a:p>
-          <a:p>
-            <a:r>
-              <a:rPr lang="en-US" sz="1120" dirty="0">
-                <a:solidFill>
-                  <a:srgbClr val="243447"/>
-                </a:solidFill>
-              </a:rPr>
-              <a:t>Orchestration / alerting renforcés</a:t>
-            </a:r>
-            <a:endParaRPr lang="en-US" sz="1120" dirty="0"/>
-          </a:p>
-          <a:p>
-            <a:r>
-              <a:rPr lang="en-US" sz="1120" dirty="0">
-                <a:solidFill>
-                  <a:srgbClr val="243447"/>
-                </a:solidFill>
-              </a:rPr>
-              <a:t>Déploiement cloud et sécurité renforcée</a:t>
-            </a:r>
-            <a:endParaRPr lang="en-US" sz="1120" dirty="0"/>
-          </a:p>
-        </p:txBody>
-      </p:sp>
-      <p:sp>
-        <p:nvSpPr>
-          <p:cNvPr id="16" name="Shape 14"/>
-          <p:cNvSpPr/>
-          <p:nvPr/>
-        </p:nvSpPr>
-        <p:spPr>
-          <a:xfrm>
-            <a:off x="914400" y="4160520"/>
-            <a:ext cx="10332720" cy="960120"/>
-          </a:xfrm>
-          <a:prstGeom prst="roundRect">
-            <a:avLst>
-              <a:gd name="adj" fmla="val 7619"/>
-            </a:avLst>
-          </a:prstGeom>
-          <a:solidFill>
-            <a:srgbClr val="17324D"/>
-          </a:solidFill>
-          <a:ln w="12700">
-            <a:solidFill>
-              <a:srgbClr val="17324D"/>
-            </a:solidFill>
-            <a:prstDash val="solid"/>
-          </a:ln>
-        </p:spPr>
-      </p:sp>
-      <p:sp>
-        <p:nvSpPr>
-          <p:cNvPr id="17" name="Text 15"/>
-          <p:cNvSpPr/>
-          <p:nvPr/>
-        </p:nvSpPr>
-        <p:spPr>
-          <a:xfrm>
-            <a:off x="1325880" y="4453128"/>
-            <a:ext cx="9509760" cy="384048"/>
-          </a:xfrm>
-          <a:prstGeom prst="rect">
-            <a:avLst/>
-          </a:prstGeom>
-          <a:noFill/>
-          <a:ln/>
-        </p:spPr>
-        <p:txBody>
-          <a:bodyPr wrap="square" lIns="0" tIns="0" rIns="0" bIns="0" rtlCol="0" anchor="ctr"/>
-          <a:lstStyle/>
-          <a:p>
-            <a:pPr marL="0" indent="0" algn="ctr">
-              <a:buNone/>
-            </a:pPr>
-            <a:r>
-              <a:rPr lang="en-US" sz="1800" b="1" dirty="0">
-                <a:solidFill>
-                  <a:srgbClr val="FFFFFF"/>
-                </a:solidFill>
-              </a:rPr>
-              <a:t>Résultat : un pipeline cohérent, observable et démontrable, aligné avec les besoins du POC Avantages Sportifs.</a:t>
-            </a:r>
-            <a:endParaRPr lang="en-US" sz="1800" dirty="0"/>
-          </a:p>
-        </p:txBody>
-      </p:sp>
-      <p:sp>
-        <p:nvSpPr>
-          <p:cNvPr id="18" name="Text 16"/>
-          <p:cNvSpPr/>
-          <p:nvPr/>
-        </p:nvSpPr>
-        <p:spPr>
-          <a:xfrm>
-            <a:off x="3566160" y="5440680"/>
-            <a:ext cx="5029200" cy="365760"/>
-          </a:xfrm>
-          <a:prstGeom prst="rect">
-            <a:avLst/>
-          </a:prstGeom>
-          <a:noFill/>
-          <a:ln/>
-        </p:spPr>
-        <p:txBody>
-          <a:bodyPr wrap="square" lIns="0" tIns="0" rIns="0" bIns="0" rtlCol="0" anchor="ctr"/>
-          <a:lstStyle/>
-          <a:p>
-            <a:pPr marL="0" indent="0" algn="ctr">
-              <a:buNone/>
-            </a:pPr>
-            <a:r>
-              <a:rPr lang="en-US" sz="1700" b="1" dirty="0">
-                <a:solidFill>
-                  <a:srgbClr val="2F6BFF"/>
-                </a:solidFill>
-              </a:rPr>
-              <a:t>Merci — Questions / Démonstration</a:t>
-            </a:r>
-            <a:endParaRPr lang="en-US" sz="1700" dirty="0"/>
-          </a:p>
-        </p:txBody>
-      </p:sp>
-      <p:sp>
-        <p:nvSpPr>
-          <p:cNvPr id="25" name="Slide Number Placeholder 0"/>
-          <p:cNvSpPr>
-            <a:spLocks noGrp="1"/>
-          </p:cNvSpPr>
-          <p:nvPr>
-            <p:ph type="sldNum" sz="quarter" idx="4294967295"/>
-          </p:nvPr>
-        </p:nvSpPr>
-        <p:spPr>
-          <a:xfrm>
-            <a:off x="11391900" y="6473825"/>
-            <a:ext cx="800100" cy="300038"/>
-          </a:xfrm>
-          <a:prstGeom prst="rect">
-            <a:avLst/>
-          </a:prstGeom>
-          <a:extLst>
-            <a:ext uri="{C572A759-6A51-4108-AA02-DFA0A04FC94B}">
-              <ma14:wrappingTextBoxFlag xmlns:ma14="http://schemas.microsoft.com/office/mac/drawingml/2011/main" xmlns="" val="0"/>
-            </a:ext>
-          </a:extLst>
-        </p:spPr>
-        <p:txBody>
-          <a:bodyPr/>
-          <a:lstStyle>
-            <a:lvl1pPr>
-              <a:defRPr sz="800">
-                <a:solidFill>
-                  <a:srgbClr val="718096"/>
-                </a:solidFill>
+          <a:ln>
+            <a:noFill/>
+          </a:ln>
+        </p:spPr>
+        <p:style>
+          <a:lnRef idx="1">
+            <a:schemeClr val="accent1"/>
+          </a:lnRef>
+          <a:fillRef idx="3">
+            <a:schemeClr val="accent1"/>
+          </a:fillRef>
+          <a:effectRef idx="2">
+            <a:schemeClr val="accent1"/>
+          </a:effectRef>
+          <a:fontRef idx="minor">
+            <a:schemeClr val="lt1"/>
+          </a:fontRef>
+        </p:style>
+        <p:txBody>
+          <a:bodyPr rtlCol="0" anchor="ctr"/>
+          <a:lstStyle/>
+          <a:p>
+            <a:pPr algn="ctr">
+              <a:defRPr sz="1200" b="1">
+                <a:solidFill>
+                  <a:srgbClr val="102F56"/>
+                </a:solidFill>
+                <a:latin typeface="Aptos"/>
               </a:defRPr>
-            </a:lvl1pPr>
-          </a:lstStyle>
-          <a:p>
-            <a:pPr algn="l"/>
-            <a:fld id="{F7021451-1387-4CA6-816F-3879F97B5CBC}" type="slidenum">
-              <a:rPr lang="en-US" b="0"/>
-              <a:t>13</a:t>
-            </a:fld>
-            <a:endParaRPr lang="en-US"/>
+            </a:pPr>
+            <a:r>
+              <a:t>Une nouvelle activité suffit à déclencher automatiquement le traitement jusqu’aux données destinées à Power BI.</a:t>
+            </a:r>
           </a:p>
         </p:txBody>
       </p:sp>
@@ -4838,11 +4782,11 @@
   <p:clrMapOvr>
     <a:masterClrMapping/>
   </p:clrMapOvr>
-  <mc:AlternateContent xmlns:mc="http://schemas.openxmlformats.org/markup-compatibility/2006">
-    <mc:Choice xmlns:p14="http://schemas.microsoft.com/office/powerpoint/2010/main" Requires="p14">
+  <mc:AlternateContent xmlns:mc="http://schemas.openxmlformats.org/markup-compatibility/2006" xmlns:p14="http://schemas.microsoft.com/office/powerpoint/2010/main">
+    <mc:Choice Requires="p14">
       <p:transition spd="slow" p14:dur="2000"/>
     </mc:Choice>
-    <mc:Fallback>
+    <mc:Fallback xmlns="">
       <p:transition spd="slow"/>
     </mc:Fallback>
   </mc:AlternateContent>
@@ -5443,51 +5387,6 @@
               <a:t>Les paramètres métier sont conçus pour pouvoir évoluer.</a:t>
             </a:r>
             <a:endParaRPr lang="en-US" sz="1150" dirty="0"/>
-          </a:p>
-        </p:txBody>
-      </p:sp>
-      <p:sp>
-        <p:nvSpPr>
-          <p:cNvPr id="25" name="Slide Number Placeholder 0"/>
-          <p:cNvSpPr>
-            <a:spLocks noGrp="1"/>
-          </p:cNvSpPr>
-          <p:nvPr>
-            <p:ph type="sldNum" sz="quarter" idx="4294967295"/>
-          </p:nvPr>
-        </p:nvSpPr>
-        <p:spPr>
-          <a:xfrm>
-            <a:off x="11631168" y="6473952"/>
-            <a:ext cx="800000" cy="300000"/>
-          </a:xfrm>
-          <a:prstGeom prst="rect">
-            <a:avLst/>
-          </a:prstGeom>
-          <a:extLst>
-            <a:ext uri="{C572A759-6A51-4108-AA02-DFA0A04FC94B}">
-              <ma14:wrappingTextBoxFlag xmlns:ma14="http://schemas.microsoft.com/office/mac/drawingml/2011/main" xmlns="" val="0"/>
-            </a:ext>
-          </a:extLst>
-        </p:spPr>
-        <p:txBody>
-          <a:bodyPr/>
-          <a:lstStyle>
-            <a:lvl1pPr>
-              <a:defRPr sz="800">
-                <a:solidFill>
-                  <a:srgbClr val="718096"/>
-                </a:solidFill>
-              </a:defRPr>
-            </a:lvl1pPr>
-          </a:lstStyle>
-          <a:p>
-            <a:pPr algn="l"/>
-            <a:fld id="{F7021451-1387-4CA6-816F-3879F97B5CBC}" type="slidenum">
-              <a:rPr lang="en-US" b="0"/>
-              <a:t>2</a:t>
-            </a:fld>
-            <a:endParaRPr lang="en-US"/>
           </a:p>
         </p:txBody>
       </p:sp>
@@ -6600,51 +6499,6 @@
       </p:sp>
       <p:sp>
         <p:nvSpPr>
-          <p:cNvPr id="32" name="Slide Number Placeholder 0"/>
-          <p:cNvSpPr>
-            <a:spLocks noGrp="1"/>
-          </p:cNvSpPr>
-          <p:nvPr>
-            <p:ph type="sldNum" sz="quarter" idx="4294967295"/>
-          </p:nvPr>
-        </p:nvSpPr>
-        <p:spPr>
-          <a:xfrm>
-            <a:off x="11631168" y="6473952"/>
-            <a:ext cx="800000" cy="300000"/>
-          </a:xfrm>
-          <a:prstGeom prst="rect">
-            <a:avLst/>
-          </a:prstGeom>
-          <a:extLst>
-            <a:ext uri="{C572A759-6A51-4108-AA02-DFA0A04FC94B}">
-              <ma14:wrappingTextBoxFlag xmlns:ma14="http://schemas.microsoft.com/office/mac/drawingml/2011/main" xmlns="" val="0"/>
-            </a:ext>
-          </a:extLst>
-        </p:spPr>
-        <p:txBody>
-          <a:bodyPr/>
-          <a:lstStyle>
-            <a:lvl1pPr>
-              <a:defRPr sz="800">
-                <a:solidFill>
-                  <a:srgbClr val="718096"/>
-                </a:solidFill>
-              </a:defRPr>
-            </a:lvl1pPr>
-          </a:lstStyle>
-          <a:p>
-            <a:pPr algn="l"/>
-            <a:fld id="{F7021451-1387-4CA6-816F-3879F97B5CBC}" type="slidenum">
-              <a:rPr lang="en-US" b="0"/>
-              <a:t>3</a:t>
-            </a:fld>
-            <a:endParaRPr lang="en-US"/>
-          </a:p>
-        </p:txBody>
-      </p:sp>
-      <p:sp>
-        <p:nvSpPr>
           <p:cNvPr id="33" name="ZoneTexte 32"/>
           <p:cNvSpPr txBox="1"/>
           <p:nvPr/>
@@ -6673,11 +6527,6 @@
               </a:rPr>
               <a:t>Données sources</a:t>
             </a:r>
-            <a:endParaRPr lang="fr-FR" sz="1400" b="1" dirty="0">
-              <a:solidFill>
-                <a:srgbClr val="17324D"/>
-              </a:solidFill>
-            </a:endParaRPr>
           </a:p>
         </p:txBody>
       </p:sp>
@@ -6711,11 +6560,6 @@
               </a:rPr>
               <a:t>Données produites par le POC</a:t>
             </a:r>
-            <a:endParaRPr lang="fr-FR" sz="1400" b="1" dirty="0">
-              <a:solidFill>
-                <a:srgbClr val="17324D"/>
-              </a:solidFill>
-            </a:endParaRPr>
           </a:p>
         </p:txBody>
       </p:sp>
@@ -6954,79 +6798,1195 @@
       </p:grpSpPr>
       <p:sp>
         <p:nvSpPr>
-          <p:cNvPr id="34" name="Slide Number Placeholder 0"/>
-          <p:cNvSpPr>
-            <a:spLocks noGrp="1"/>
-          </p:cNvSpPr>
-          <p:nvPr>
-            <p:ph type="sldNum" sz="quarter" idx="4294967295"/>
-          </p:nvPr>
-        </p:nvSpPr>
-        <p:spPr>
-          <a:xfrm>
-            <a:off x="11631168" y="6473952"/>
-            <a:ext cx="800000" cy="300000"/>
-          </a:xfrm>
-          <a:prstGeom prst="rect">
-            <a:avLst/>
-          </a:prstGeom>
-          <a:extLst>
-            <a:ext uri="{C572A759-6A51-4108-AA02-DFA0A04FC94B}">
-              <ma14:wrappingTextBoxFlag xmlns:ma14="http://schemas.microsoft.com/office/mac/drawingml/2011/main" xmlns="" val="0"/>
-            </a:ext>
-          </a:extLst>
-        </p:spPr>
-        <p:txBody>
-          <a:bodyPr/>
-          <a:lstStyle>
-            <a:lvl1pPr>
-              <a:defRPr sz="800">
-                <a:solidFill>
-                  <a:srgbClr val="718096"/>
-                </a:solidFill>
+          <p:cNvPr id="2" name="Rectangle 1"/>
+          <p:cNvSpPr/>
+          <p:nvPr/>
+        </p:nvSpPr>
+        <p:spPr>
+          <a:xfrm>
+            <a:off x="0" y="0"/>
+            <a:ext cx="12192000" cy="182880"/>
+          </a:xfrm>
+          <a:prstGeom prst="rect">
+            <a:avLst/>
+          </a:prstGeom>
+          <a:solidFill>
+            <a:srgbClr val="2E65EB"/>
+          </a:solidFill>
+          <a:ln>
+            <a:noFill/>
+          </a:ln>
+        </p:spPr>
+        <p:style>
+          <a:lnRef idx="1">
+            <a:schemeClr val="accent1"/>
+          </a:lnRef>
+          <a:fillRef idx="3">
+            <a:schemeClr val="accent1"/>
+          </a:fillRef>
+          <a:effectRef idx="2">
+            <a:schemeClr val="accent1"/>
+          </a:effectRef>
+          <a:fontRef idx="minor">
+            <a:schemeClr val="lt1"/>
+          </a:fontRef>
+        </p:style>
+        <p:txBody>
+          <a:bodyPr rtlCol="0" anchor="ctr"/>
+          <a:lstStyle/>
+          <a:p>
+            <a:pPr algn="ctr"/>
+            <a:endParaRPr/>
+          </a:p>
+        </p:txBody>
+      </p:sp>
+      <p:sp>
+        <p:nvSpPr>
+          <p:cNvPr id="3" name="TextBox 2"/>
+          <p:cNvSpPr txBox="1"/>
+          <p:nvPr/>
+        </p:nvSpPr>
+        <p:spPr>
+          <a:xfrm>
+            <a:off x="566928" y="384048"/>
+            <a:ext cx="7498079" cy="502920"/>
+          </a:xfrm>
+          <a:prstGeom prst="rect">
+            <a:avLst/>
+          </a:prstGeom>
+          <a:noFill/>
+        </p:spPr>
+        <p:txBody>
+          <a:bodyPr wrap="none">
+            <a:spAutoFit/>
+          </a:bodyPr>
+          <a:lstStyle/>
+          <a:p>
+            <a:pPr>
+              <a:defRPr sz="2800" b="1">
+                <a:solidFill>
+                  <a:srgbClr val="102F56"/>
+                </a:solidFill>
+                <a:latin typeface="Aptos Display"/>
               </a:defRPr>
-            </a:lvl1pPr>
-          </a:lstStyle>
-          <a:p>
-            <a:pPr algn="l"/>
-            <a:fld id="{F7021451-1387-4CA6-816F-3879F97B5CBC}" type="slidenum">
-              <a:rPr lang="en-US" b="0"/>
-              <a:t>4</a:t>
-            </a:fld>
-            <a:endParaRPr lang="en-US"/>
-          </a:p>
-        </p:txBody>
-      </p:sp>
-      <p:pic>
-        <p:nvPicPr>
-          <p:cNvPr id="35" name="Image 34"/>
-          <p:cNvPicPr>
-            <a:picLocks noChangeAspect="1"/>
-          </p:cNvPicPr>
-          <p:nvPr/>
-        </p:nvPicPr>
-        <p:blipFill>
-          <a:blip r:embed="rId3">
-            <a:extLst>
-              <a:ext uri="{28A0092B-C50C-407E-A947-70E740481C1C}">
-                <a14:useLocalDpi xmlns:a14="http://schemas.microsoft.com/office/drawing/2010/main" val="0"/>
-              </a:ext>
-            </a:extLst>
-          </a:blip>
-          <a:stretch>
-            <a:fillRect/>
-          </a:stretch>
-        </p:blipFill>
-        <p:spPr>
-          <a:xfrm>
-            <a:off x="0" y="1"/>
-            <a:ext cx="12192000" cy="6838950"/>
-          </a:xfrm>
-          <a:prstGeom prst="rect">
-            <a:avLst/>
-          </a:prstGeom>
-        </p:spPr>
-      </p:pic>
+            </a:pPr>
+            <a:r>
+              <a:t>3. Architecture globale de la solution</a:t>
+            </a:r>
+          </a:p>
+        </p:txBody>
+      </p:sp>
+      <p:sp>
+        <p:nvSpPr>
+          <p:cNvPr id="4" name="TextBox 3"/>
+          <p:cNvSpPr txBox="1"/>
+          <p:nvPr/>
+        </p:nvSpPr>
+        <p:spPr>
+          <a:xfrm>
+            <a:off x="576072" y="1024128"/>
+            <a:ext cx="10972800" cy="347472"/>
+          </a:xfrm>
+          <a:prstGeom prst="rect">
+            <a:avLst/>
+          </a:prstGeom>
+          <a:noFill/>
+        </p:spPr>
+        <p:txBody>
+          <a:bodyPr wrap="none">
+            <a:spAutoFit/>
+          </a:bodyPr>
+          <a:lstStyle/>
+          <a:p>
+            <a:pPr>
+              <a:defRPr sz="1350">
+                <a:solidFill>
+                  <a:srgbClr val="4E6080"/>
+                </a:solidFill>
+                <a:latin typeface="Aptos"/>
+              </a:defRPr>
+            </a:pPr>
+            <a:r>
+              <a:t>Une architecture événementielle automatisée : une nouvelle activité déclenche les traitements temps réel et analytiques.</a:t>
+            </a:r>
+          </a:p>
+        </p:txBody>
+      </p:sp>
+      <p:sp>
+        <p:nvSpPr>
+          <p:cNvPr id="5" name="Rounded Rectangle 4"/>
+          <p:cNvSpPr/>
+          <p:nvPr/>
+        </p:nvSpPr>
+        <p:spPr>
+          <a:xfrm>
+            <a:off x="4736592" y="1481328"/>
+            <a:ext cx="2395728" cy="484632"/>
+          </a:xfrm>
+          <a:prstGeom prst="roundRect">
+            <a:avLst/>
+          </a:prstGeom>
+          <a:solidFill>
+            <a:srgbClr val="102F56"/>
+          </a:solidFill>
+          <a:ln>
+            <a:noFill/>
+          </a:ln>
+        </p:spPr>
+        <p:style>
+          <a:lnRef idx="1">
+            <a:schemeClr val="accent1"/>
+          </a:lnRef>
+          <a:fillRef idx="3">
+            <a:schemeClr val="accent1"/>
+          </a:fillRef>
+          <a:effectRef idx="2">
+            <a:schemeClr val="accent1"/>
+          </a:effectRef>
+          <a:fontRef idx="minor">
+            <a:schemeClr val="lt1"/>
+          </a:fontRef>
+        </p:style>
+        <p:txBody>
+          <a:bodyPr rtlCol="0" anchor="ctr"/>
+          <a:lstStyle/>
+          <a:p>
+            <a:pPr algn="ctr">
+              <a:defRPr sz="1400" b="1">
+                <a:solidFill>
+                  <a:srgbClr val="FFFFFF"/>
+                </a:solidFill>
+                <a:latin typeface="Aptos"/>
+              </a:defRPr>
+            </a:pPr>
+            <a:r>
+              <a:t>PostgreSQL</a:t>
+            </a:r>
+          </a:p>
+        </p:txBody>
+      </p:sp>
+      <p:sp>
+        <p:nvSpPr>
+          <p:cNvPr id="6" name="Rounded Rectangle 5"/>
+          <p:cNvSpPr/>
+          <p:nvPr/>
+        </p:nvSpPr>
+        <p:spPr>
+          <a:xfrm>
+            <a:off x="4736592" y="2121408"/>
+            <a:ext cx="2395728" cy="484632"/>
+          </a:xfrm>
+          <a:prstGeom prst="roundRect">
+            <a:avLst/>
+          </a:prstGeom>
+          <a:solidFill>
+            <a:srgbClr val="6D3FE2"/>
+          </a:solidFill>
+          <a:ln>
+            <a:noFill/>
+          </a:ln>
+        </p:spPr>
+        <p:style>
+          <a:lnRef idx="1">
+            <a:schemeClr val="accent1"/>
+          </a:lnRef>
+          <a:fillRef idx="3">
+            <a:schemeClr val="accent1"/>
+          </a:fillRef>
+          <a:effectRef idx="2">
+            <a:schemeClr val="accent1"/>
+          </a:effectRef>
+          <a:fontRef idx="minor">
+            <a:schemeClr val="lt1"/>
+          </a:fontRef>
+        </p:style>
+        <p:txBody>
+          <a:bodyPr rtlCol="0" anchor="ctr"/>
+          <a:lstStyle/>
+          <a:p>
+            <a:pPr algn="ctr">
+              <a:defRPr sz="1400" b="1">
+                <a:solidFill>
+                  <a:srgbClr val="FFFFFF"/>
+                </a:solidFill>
+                <a:latin typeface="Aptos"/>
+              </a:defRPr>
+            </a:pPr>
+            <a:r>
+              <a:t>Debezium</a:t>
+            </a:r>
+          </a:p>
+        </p:txBody>
+      </p:sp>
+      <p:sp>
+        <p:nvSpPr>
+          <p:cNvPr id="7" name="Rounded Rectangle 6"/>
+          <p:cNvSpPr/>
+          <p:nvPr/>
+        </p:nvSpPr>
+        <p:spPr>
+          <a:xfrm>
+            <a:off x="4736592" y="2761488"/>
+            <a:ext cx="2395728" cy="484632"/>
+          </a:xfrm>
+          <a:prstGeom prst="roundRect">
+            <a:avLst/>
+          </a:prstGeom>
+          <a:solidFill>
+            <a:srgbClr val="EF305D"/>
+          </a:solidFill>
+          <a:ln>
+            <a:noFill/>
+          </a:ln>
+        </p:spPr>
+        <p:style>
+          <a:lnRef idx="1">
+            <a:schemeClr val="accent1"/>
+          </a:lnRef>
+          <a:fillRef idx="3">
+            <a:schemeClr val="accent1"/>
+          </a:fillRef>
+          <a:effectRef idx="2">
+            <a:schemeClr val="accent1"/>
+          </a:effectRef>
+          <a:fontRef idx="minor">
+            <a:schemeClr val="lt1"/>
+          </a:fontRef>
+        </p:style>
+        <p:txBody>
+          <a:bodyPr rtlCol="0" anchor="ctr"/>
+          <a:lstStyle/>
+          <a:p>
+            <a:pPr algn="ctr">
+              <a:defRPr sz="1400" b="1">
+                <a:solidFill>
+                  <a:srgbClr val="FFFFFF"/>
+                </a:solidFill>
+                <a:latin typeface="Aptos"/>
+              </a:defRPr>
+            </a:pPr>
+            <a:r>
+              <a:t>Redpanda</a:t>
+            </a:r>
+          </a:p>
+        </p:txBody>
+      </p:sp>
+      <p:cxnSp>
+        <p:nvCxnSpPr>
+          <p:cNvPr id="8" name="Connector 7"/>
+          <p:cNvCxnSpPr/>
+          <p:nvPr/>
+        </p:nvCxnSpPr>
+        <p:spPr>
+          <a:xfrm>
+            <a:off x="5934456" y="1965960"/>
+            <a:ext cx="0" cy="155448"/>
+          </a:xfrm>
+          <a:prstGeom prst="line">
+            <a:avLst/>
+          </a:prstGeom>
+          <a:ln w="20320">
+            <a:solidFill>
+              <a:srgbClr val="3C4E6C"/>
+            </a:solidFill>
+          </a:ln>
+        </p:spPr>
+        <p:style>
+          <a:lnRef idx="2">
+            <a:schemeClr val="accent1"/>
+          </a:lnRef>
+          <a:fillRef idx="0">
+            <a:schemeClr val="accent1"/>
+          </a:fillRef>
+          <a:effectRef idx="1">
+            <a:schemeClr val="accent1"/>
+          </a:effectRef>
+          <a:fontRef idx="minor">
+            <a:schemeClr val="tx1"/>
+          </a:fontRef>
+        </p:style>
+      </p:cxnSp>
+      <p:cxnSp>
+        <p:nvCxnSpPr>
+          <p:cNvPr id="9" name="Connector 8"/>
+          <p:cNvCxnSpPr/>
+          <p:nvPr/>
+        </p:nvCxnSpPr>
+        <p:spPr>
+          <a:xfrm>
+            <a:off x="5934456" y="2606040"/>
+            <a:ext cx="0" cy="155448"/>
+          </a:xfrm>
+          <a:prstGeom prst="line">
+            <a:avLst/>
+          </a:prstGeom>
+          <a:ln w="20320">
+            <a:solidFill>
+              <a:srgbClr val="3C4E6C"/>
+            </a:solidFill>
+          </a:ln>
+        </p:spPr>
+        <p:style>
+          <a:lnRef idx="2">
+            <a:schemeClr val="accent1"/>
+          </a:lnRef>
+          <a:fillRef idx="0">
+            <a:schemeClr val="accent1"/>
+          </a:fillRef>
+          <a:effectRef idx="1">
+            <a:schemeClr val="accent1"/>
+          </a:effectRef>
+          <a:fontRef idx="minor">
+            <a:schemeClr val="tx1"/>
+          </a:fontRef>
+        </p:style>
+      </p:cxnSp>
+      <p:sp>
+        <p:nvSpPr>
+          <p:cNvPr id="10" name="Rounded Rectangle 9"/>
+          <p:cNvSpPr/>
+          <p:nvPr/>
+        </p:nvSpPr>
+        <p:spPr>
+          <a:xfrm>
+            <a:off x="2788920" y="3657600"/>
+            <a:ext cx="2286000" cy="502920"/>
+          </a:xfrm>
+          <a:prstGeom prst="roundRect">
+            <a:avLst/>
+          </a:prstGeom>
+          <a:solidFill>
+            <a:srgbClr val="FA9E00"/>
+          </a:solidFill>
+          <a:ln>
+            <a:noFill/>
+          </a:ln>
+        </p:spPr>
+        <p:style>
+          <a:lnRef idx="1">
+            <a:schemeClr val="accent1"/>
+          </a:lnRef>
+          <a:fillRef idx="3">
+            <a:schemeClr val="accent1"/>
+          </a:fillRef>
+          <a:effectRef idx="2">
+            <a:schemeClr val="accent1"/>
+          </a:effectRef>
+          <a:fontRef idx="minor">
+            <a:schemeClr val="lt1"/>
+          </a:fontRef>
+        </p:style>
+        <p:txBody>
+          <a:bodyPr rtlCol="0" anchor="ctr"/>
+          <a:lstStyle/>
+          <a:p>
+            <a:pPr algn="ctr">
+              <a:defRPr sz="1300" b="1">
+                <a:solidFill>
+                  <a:srgbClr val="FFFFFF"/>
+                </a:solidFill>
+                <a:latin typeface="Aptos"/>
+              </a:defRPr>
+            </a:pPr>
+            <a:r>
+              <a:t>Consumer Python</a:t>
+            </a:r>
+          </a:p>
+        </p:txBody>
+      </p:sp>
+      <p:sp>
+        <p:nvSpPr>
+          <p:cNvPr id="11" name="Rounded Rectangle 10"/>
+          <p:cNvSpPr/>
+          <p:nvPr/>
+        </p:nvSpPr>
+        <p:spPr>
+          <a:xfrm>
+            <a:off x="2788920" y="4389120"/>
+            <a:ext cx="2286000" cy="502920"/>
+          </a:xfrm>
+          <a:prstGeom prst="roundRect">
+            <a:avLst/>
+          </a:prstGeom>
+          <a:solidFill>
+            <a:srgbClr val="E2EBFC"/>
+          </a:solidFill>
+          <a:ln>
+            <a:noFill/>
+          </a:ln>
+        </p:spPr>
+        <p:style>
+          <a:lnRef idx="1">
+            <a:schemeClr val="accent1"/>
+          </a:lnRef>
+          <a:fillRef idx="3">
+            <a:schemeClr val="accent1"/>
+          </a:fillRef>
+          <a:effectRef idx="2">
+            <a:schemeClr val="accent1"/>
+          </a:effectRef>
+          <a:fontRef idx="minor">
+            <a:schemeClr val="lt1"/>
+          </a:fontRef>
+        </p:style>
+        <p:txBody>
+          <a:bodyPr rtlCol="0" anchor="ctr"/>
+          <a:lstStyle/>
+          <a:p>
+            <a:pPr algn="ctr">
+              <a:defRPr sz="1400" b="1">
+                <a:solidFill>
+                  <a:srgbClr val="14181F"/>
+                </a:solidFill>
+                <a:latin typeface="Aptos"/>
+              </a:defRPr>
+            </a:pPr>
+            <a:r>
+              <a:t>Slack</a:t>
+            </a:r>
+          </a:p>
+        </p:txBody>
+      </p:sp>
+      <p:sp>
+        <p:nvSpPr>
+          <p:cNvPr id="12" name="Rounded Rectangle 11"/>
+          <p:cNvSpPr/>
+          <p:nvPr/>
+        </p:nvSpPr>
+        <p:spPr>
+          <a:xfrm>
+            <a:off x="6812280" y="3456432"/>
+            <a:ext cx="2286000" cy="438912"/>
+          </a:xfrm>
+          <a:prstGeom prst="roundRect">
+            <a:avLst/>
+          </a:prstGeom>
+          <a:solidFill>
+            <a:srgbClr val="14B1C3"/>
+          </a:solidFill>
+          <a:ln>
+            <a:noFill/>
+          </a:ln>
+        </p:spPr>
+        <p:style>
+          <a:lnRef idx="1">
+            <a:schemeClr val="accent1"/>
+          </a:lnRef>
+          <a:fillRef idx="3">
+            <a:schemeClr val="accent1"/>
+          </a:fillRef>
+          <a:effectRef idx="2">
+            <a:schemeClr val="accent1"/>
+          </a:effectRef>
+          <a:fontRef idx="minor">
+            <a:schemeClr val="lt1"/>
+          </a:fontRef>
+        </p:style>
+        <p:txBody>
+          <a:bodyPr rtlCol="0" anchor="ctr"/>
+          <a:lstStyle/>
+          <a:p>
+            <a:pPr algn="ctr">
+              <a:defRPr sz="1250" b="1">
+                <a:solidFill>
+                  <a:srgbClr val="FFFFFF"/>
+                </a:solidFill>
+                <a:latin typeface="Aptos"/>
+              </a:defRPr>
+            </a:pPr>
+            <a:r>
+              <a:t>Spark Streaming</a:t>
+            </a:r>
+          </a:p>
+        </p:txBody>
+      </p:sp>
+      <p:sp>
+        <p:nvSpPr>
+          <p:cNvPr id="13" name="Rounded Rectangle 12"/>
+          <p:cNvSpPr/>
+          <p:nvPr/>
+        </p:nvSpPr>
+        <p:spPr>
+          <a:xfrm>
+            <a:off x="6812280" y="4005072"/>
+            <a:ext cx="2286000" cy="438912"/>
+          </a:xfrm>
+          <a:prstGeom prst="roundRect">
+            <a:avLst/>
+          </a:prstGeom>
+          <a:solidFill>
+            <a:srgbClr val="2575F0"/>
+          </a:solidFill>
+          <a:ln>
+            <a:noFill/>
+          </a:ln>
+        </p:spPr>
+        <p:style>
+          <a:lnRef idx="1">
+            <a:schemeClr val="accent1"/>
+          </a:lnRef>
+          <a:fillRef idx="3">
+            <a:schemeClr val="accent1"/>
+          </a:fillRef>
+          <a:effectRef idx="2">
+            <a:schemeClr val="accent1"/>
+          </a:effectRef>
+          <a:fontRef idx="minor">
+            <a:schemeClr val="lt1"/>
+          </a:fontRef>
+        </p:style>
+        <p:txBody>
+          <a:bodyPr rtlCol="0" anchor="ctr"/>
+          <a:lstStyle/>
+          <a:p>
+            <a:pPr algn="ctr">
+              <a:defRPr sz="1250" b="1">
+                <a:solidFill>
+                  <a:srgbClr val="FFFFFF"/>
+                </a:solidFill>
+                <a:latin typeface="Aptos"/>
+              </a:defRPr>
+            </a:pPr>
+            <a:r>
+              <a:t>Delta Lake</a:t>
+            </a:r>
+          </a:p>
+        </p:txBody>
+      </p:sp>
+      <p:sp>
+        <p:nvSpPr>
+          <p:cNvPr id="14" name="Rounded Rectangle 13"/>
+          <p:cNvSpPr/>
+          <p:nvPr/>
+        </p:nvSpPr>
+        <p:spPr>
+          <a:xfrm>
+            <a:off x="6812280" y="4553712"/>
+            <a:ext cx="2286000" cy="438912"/>
+          </a:xfrm>
+          <a:prstGeom prst="roundRect">
+            <a:avLst/>
+          </a:prstGeom>
+          <a:solidFill>
+            <a:srgbClr val="6D3FE2"/>
+          </a:solidFill>
+          <a:ln>
+            <a:noFill/>
+          </a:ln>
+        </p:spPr>
+        <p:style>
+          <a:lnRef idx="1">
+            <a:schemeClr val="accent1"/>
+          </a:lnRef>
+          <a:fillRef idx="3">
+            <a:schemeClr val="accent1"/>
+          </a:fillRef>
+          <a:effectRef idx="2">
+            <a:schemeClr val="accent1"/>
+          </a:effectRef>
+          <a:fontRef idx="minor">
+            <a:schemeClr val="lt1"/>
+          </a:fontRef>
+        </p:style>
+        <p:txBody>
+          <a:bodyPr rtlCol="0" anchor="ctr"/>
+          <a:lstStyle/>
+          <a:p>
+            <a:pPr algn="ctr">
+              <a:defRPr sz="1150" b="1">
+                <a:solidFill>
+                  <a:srgbClr val="FFFFFF"/>
+                </a:solidFill>
+                <a:latin typeface="Aptos"/>
+              </a:defRPr>
+            </a:pPr>
+            <a:r>
+              <a:t>Worker automatique</a:t>
+            </a:r>
+          </a:p>
+        </p:txBody>
+      </p:sp>
+      <p:sp>
+        <p:nvSpPr>
+          <p:cNvPr id="15" name="Rounded Rectangle 14"/>
+          <p:cNvSpPr/>
+          <p:nvPr/>
+        </p:nvSpPr>
+        <p:spPr>
+          <a:xfrm>
+            <a:off x="6812280" y="5102352"/>
+            <a:ext cx="2286000" cy="438912"/>
+          </a:xfrm>
+          <a:prstGeom prst="roundRect">
+            <a:avLst/>
+          </a:prstGeom>
+          <a:solidFill>
+            <a:srgbClr val="29AB5E"/>
+          </a:solidFill>
+          <a:ln>
+            <a:noFill/>
+          </a:ln>
+        </p:spPr>
+        <p:style>
+          <a:lnRef idx="1">
+            <a:schemeClr val="accent1"/>
+          </a:lnRef>
+          <a:fillRef idx="3">
+            <a:schemeClr val="accent1"/>
+          </a:fillRef>
+          <a:effectRef idx="2">
+            <a:schemeClr val="accent1"/>
+          </a:effectRef>
+          <a:fontRef idx="minor">
+            <a:schemeClr val="lt1"/>
+          </a:fontRef>
+        </p:style>
+        <p:txBody>
+          <a:bodyPr rtlCol="0" anchor="ctr"/>
+          <a:lstStyle/>
+          <a:p>
+            <a:pPr algn="ctr">
+              <a:defRPr sz="1150" b="1">
+                <a:solidFill>
+                  <a:srgbClr val="FFFFFF"/>
+                </a:solidFill>
+                <a:latin typeface="Aptos"/>
+              </a:defRPr>
+            </a:pPr>
+            <a:r>
+              <a:t>employee_benefits</a:t>
+            </a:r>
+          </a:p>
+        </p:txBody>
+      </p:sp>
+      <p:sp>
+        <p:nvSpPr>
+          <p:cNvPr id="16" name="Rounded Rectangle 15"/>
+          <p:cNvSpPr/>
+          <p:nvPr/>
+        </p:nvSpPr>
+        <p:spPr>
+          <a:xfrm>
+            <a:off x="6812280" y="5650992"/>
+            <a:ext cx="2286000" cy="384048"/>
+          </a:xfrm>
+          <a:prstGeom prst="roundRect">
+            <a:avLst/>
+          </a:prstGeom>
+          <a:solidFill>
+            <a:srgbClr val="FACD57"/>
+          </a:solidFill>
+          <a:ln>
+            <a:noFill/>
+          </a:ln>
+        </p:spPr>
+        <p:style>
+          <a:lnRef idx="1">
+            <a:schemeClr val="accent1"/>
+          </a:lnRef>
+          <a:fillRef idx="3">
+            <a:schemeClr val="accent1"/>
+          </a:fillRef>
+          <a:effectRef idx="2">
+            <a:schemeClr val="accent1"/>
+          </a:effectRef>
+          <a:fontRef idx="minor">
+            <a:schemeClr val="lt1"/>
+          </a:fontRef>
+        </p:style>
+        <p:txBody>
+          <a:bodyPr rtlCol="0" anchor="ctr"/>
+          <a:lstStyle/>
+          <a:p>
+            <a:pPr algn="ctr">
+              <a:defRPr sz="1200" b="1">
+                <a:solidFill>
+                  <a:srgbClr val="14181F"/>
+                </a:solidFill>
+                <a:latin typeface="Aptos"/>
+              </a:defRPr>
+            </a:pPr>
+            <a:r>
+              <a:t>CSV</a:t>
+            </a:r>
+          </a:p>
+        </p:txBody>
+      </p:sp>
+      <p:sp>
+        <p:nvSpPr>
+          <p:cNvPr id="17" name="Rounded Rectangle 16"/>
+          <p:cNvSpPr/>
+          <p:nvPr/>
+        </p:nvSpPr>
+        <p:spPr>
+          <a:xfrm>
+            <a:off x="9326880" y="5650992"/>
+            <a:ext cx="2057400" cy="384048"/>
+          </a:xfrm>
+          <a:prstGeom prst="roundRect">
+            <a:avLst/>
+          </a:prstGeom>
+          <a:solidFill>
+            <a:srgbClr val="E2EBFC"/>
+          </a:solidFill>
+          <a:ln>
+            <a:noFill/>
+          </a:ln>
+        </p:spPr>
+        <p:style>
+          <a:lnRef idx="1">
+            <a:schemeClr val="accent1"/>
+          </a:lnRef>
+          <a:fillRef idx="3">
+            <a:schemeClr val="accent1"/>
+          </a:fillRef>
+          <a:effectRef idx="2">
+            <a:schemeClr val="accent1"/>
+          </a:effectRef>
+          <a:fontRef idx="minor">
+            <a:schemeClr val="lt1"/>
+          </a:fontRef>
+        </p:style>
+        <p:txBody>
+          <a:bodyPr rtlCol="0" anchor="ctr"/>
+          <a:lstStyle/>
+          <a:p>
+            <a:pPr algn="ctr">
+              <a:defRPr sz="1200" b="1">
+                <a:solidFill>
+                  <a:srgbClr val="14181F"/>
+                </a:solidFill>
+                <a:latin typeface="Aptos"/>
+              </a:defRPr>
+            </a:pPr>
+            <a:r>
+              <a:t>Power BI</a:t>
+            </a:r>
+          </a:p>
+        </p:txBody>
+      </p:sp>
+      <p:cxnSp>
+        <p:nvCxnSpPr>
+          <p:cNvPr id="18" name="Connector 17"/>
+          <p:cNvCxnSpPr/>
+          <p:nvPr/>
+        </p:nvCxnSpPr>
+        <p:spPr>
+          <a:xfrm>
+            <a:off x="3931920" y="3383280"/>
+            <a:ext cx="4023359" cy="0"/>
+          </a:xfrm>
+          <a:prstGeom prst="line">
+            <a:avLst/>
+          </a:prstGeom>
+          <a:ln w="19050">
+            <a:solidFill>
+              <a:srgbClr val="3C4E6C"/>
+            </a:solidFill>
+          </a:ln>
+        </p:spPr>
+        <p:style>
+          <a:lnRef idx="2">
+            <a:schemeClr val="accent1"/>
+          </a:lnRef>
+          <a:fillRef idx="0">
+            <a:schemeClr val="accent1"/>
+          </a:fillRef>
+          <a:effectRef idx="1">
+            <a:schemeClr val="accent1"/>
+          </a:effectRef>
+          <a:fontRef idx="minor">
+            <a:schemeClr val="tx1"/>
+          </a:fontRef>
+        </p:style>
+      </p:cxnSp>
+      <p:cxnSp>
+        <p:nvCxnSpPr>
+          <p:cNvPr id="19" name="Connector 18"/>
+          <p:cNvCxnSpPr/>
+          <p:nvPr/>
+        </p:nvCxnSpPr>
+        <p:spPr>
+          <a:xfrm>
+            <a:off x="5934456" y="3246120"/>
+            <a:ext cx="0" cy="137160"/>
+          </a:xfrm>
+          <a:prstGeom prst="line">
+            <a:avLst/>
+          </a:prstGeom>
+          <a:ln w="20320">
+            <a:solidFill>
+              <a:srgbClr val="3C4E6C"/>
+            </a:solidFill>
+          </a:ln>
+        </p:spPr>
+        <p:style>
+          <a:lnRef idx="2">
+            <a:schemeClr val="accent1"/>
+          </a:lnRef>
+          <a:fillRef idx="0">
+            <a:schemeClr val="accent1"/>
+          </a:fillRef>
+          <a:effectRef idx="1">
+            <a:schemeClr val="accent1"/>
+          </a:effectRef>
+          <a:fontRef idx="minor">
+            <a:schemeClr val="tx1"/>
+          </a:fontRef>
+        </p:style>
+      </p:cxnSp>
+      <p:cxnSp>
+        <p:nvCxnSpPr>
+          <p:cNvPr id="20" name="Connector 19"/>
+          <p:cNvCxnSpPr/>
+          <p:nvPr/>
+        </p:nvCxnSpPr>
+        <p:spPr>
+          <a:xfrm>
+            <a:off x="3931920" y="3383280"/>
+            <a:ext cx="0" cy="274320"/>
+          </a:xfrm>
+          <a:prstGeom prst="line">
+            <a:avLst/>
+          </a:prstGeom>
+          <a:ln w="20320">
+            <a:solidFill>
+              <a:srgbClr val="3C4E6C"/>
+            </a:solidFill>
+          </a:ln>
+        </p:spPr>
+        <p:style>
+          <a:lnRef idx="2">
+            <a:schemeClr val="accent1"/>
+          </a:lnRef>
+          <a:fillRef idx="0">
+            <a:schemeClr val="accent1"/>
+          </a:fillRef>
+          <a:effectRef idx="1">
+            <a:schemeClr val="accent1"/>
+          </a:effectRef>
+          <a:fontRef idx="minor">
+            <a:schemeClr val="tx1"/>
+          </a:fontRef>
+        </p:style>
+      </p:cxnSp>
+      <p:cxnSp>
+        <p:nvCxnSpPr>
+          <p:cNvPr id="21" name="Connector 20"/>
+          <p:cNvCxnSpPr/>
+          <p:nvPr/>
+        </p:nvCxnSpPr>
+        <p:spPr>
+          <a:xfrm>
+            <a:off x="7955279" y="3383280"/>
+            <a:ext cx="0" cy="73152"/>
+          </a:xfrm>
+          <a:prstGeom prst="line">
+            <a:avLst/>
+          </a:prstGeom>
+          <a:ln w="20320">
+            <a:solidFill>
+              <a:srgbClr val="3C4E6C"/>
+            </a:solidFill>
+          </a:ln>
+        </p:spPr>
+        <p:style>
+          <a:lnRef idx="2">
+            <a:schemeClr val="accent1"/>
+          </a:lnRef>
+          <a:fillRef idx="0">
+            <a:schemeClr val="accent1"/>
+          </a:fillRef>
+          <a:effectRef idx="1">
+            <a:schemeClr val="accent1"/>
+          </a:effectRef>
+          <a:fontRef idx="minor">
+            <a:schemeClr val="tx1"/>
+          </a:fontRef>
+        </p:style>
+      </p:cxnSp>
+      <p:cxnSp>
+        <p:nvCxnSpPr>
+          <p:cNvPr id="22" name="Connector 21"/>
+          <p:cNvCxnSpPr/>
+          <p:nvPr/>
+        </p:nvCxnSpPr>
+        <p:spPr>
+          <a:xfrm>
+            <a:off x="3931920" y="4160520"/>
+            <a:ext cx="0" cy="228600"/>
+          </a:xfrm>
+          <a:prstGeom prst="line">
+            <a:avLst/>
+          </a:prstGeom>
+          <a:ln w="20320">
+            <a:solidFill>
+              <a:srgbClr val="3C4E6C"/>
+            </a:solidFill>
+          </a:ln>
+        </p:spPr>
+        <p:style>
+          <a:lnRef idx="2">
+            <a:schemeClr val="accent1"/>
+          </a:lnRef>
+          <a:fillRef idx="0">
+            <a:schemeClr val="accent1"/>
+          </a:fillRef>
+          <a:effectRef idx="1">
+            <a:schemeClr val="accent1"/>
+          </a:effectRef>
+          <a:fontRef idx="minor">
+            <a:schemeClr val="tx1"/>
+          </a:fontRef>
+        </p:style>
+      </p:cxnSp>
+      <p:cxnSp>
+        <p:nvCxnSpPr>
+          <p:cNvPr id="23" name="Connector 22"/>
+          <p:cNvCxnSpPr/>
+          <p:nvPr/>
+        </p:nvCxnSpPr>
+        <p:spPr>
+          <a:xfrm>
+            <a:off x="7955279" y="3895344"/>
+            <a:ext cx="0" cy="109728"/>
+          </a:xfrm>
+          <a:prstGeom prst="line">
+            <a:avLst/>
+          </a:prstGeom>
+          <a:ln w="20320">
+            <a:solidFill>
+              <a:srgbClr val="3C4E6C"/>
+            </a:solidFill>
+          </a:ln>
+        </p:spPr>
+        <p:style>
+          <a:lnRef idx="2">
+            <a:schemeClr val="accent1"/>
+          </a:lnRef>
+          <a:fillRef idx="0">
+            <a:schemeClr val="accent1"/>
+          </a:fillRef>
+          <a:effectRef idx="1">
+            <a:schemeClr val="accent1"/>
+          </a:effectRef>
+          <a:fontRef idx="minor">
+            <a:schemeClr val="tx1"/>
+          </a:fontRef>
+        </p:style>
+      </p:cxnSp>
+      <p:cxnSp>
+        <p:nvCxnSpPr>
+          <p:cNvPr id="24" name="Connector 23"/>
+          <p:cNvCxnSpPr/>
+          <p:nvPr/>
+        </p:nvCxnSpPr>
+        <p:spPr>
+          <a:xfrm>
+            <a:off x="7955279" y="4443984"/>
+            <a:ext cx="0" cy="109728"/>
+          </a:xfrm>
+          <a:prstGeom prst="line">
+            <a:avLst/>
+          </a:prstGeom>
+          <a:ln w="20320">
+            <a:solidFill>
+              <a:srgbClr val="3C4E6C"/>
+            </a:solidFill>
+          </a:ln>
+        </p:spPr>
+        <p:style>
+          <a:lnRef idx="2">
+            <a:schemeClr val="accent1"/>
+          </a:lnRef>
+          <a:fillRef idx="0">
+            <a:schemeClr val="accent1"/>
+          </a:fillRef>
+          <a:effectRef idx="1">
+            <a:schemeClr val="accent1"/>
+          </a:effectRef>
+          <a:fontRef idx="minor">
+            <a:schemeClr val="tx1"/>
+          </a:fontRef>
+        </p:style>
+      </p:cxnSp>
+      <p:cxnSp>
+        <p:nvCxnSpPr>
+          <p:cNvPr id="25" name="Connector 24"/>
+          <p:cNvCxnSpPr/>
+          <p:nvPr/>
+        </p:nvCxnSpPr>
+        <p:spPr>
+          <a:xfrm>
+            <a:off x="7955279" y="4992624"/>
+            <a:ext cx="0" cy="109728"/>
+          </a:xfrm>
+          <a:prstGeom prst="line">
+            <a:avLst/>
+          </a:prstGeom>
+          <a:ln w="20320">
+            <a:solidFill>
+              <a:srgbClr val="3C4E6C"/>
+            </a:solidFill>
+          </a:ln>
+        </p:spPr>
+        <p:style>
+          <a:lnRef idx="2">
+            <a:schemeClr val="accent1"/>
+          </a:lnRef>
+          <a:fillRef idx="0">
+            <a:schemeClr val="accent1"/>
+          </a:fillRef>
+          <a:effectRef idx="1">
+            <a:schemeClr val="accent1"/>
+          </a:effectRef>
+          <a:fontRef idx="minor">
+            <a:schemeClr val="tx1"/>
+          </a:fontRef>
+        </p:style>
+      </p:cxnSp>
+      <p:cxnSp>
+        <p:nvCxnSpPr>
+          <p:cNvPr id="26" name="Connector 25"/>
+          <p:cNvCxnSpPr/>
+          <p:nvPr/>
+        </p:nvCxnSpPr>
+        <p:spPr>
+          <a:xfrm>
+            <a:off x="7955279" y="5541264"/>
+            <a:ext cx="0" cy="109728"/>
+          </a:xfrm>
+          <a:prstGeom prst="line">
+            <a:avLst/>
+          </a:prstGeom>
+          <a:ln w="20320">
+            <a:solidFill>
+              <a:srgbClr val="3C4E6C"/>
+            </a:solidFill>
+          </a:ln>
+        </p:spPr>
+        <p:style>
+          <a:lnRef idx="2">
+            <a:schemeClr val="accent1"/>
+          </a:lnRef>
+          <a:fillRef idx="0">
+            <a:schemeClr val="accent1"/>
+          </a:fillRef>
+          <a:effectRef idx="1">
+            <a:schemeClr val="accent1"/>
+          </a:effectRef>
+          <a:fontRef idx="minor">
+            <a:schemeClr val="tx1"/>
+          </a:fontRef>
+        </p:style>
+      </p:cxnSp>
+      <p:cxnSp>
+        <p:nvCxnSpPr>
+          <p:cNvPr id="27" name="Connector 26"/>
+          <p:cNvCxnSpPr/>
+          <p:nvPr/>
+        </p:nvCxnSpPr>
+        <p:spPr>
+          <a:xfrm>
+            <a:off x="9098280" y="5843016"/>
+            <a:ext cx="228600" cy="0"/>
+          </a:xfrm>
+          <a:prstGeom prst="line">
+            <a:avLst/>
+          </a:prstGeom>
+          <a:ln w="20320">
+            <a:solidFill>
+              <a:srgbClr val="3C4E6C"/>
+            </a:solidFill>
+          </a:ln>
+        </p:spPr>
+        <p:style>
+          <a:lnRef idx="2">
+            <a:schemeClr val="accent1"/>
+          </a:lnRef>
+          <a:fillRef idx="0">
+            <a:schemeClr val="accent1"/>
+          </a:fillRef>
+          <a:effectRef idx="1">
+            <a:schemeClr val="accent1"/>
+          </a:effectRef>
+          <a:fontRef idx="minor">
+            <a:schemeClr val="tx1"/>
+          </a:fontRef>
+        </p:style>
+      </p:cxnSp>
+      <p:sp>
+        <p:nvSpPr>
+          <p:cNvPr id="28" name="TextBox 27"/>
+          <p:cNvSpPr txBox="1"/>
+          <p:nvPr/>
+        </p:nvSpPr>
+        <p:spPr>
+          <a:xfrm>
+            <a:off x="2697480" y="3227832"/>
+            <a:ext cx="1280160" cy="228600"/>
+          </a:xfrm>
+          <a:prstGeom prst="rect">
+            <a:avLst/>
+          </a:prstGeom>
+          <a:noFill/>
+        </p:spPr>
+        <p:txBody>
+          <a:bodyPr wrap="none">
+            <a:spAutoFit/>
+          </a:bodyPr>
+          <a:lstStyle/>
+          <a:p>
+            <a:pPr>
+              <a:defRPr sz="950" b="1">
+                <a:solidFill>
+                  <a:srgbClr val="4E6080"/>
+                </a:solidFill>
+                <a:latin typeface="Aptos"/>
+              </a:defRPr>
+            </a:pPr>
+            <a:r>
+              <a:t>Temps réel</a:t>
+            </a:r>
+          </a:p>
+        </p:txBody>
+      </p:sp>
+      <p:sp>
+        <p:nvSpPr>
+          <p:cNvPr id="29" name="TextBox 28"/>
+          <p:cNvSpPr txBox="1"/>
+          <p:nvPr/>
+        </p:nvSpPr>
+        <p:spPr>
+          <a:xfrm>
+            <a:off x="9006840" y="3227832"/>
+            <a:ext cx="1280160" cy="228600"/>
+          </a:xfrm>
+          <a:prstGeom prst="rect">
+            <a:avLst/>
+          </a:prstGeom>
+          <a:noFill/>
+        </p:spPr>
+        <p:txBody>
+          <a:bodyPr wrap="none">
+            <a:spAutoFit/>
+          </a:bodyPr>
+          <a:lstStyle/>
+          <a:p>
+            <a:pPr>
+              <a:defRPr sz="950" b="1">
+                <a:solidFill>
+                  <a:srgbClr val="4E6080"/>
+                </a:solidFill>
+                <a:latin typeface="Aptos"/>
+              </a:defRPr>
+            </a:pPr>
+            <a:r>
+              <a:t>Analytique</a:t>
+            </a:r>
+          </a:p>
+        </p:txBody>
+      </p:sp>
     </p:spTree>
   </p:cSld>
   <p:clrMapOvr>
@@ -7852,51 +8812,6 @@
           </a:p>
         </p:txBody>
       </p:sp>
-      <p:sp>
-        <p:nvSpPr>
-          <p:cNvPr id="26" name="Slide Number Placeholder 0"/>
-          <p:cNvSpPr>
-            <a:spLocks noGrp="1"/>
-          </p:cNvSpPr>
-          <p:nvPr>
-            <p:ph type="sldNum" sz="quarter" idx="4294967295"/>
-          </p:nvPr>
-        </p:nvSpPr>
-        <p:spPr>
-          <a:xfrm>
-            <a:off x="11631168" y="6473952"/>
-            <a:ext cx="800000" cy="300000"/>
-          </a:xfrm>
-          <a:prstGeom prst="rect">
-            <a:avLst/>
-          </a:prstGeom>
-          <a:extLst>
-            <a:ext uri="{C572A759-6A51-4108-AA02-DFA0A04FC94B}">
-              <ma14:wrappingTextBoxFlag xmlns:ma14="http://schemas.microsoft.com/office/mac/drawingml/2011/main" xmlns="" val="0"/>
-            </a:ext>
-          </a:extLst>
-        </p:spPr>
-        <p:txBody>
-          <a:bodyPr/>
-          <a:lstStyle>
-            <a:lvl1pPr>
-              <a:defRPr sz="800">
-                <a:solidFill>
-                  <a:srgbClr val="718096"/>
-                </a:solidFill>
-              </a:defRPr>
-            </a:lvl1pPr>
-          </a:lstStyle>
-          <a:p>
-            <a:pPr algn="l"/>
-            <a:fld id="{F7021451-1387-4CA6-816F-3879F97B5CBC}" type="slidenum">
-              <a:rPr lang="en-US" b="0"/>
-              <a:t>5</a:t>
-            </a:fld>
-            <a:endParaRPr lang="en-US"/>
-          </a:p>
-        </p:txBody>
-      </p:sp>
     </p:spTree>
   </p:cSld>
   <p:clrMapOvr>
@@ -8940,51 +9855,6 @@
           </a:p>
         </p:txBody>
       </p:sp>
-      <p:sp>
-        <p:nvSpPr>
-          <p:cNvPr id="33" name="Slide Number Placeholder 0"/>
-          <p:cNvSpPr>
-            <a:spLocks noGrp="1"/>
-          </p:cNvSpPr>
-          <p:nvPr>
-            <p:ph type="sldNum" sz="quarter" idx="4294967295"/>
-          </p:nvPr>
-        </p:nvSpPr>
-        <p:spPr>
-          <a:xfrm>
-            <a:off x="11631168" y="6473952"/>
-            <a:ext cx="800000" cy="300000"/>
-          </a:xfrm>
-          <a:prstGeom prst="rect">
-            <a:avLst/>
-          </a:prstGeom>
-          <a:extLst>
-            <a:ext uri="{C572A759-6A51-4108-AA02-DFA0A04FC94B}">
-              <ma14:wrappingTextBoxFlag xmlns:ma14="http://schemas.microsoft.com/office/mac/drawingml/2011/main" xmlns="" val="0"/>
-            </a:ext>
-          </a:extLst>
-        </p:spPr>
-        <p:txBody>
-          <a:bodyPr/>
-          <a:lstStyle>
-            <a:lvl1pPr>
-              <a:defRPr sz="800">
-                <a:solidFill>
-                  <a:srgbClr val="718096"/>
-                </a:solidFill>
-              </a:defRPr>
-            </a:lvl1pPr>
-          </a:lstStyle>
-          <a:p>
-            <a:pPr algn="l"/>
-            <a:fld id="{F7021451-1387-4CA6-816F-3879F97B5CBC}" type="slidenum">
-              <a:rPr lang="en-US" b="0"/>
-              <a:t>6</a:t>
-            </a:fld>
-            <a:endParaRPr lang="en-US"/>
-          </a:p>
-        </p:txBody>
-      </p:sp>
     </p:spTree>
   </p:cSld>
   <p:clrMapOvr>
@@ -9019,1085 +9889,738 @@
       </p:grpSpPr>
       <p:sp>
         <p:nvSpPr>
-          <p:cNvPr id="2" name="Text 0"/>
-          <p:cNvSpPr/>
-          <p:nvPr/>
-        </p:nvSpPr>
-        <p:spPr>
-          <a:xfrm>
-            <a:off x="594360" y="438912"/>
-            <a:ext cx="11018520" cy="438912"/>
+          <p:cNvPr id="2" name="Rectangle 1"/>
+          <p:cNvSpPr/>
+          <p:nvPr/>
+        </p:nvSpPr>
+        <p:spPr>
+          <a:xfrm>
+            <a:off x="0" y="0"/>
+            <a:ext cx="12192000" cy="182880"/>
+          </a:xfrm>
+          <a:prstGeom prst="rect">
+            <a:avLst/>
+          </a:prstGeom>
+          <a:solidFill>
+            <a:srgbClr val="2E65EB"/>
+          </a:solidFill>
+          <a:ln>
+            <a:noFill/>
+          </a:ln>
+        </p:spPr>
+        <p:style>
+          <a:lnRef idx="1">
+            <a:schemeClr val="accent1"/>
+          </a:lnRef>
+          <a:fillRef idx="3">
+            <a:schemeClr val="accent1"/>
+          </a:fillRef>
+          <a:effectRef idx="2">
+            <a:schemeClr val="accent1"/>
+          </a:effectRef>
+          <a:fontRef idx="minor">
+            <a:schemeClr val="lt1"/>
+          </a:fontRef>
+        </p:style>
+        <p:txBody>
+          <a:bodyPr rtlCol="0" anchor="ctr"/>
+          <a:lstStyle/>
+          <a:p>
+            <a:pPr algn="ctr"/>
+            <a:endParaRPr/>
+          </a:p>
+        </p:txBody>
+      </p:sp>
+      <p:sp>
+        <p:nvSpPr>
+          <p:cNvPr id="3" name="TextBox 2"/>
+          <p:cNvSpPr txBox="1"/>
+          <p:nvPr/>
+        </p:nvSpPr>
+        <p:spPr>
+          <a:xfrm>
+            <a:off x="566928" y="384048"/>
+            <a:ext cx="10972800" cy="502920"/>
           </a:xfrm>
           <a:prstGeom prst="rect">
             <a:avLst/>
           </a:prstGeom>
           <a:noFill/>
-          <a:ln/>
-        </p:spPr>
-        <p:txBody>
-          <a:bodyPr wrap="square" lIns="0" tIns="0" rIns="0" bIns="0" rtlCol="0" anchor="ctr"/>
-          <a:lstStyle/>
-          <a:p>
-            <a:pPr marL="0" indent="0">
-              <a:buNone/>
-            </a:pPr>
-            <a:r>
-              <a:rPr lang="en-US" sz="2600" b="1" dirty="0">
-                <a:solidFill>
-                  <a:srgbClr val="17324D"/>
-                </a:solidFill>
-              </a:rPr>
-              <a:t>6. Pipeline temps réel : CDC → streaming → Delta</a:t>
-            </a:r>
-            <a:endParaRPr lang="en-US" sz="2600" dirty="0"/>
-          </a:p>
-        </p:txBody>
-      </p:sp>
-      <p:sp>
-        <p:nvSpPr>
-          <p:cNvPr id="3" name="Text 1"/>
-          <p:cNvSpPr/>
-          <p:nvPr/>
-        </p:nvSpPr>
-        <p:spPr>
-          <a:xfrm>
-            <a:off x="612648" y="932688"/>
-            <a:ext cx="10789920" cy="292608"/>
+        </p:spPr>
+        <p:txBody>
+          <a:bodyPr wrap="none">
+            <a:spAutoFit/>
+          </a:bodyPr>
+          <a:lstStyle/>
+          <a:p>
+            <a:pPr>
+              <a:defRPr sz="2700" b="1">
+                <a:solidFill>
+                  <a:srgbClr val="102F56"/>
+                </a:solidFill>
+                <a:latin typeface="Aptos Display"/>
+              </a:defRPr>
+            </a:pPr>
+            <a:r>
+              <a:t>6. Pipeline automatisé : CDC → streaming → Delta</a:t>
+            </a:r>
+          </a:p>
+        </p:txBody>
+      </p:sp>
+      <p:sp>
+        <p:nvSpPr>
+          <p:cNvPr id="4" name="TextBox 3"/>
+          <p:cNvSpPr txBox="1"/>
+          <p:nvPr/>
+        </p:nvSpPr>
+        <p:spPr>
+          <a:xfrm>
+            <a:off x="576072" y="987552"/>
+            <a:ext cx="10972800" cy="438912"/>
           </a:xfrm>
           <a:prstGeom prst="rect">
             <a:avLst/>
           </a:prstGeom>
           <a:noFill/>
-          <a:ln/>
-        </p:spPr>
-        <p:txBody>
-          <a:bodyPr wrap="square" lIns="0" tIns="0" rIns="0" bIns="0" rtlCol="0" anchor="ctr"/>
-          <a:lstStyle/>
-          <a:p>
-            <a:pPr marL="0" indent="0">
-              <a:buNone/>
-            </a:pPr>
-            <a:r>
-              <a:rPr lang="en-US" sz="1150" dirty="0">
-                <a:solidFill>
-                  <a:srgbClr val="66788A"/>
-                </a:solidFill>
-              </a:rPr>
-              <a:t>Détecter une nouvelle activité sans relancer manuellement toute la chaîne.</a:t>
-            </a:r>
-            <a:endParaRPr lang="en-US" sz="1150" dirty="0"/>
-          </a:p>
-        </p:txBody>
-      </p:sp>
-      <p:sp>
-        <p:nvSpPr>
-          <p:cNvPr id="4" name="Shape 2"/>
-          <p:cNvSpPr/>
-          <p:nvPr/>
-        </p:nvSpPr>
-        <p:spPr>
-          <a:xfrm>
-            <a:off x="731520" y="1828800"/>
-            <a:ext cx="1874520" cy="1143000"/>
+        </p:spPr>
+        <p:txBody>
+          <a:bodyPr wrap="none">
+            <a:spAutoFit/>
+          </a:bodyPr>
+          <a:lstStyle/>
+          <a:p>
+            <a:pPr>
+              <a:defRPr sz="1300">
+                <a:solidFill>
+                  <a:srgbClr val="4E6080"/>
+                </a:solidFill>
+                <a:latin typeface="Aptos"/>
+              </a:defRPr>
+            </a:pPr>
+            <a:r>
+              <a:t>Détecter et traiter une nouvelle activité sans relancer manuellement la chaîne.</a:t>
+            </a:r>
+          </a:p>
+        </p:txBody>
+      </p:sp>
+      <p:sp>
+        <p:nvSpPr>
+          <p:cNvPr id="7" name="Rounded Rectangle 6"/>
+          <p:cNvSpPr/>
+          <p:nvPr/>
+        </p:nvSpPr>
+        <p:spPr>
+          <a:xfrm>
+            <a:off x="685800" y="1874519"/>
+            <a:ext cx="1691640" cy="1143000"/>
           </a:xfrm>
           <a:prstGeom prst="roundRect">
-            <a:avLst>
-              <a:gd name="adj" fmla="val 6400"/>
-            </a:avLst>
+            <a:avLst/>
           </a:prstGeom>
           <a:solidFill>
-            <a:srgbClr val="2F6BFF"/>
+            <a:srgbClr val="102F56"/>
           </a:solidFill>
           <a:ln w="12700">
             <a:solidFill>
-              <a:srgbClr val="2F6BFF"/>
+              <a:srgbClr val="E3E9F4"/>
             </a:solidFill>
-            <a:prstDash val="solid"/>
-          </a:ln>
-        </p:spPr>
-      </p:sp>
-      <p:sp>
-        <p:nvSpPr>
-          <p:cNvPr id="5" name="Text 3"/>
-          <p:cNvSpPr/>
-          <p:nvPr/>
-        </p:nvSpPr>
-        <p:spPr>
-          <a:xfrm>
-            <a:off x="841248" y="2103120"/>
-            <a:ext cx="1645920" cy="228600"/>
-          </a:xfrm>
-          <a:prstGeom prst="rect">
-            <a:avLst/>
-          </a:prstGeom>
-          <a:noFill/>
-          <a:ln/>
-        </p:spPr>
-        <p:txBody>
-          <a:bodyPr wrap="square" lIns="0" tIns="0" rIns="0" bIns="0" rtlCol="0" anchor="ctr"/>
-          <a:lstStyle/>
-          <a:p>
-            <a:pPr marL="0" indent="0" algn="ctr">
-              <a:buNone/>
-            </a:pPr>
-            <a:r>
-              <a:rPr lang="en-US" sz="1400" b="1" dirty="0">
+          </a:ln>
+        </p:spPr>
+        <p:style>
+          <a:lnRef idx="1">
+            <a:schemeClr val="accent1"/>
+          </a:lnRef>
+          <a:fillRef idx="3">
+            <a:schemeClr val="accent1"/>
+          </a:fillRef>
+          <a:effectRef idx="2">
+            <a:schemeClr val="accent1"/>
+          </a:effectRef>
+          <a:fontRef idx="minor">
+            <a:schemeClr val="lt1"/>
+          </a:fontRef>
+        </p:style>
+        <p:txBody>
+          <a:bodyPr lIns="109728" tIns="82296" rIns="109728" bIns="54864" rtlCol="0" anchor="ctr"/>
+          <a:lstStyle/>
+          <a:p>
+            <a:pPr algn="ctr">
+              <a:defRPr sz="1150" b="1">
                 <a:solidFill>
                   <a:srgbClr val="FFFFFF"/>
                 </a:solidFill>
-              </a:rPr>
+                <a:latin typeface="Aptos"/>
+              </a:defRPr>
+            </a:pPr>
+            <a:r>
               <a:t>PostgreSQL</a:t>
             </a:r>
-            <a:endParaRPr lang="en-US" sz="1400" dirty="0"/>
-          </a:p>
-        </p:txBody>
-      </p:sp>
-      <p:sp>
-        <p:nvSpPr>
-          <p:cNvPr id="6" name="Text 4"/>
-          <p:cNvSpPr/>
-          <p:nvPr/>
-        </p:nvSpPr>
-        <p:spPr>
-          <a:xfrm>
-            <a:off x="841248" y="2468880"/>
-            <a:ext cx="1645920" cy="182880"/>
-          </a:xfrm>
-          <a:prstGeom prst="rect">
-            <a:avLst/>
-          </a:prstGeom>
-          <a:noFill/>
-          <a:ln/>
-        </p:spPr>
-        <p:txBody>
-          <a:bodyPr wrap="square" lIns="0" tIns="0" rIns="0" bIns="0" rtlCol="0" anchor="ctr"/>
-          <a:lstStyle/>
-          <a:p>
-            <a:pPr marL="0" indent="0" algn="ctr">
-              <a:buNone/>
-            </a:pPr>
-            <a:r>
-              <a:rPr lang="en-US" sz="950" dirty="0">
+          </a:p>
+          <a:p>
+            <a:pPr algn="ctr">
+              <a:defRPr sz="950">
                 <a:solidFill>
                   <a:srgbClr val="FFFFFF"/>
                 </a:solidFill>
-              </a:rPr>
+                <a:latin typeface="Aptos"/>
+              </a:defRPr>
+            </a:pPr>
+            <a:r>
+              <a:t>Nouvelle activité</a:t>
+            </a:r>
+            <a:br/>
+            <a:r>
               <a:t>INSERT / UPDATE</a:t>
             </a:r>
-            <a:endParaRPr lang="en-US" sz="950" dirty="0"/>
-          </a:p>
-        </p:txBody>
-      </p:sp>
-      <p:sp>
-        <p:nvSpPr>
-          <p:cNvPr id="7" name="Shape 5"/>
-          <p:cNvSpPr/>
-          <p:nvPr/>
-        </p:nvSpPr>
-        <p:spPr>
-          <a:xfrm>
-            <a:off x="2606040" y="2404872"/>
-            <a:ext cx="320040" cy="0"/>
+          </a:p>
+        </p:txBody>
+      </p:sp>
+      <p:cxnSp>
+        <p:nvCxnSpPr>
+          <p:cNvPr id="8" name="Connector 7"/>
+          <p:cNvCxnSpPr/>
+          <p:nvPr/>
+        </p:nvCxnSpPr>
+        <p:spPr>
+          <a:xfrm>
+            <a:off x="2377440" y="2450592"/>
+            <a:ext cx="594360" cy="0"/>
           </a:xfrm>
           <a:prstGeom prst="line">
             <a:avLst/>
           </a:prstGeom>
-          <a:noFill/>
-          <a:ln w="25400">
+          <a:ln w="19050">
             <a:solidFill>
-              <a:srgbClr val="8FA1B4"/>
+              <a:srgbClr val="3C4E6C"/>
             </a:solidFill>
-            <a:prstDash val="solid"/>
-            <a:headEnd type="none"/>
-            <a:tailEnd type="triangle"/>
-          </a:ln>
-        </p:spPr>
-      </p:sp>
-      <p:sp>
-        <p:nvSpPr>
-          <p:cNvPr id="8" name="Shape 6"/>
-          <p:cNvSpPr/>
-          <p:nvPr/>
-        </p:nvSpPr>
-        <p:spPr>
-          <a:xfrm>
-            <a:off x="2926080" y="1828800"/>
-            <a:ext cx="1874520" cy="1143000"/>
+          </a:ln>
+        </p:spPr>
+        <p:style>
+          <a:lnRef idx="2">
+            <a:schemeClr val="accent1"/>
+          </a:lnRef>
+          <a:fillRef idx="0">
+            <a:schemeClr val="accent1"/>
+          </a:fillRef>
+          <a:effectRef idx="1">
+            <a:schemeClr val="accent1"/>
+          </a:effectRef>
+          <a:fontRef idx="minor">
+            <a:schemeClr val="tx1"/>
+          </a:fontRef>
+        </p:style>
+      </p:cxnSp>
+      <p:sp>
+        <p:nvSpPr>
+          <p:cNvPr id="9" name="Rounded Rectangle 8"/>
+          <p:cNvSpPr/>
+          <p:nvPr/>
+        </p:nvSpPr>
+        <p:spPr>
+          <a:xfrm>
+            <a:off x="2971800" y="1874519"/>
+            <a:ext cx="1691640" cy="1143000"/>
           </a:xfrm>
           <a:prstGeom prst="roundRect">
-            <a:avLst>
-              <a:gd name="adj" fmla="val 6400"/>
-            </a:avLst>
+            <a:avLst/>
           </a:prstGeom>
           <a:solidFill>
-            <a:srgbClr val="7557D5"/>
+            <a:srgbClr val="6D3FE2"/>
           </a:solidFill>
           <a:ln w="12700">
             <a:solidFill>
-              <a:srgbClr val="7557D5"/>
+              <a:srgbClr val="E3E9F4"/>
             </a:solidFill>
-            <a:prstDash val="solid"/>
-          </a:ln>
-        </p:spPr>
-      </p:sp>
-      <p:sp>
-        <p:nvSpPr>
-          <p:cNvPr id="9" name="Text 7"/>
-          <p:cNvSpPr/>
-          <p:nvPr/>
-        </p:nvSpPr>
-        <p:spPr>
-          <a:xfrm>
-            <a:off x="3035808" y="2103120"/>
-            <a:ext cx="1645920" cy="228600"/>
-          </a:xfrm>
-          <a:prstGeom prst="rect">
-            <a:avLst/>
-          </a:prstGeom>
-          <a:noFill/>
-          <a:ln/>
-        </p:spPr>
-        <p:txBody>
-          <a:bodyPr wrap="square" lIns="0" tIns="0" rIns="0" bIns="0" rtlCol="0" anchor="ctr"/>
-          <a:lstStyle/>
-          <a:p>
-            <a:pPr marL="0" indent="0" algn="ctr">
-              <a:buNone/>
-            </a:pPr>
-            <a:r>
-              <a:rPr lang="en-US" sz="1400" b="1" dirty="0">
+          </a:ln>
+        </p:spPr>
+        <p:style>
+          <a:lnRef idx="1">
+            <a:schemeClr val="accent1"/>
+          </a:lnRef>
+          <a:fillRef idx="3">
+            <a:schemeClr val="accent1"/>
+          </a:fillRef>
+          <a:effectRef idx="2">
+            <a:schemeClr val="accent1"/>
+          </a:effectRef>
+          <a:fontRef idx="minor">
+            <a:schemeClr val="lt1"/>
+          </a:fontRef>
+        </p:style>
+        <p:txBody>
+          <a:bodyPr lIns="109728" tIns="82296" rIns="109728" bIns="54864" rtlCol="0" anchor="ctr"/>
+          <a:lstStyle/>
+          <a:p>
+            <a:pPr algn="ctr">
+              <a:defRPr sz="1150" b="1">
                 <a:solidFill>
                   <a:srgbClr val="FFFFFF"/>
                 </a:solidFill>
-              </a:rPr>
+                <a:latin typeface="Aptos"/>
+              </a:defRPr>
+            </a:pPr>
+            <a:r>
               <a:t>Debezium</a:t>
             </a:r>
-            <a:endParaRPr lang="en-US" sz="1400" dirty="0"/>
-          </a:p>
-        </p:txBody>
-      </p:sp>
-      <p:sp>
-        <p:nvSpPr>
-          <p:cNvPr id="10" name="Text 8"/>
-          <p:cNvSpPr/>
-          <p:nvPr/>
-        </p:nvSpPr>
-        <p:spPr>
-          <a:xfrm>
-            <a:off x="3035808" y="2468880"/>
-            <a:ext cx="1645920" cy="182880"/>
-          </a:xfrm>
-          <a:prstGeom prst="rect">
-            <a:avLst/>
-          </a:prstGeom>
-          <a:noFill/>
-          <a:ln/>
-        </p:spPr>
-        <p:txBody>
-          <a:bodyPr wrap="square" lIns="0" tIns="0" rIns="0" bIns="0" rtlCol="0" anchor="ctr"/>
-          <a:lstStyle/>
-          <a:p>
-            <a:pPr marL="0" indent="0" algn="ctr">
-              <a:buNone/>
-            </a:pPr>
-            <a:r>
-              <a:rPr lang="en-US" sz="950" dirty="0">
+          </a:p>
+          <a:p>
+            <a:pPr algn="ctr">
+              <a:defRPr sz="950">
                 <a:solidFill>
                   <a:srgbClr val="FFFFFF"/>
                 </a:solidFill>
-              </a:rPr>
-              <a:t>Capture CDC</a:t>
-            </a:r>
-            <a:endParaRPr lang="en-US" sz="950" dirty="0"/>
-          </a:p>
-        </p:txBody>
-      </p:sp>
-      <p:sp>
-        <p:nvSpPr>
-          <p:cNvPr id="11" name="Shape 9"/>
-          <p:cNvSpPr/>
-          <p:nvPr/>
-        </p:nvSpPr>
-        <p:spPr>
-          <a:xfrm>
-            <a:off x="4800600" y="2404872"/>
-            <a:ext cx="320040" cy="0"/>
+                <a:latin typeface="Aptos"/>
+              </a:defRPr>
+            </a:pPr>
+            <a:r>
+              <a:t>Capture CDC automatique</a:t>
+            </a:r>
+            <a:br/>
+            <a:r>
+              <a:t>Détection des changements</a:t>
+            </a:r>
+          </a:p>
+        </p:txBody>
+      </p:sp>
+      <p:cxnSp>
+        <p:nvCxnSpPr>
+          <p:cNvPr id="10" name="Connector 9"/>
+          <p:cNvCxnSpPr/>
+          <p:nvPr/>
+        </p:nvCxnSpPr>
+        <p:spPr>
+          <a:xfrm>
+            <a:off x="4663440" y="2450592"/>
+            <a:ext cx="594360" cy="0"/>
           </a:xfrm>
           <a:prstGeom prst="line">
             <a:avLst/>
           </a:prstGeom>
-          <a:noFill/>
-          <a:ln w="25400">
+          <a:ln w="19050">
             <a:solidFill>
-              <a:srgbClr val="8FA1B4"/>
+              <a:srgbClr val="3C4E6C"/>
             </a:solidFill>
-            <a:prstDash val="solid"/>
-            <a:headEnd type="none"/>
-            <a:tailEnd type="triangle"/>
-          </a:ln>
-        </p:spPr>
-      </p:sp>
-      <p:sp>
-        <p:nvSpPr>
-          <p:cNvPr id="12" name="Shape 10"/>
-          <p:cNvSpPr/>
-          <p:nvPr/>
-        </p:nvSpPr>
-        <p:spPr>
-          <a:xfrm>
-            <a:off x="5120640" y="1828800"/>
-            <a:ext cx="1874520" cy="1143000"/>
+          </a:ln>
+        </p:spPr>
+        <p:style>
+          <a:lnRef idx="2">
+            <a:schemeClr val="accent1"/>
+          </a:lnRef>
+          <a:fillRef idx="0">
+            <a:schemeClr val="accent1"/>
+          </a:fillRef>
+          <a:effectRef idx="1">
+            <a:schemeClr val="accent1"/>
+          </a:effectRef>
+          <a:fontRef idx="minor">
+            <a:schemeClr val="tx1"/>
+          </a:fontRef>
+        </p:style>
+      </p:cxnSp>
+      <p:sp>
+        <p:nvSpPr>
+          <p:cNvPr id="11" name="Rounded Rectangle 10"/>
+          <p:cNvSpPr/>
+          <p:nvPr/>
+        </p:nvSpPr>
+        <p:spPr>
+          <a:xfrm>
+            <a:off x="5257800" y="1874519"/>
+            <a:ext cx="1691640" cy="1143000"/>
           </a:xfrm>
           <a:prstGeom prst="roundRect">
-            <a:avLst>
-              <a:gd name="adj" fmla="val 6400"/>
-            </a:avLst>
+            <a:avLst/>
           </a:prstGeom>
           <a:solidFill>
-            <a:srgbClr val="E85D75"/>
+            <a:srgbClr val="EF305D"/>
           </a:solidFill>
           <a:ln w="12700">
             <a:solidFill>
-              <a:srgbClr val="E85D75"/>
+              <a:srgbClr val="E3E9F4"/>
             </a:solidFill>
-            <a:prstDash val="solid"/>
-          </a:ln>
-        </p:spPr>
-      </p:sp>
-      <p:sp>
-        <p:nvSpPr>
-          <p:cNvPr id="13" name="Text 11"/>
-          <p:cNvSpPr/>
-          <p:nvPr/>
-        </p:nvSpPr>
-        <p:spPr>
-          <a:xfrm>
-            <a:off x="5230368" y="2103120"/>
-            <a:ext cx="1645920" cy="228600"/>
-          </a:xfrm>
-          <a:prstGeom prst="rect">
-            <a:avLst/>
-          </a:prstGeom>
-          <a:noFill/>
-          <a:ln/>
-        </p:spPr>
-        <p:txBody>
-          <a:bodyPr wrap="square" lIns="0" tIns="0" rIns="0" bIns="0" rtlCol="0" anchor="ctr"/>
-          <a:lstStyle/>
-          <a:p>
-            <a:pPr marL="0" indent="0" algn="ctr">
-              <a:buNone/>
-            </a:pPr>
-            <a:r>
-              <a:rPr lang="en-US" sz="1400" b="1" dirty="0">
+          </a:ln>
+        </p:spPr>
+        <p:style>
+          <a:lnRef idx="1">
+            <a:schemeClr val="accent1"/>
+          </a:lnRef>
+          <a:fillRef idx="3">
+            <a:schemeClr val="accent1"/>
+          </a:fillRef>
+          <a:effectRef idx="2">
+            <a:schemeClr val="accent1"/>
+          </a:effectRef>
+          <a:fontRef idx="minor">
+            <a:schemeClr val="lt1"/>
+          </a:fontRef>
+        </p:style>
+        <p:txBody>
+          <a:bodyPr lIns="109728" tIns="82296" rIns="109728" bIns="54864" rtlCol="0" anchor="ctr"/>
+          <a:lstStyle/>
+          <a:p>
+            <a:pPr algn="ctr">
+              <a:defRPr sz="1150" b="1">
                 <a:solidFill>
                   <a:srgbClr val="FFFFFF"/>
                 </a:solidFill>
-              </a:rPr>
+                <a:latin typeface="Aptos"/>
+              </a:defRPr>
+            </a:pPr>
+            <a:r>
               <a:t>Redpanda</a:t>
             </a:r>
-            <a:endParaRPr lang="en-US" sz="1400" dirty="0"/>
-          </a:p>
-        </p:txBody>
-      </p:sp>
-      <p:sp>
-        <p:nvSpPr>
-          <p:cNvPr id="14" name="Text 12"/>
-          <p:cNvSpPr/>
-          <p:nvPr/>
-        </p:nvSpPr>
-        <p:spPr>
-          <a:xfrm>
-            <a:off x="5230368" y="2468880"/>
-            <a:ext cx="1645920" cy="182880"/>
-          </a:xfrm>
-          <a:prstGeom prst="rect">
-            <a:avLst/>
-          </a:prstGeom>
-          <a:noFill/>
-          <a:ln/>
-        </p:spPr>
-        <p:txBody>
-          <a:bodyPr wrap="square" lIns="0" tIns="0" rIns="0" bIns="0" rtlCol="0" anchor="ctr"/>
-          <a:lstStyle/>
-          <a:p>
-            <a:pPr marL="0" indent="0" algn="ctr">
-              <a:buNone/>
-            </a:pPr>
-            <a:r>
-              <a:rPr lang="en-US" sz="950" dirty="0">
+          </a:p>
+          <a:p>
+            <a:pPr algn="ctr">
+              <a:defRPr sz="950">
                 <a:solidFill>
                   <a:srgbClr val="FFFFFF"/>
                 </a:solidFill>
-              </a:rPr>
+                <a:latin typeface="Aptos"/>
+              </a:defRPr>
+            </a:pPr>
+            <a:r>
+              <a:t>Diffusion de l’événement</a:t>
+            </a:r>
+            <a:br/>
+            <a:r>
               <a:t>Topic activités</a:t>
             </a:r>
-            <a:endParaRPr lang="en-US" sz="950" dirty="0"/>
-          </a:p>
-        </p:txBody>
-      </p:sp>
-      <p:sp>
-        <p:nvSpPr>
-          <p:cNvPr id="15" name="Shape 13"/>
-          <p:cNvSpPr/>
-          <p:nvPr/>
-        </p:nvSpPr>
-        <p:spPr>
-          <a:xfrm>
-            <a:off x="6995160" y="2404872"/>
-            <a:ext cx="320040" cy="0"/>
+          </a:p>
+        </p:txBody>
+      </p:sp>
+      <p:cxnSp>
+        <p:nvCxnSpPr>
+          <p:cNvPr id="12" name="Connector 11"/>
+          <p:cNvCxnSpPr/>
+          <p:nvPr/>
+        </p:nvCxnSpPr>
+        <p:spPr>
+          <a:xfrm>
+            <a:off x="6949440" y="2450592"/>
+            <a:ext cx="594360" cy="0"/>
           </a:xfrm>
           <a:prstGeom prst="line">
             <a:avLst/>
           </a:prstGeom>
-          <a:noFill/>
-          <a:ln w="25400">
+          <a:ln w="19050">
             <a:solidFill>
-              <a:srgbClr val="8FA1B4"/>
+              <a:srgbClr val="3C4E6C"/>
             </a:solidFill>
-            <a:prstDash val="solid"/>
-            <a:headEnd type="none"/>
-            <a:tailEnd type="triangle"/>
-          </a:ln>
-        </p:spPr>
-      </p:sp>
-      <p:sp>
-        <p:nvSpPr>
-          <p:cNvPr id="16" name="Shape 14"/>
-          <p:cNvSpPr/>
-          <p:nvPr/>
-        </p:nvSpPr>
-        <p:spPr>
-          <a:xfrm>
-            <a:off x="7315200" y="1828800"/>
-            <a:ext cx="1874520" cy="1143000"/>
+          </a:ln>
+        </p:spPr>
+        <p:style>
+          <a:lnRef idx="2">
+            <a:schemeClr val="accent1"/>
+          </a:lnRef>
+          <a:fillRef idx="0">
+            <a:schemeClr val="accent1"/>
+          </a:fillRef>
+          <a:effectRef idx="1">
+            <a:schemeClr val="accent1"/>
+          </a:effectRef>
+          <a:fontRef idx="minor">
+            <a:schemeClr val="tx1"/>
+          </a:fontRef>
+        </p:style>
+      </p:cxnSp>
+      <p:sp>
+        <p:nvSpPr>
+          <p:cNvPr id="13" name="Rounded Rectangle 12"/>
+          <p:cNvSpPr/>
+          <p:nvPr/>
+        </p:nvSpPr>
+        <p:spPr>
+          <a:xfrm>
+            <a:off x="7543800" y="1874519"/>
+            <a:ext cx="1691640" cy="1143000"/>
           </a:xfrm>
           <a:prstGeom prst="roundRect">
-            <a:avLst>
-              <a:gd name="adj" fmla="val 6400"/>
-            </a:avLst>
+            <a:avLst/>
           </a:prstGeom>
           <a:solidFill>
-            <a:srgbClr val="F59E0B"/>
+            <a:srgbClr val="14B1C3"/>
           </a:solidFill>
           <a:ln w="12700">
             <a:solidFill>
-              <a:srgbClr val="F59E0B"/>
+              <a:srgbClr val="E3E9F4"/>
             </a:solidFill>
-            <a:prstDash val="solid"/>
-          </a:ln>
-        </p:spPr>
-      </p:sp>
-      <p:sp>
-        <p:nvSpPr>
-          <p:cNvPr id="17" name="Text 15"/>
-          <p:cNvSpPr/>
-          <p:nvPr/>
-        </p:nvSpPr>
-        <p:spPr>
-          <a:xfrm>
-            <a:off x="7424928" y="2103120"/>
-            <a:ext cx="1645920" cy="228600"/>
-          </a:xfrm>
-          <a:prstGeom prst="rect">
-            <a:avLst/>
-          </a:prstGeom>
-          <a:noFill/>
-          <a:ln/>
-        </p:spPr>
-        <p:txBody>
-          <a:bodyPr wrap="square" lIns="0" tIns="0" rIns="0" bIns="0" rtlCol="0" anchor="ctr"/>
-          <a:lstStyle/>
-          <a:p>
-            <a:pPr marL="0" indent="0" algn="ctr">
-              <a:buNone/>
-            </a:pPr>
-            <a:r>
-              <a:rPr lang="en-US" sz="1400" b="1" dirty="0">
+          </a:ln>
+        </p:spPr>
+        <p:style>
+          <a:lnRef idx="1">
+            <a:schemeClr val="accent1"/>
+          </a:lnRef>
+          <a:fillRef idx="3">
+            <a:schemeClr val="accent1"/>
+          </a:fillRef>
+          <a:effectRef idx="2">
+            <a:schemeClr val="accent1"/>
+          </a:effectRef>
+          <a:fontRef idx="minor">
+            <a:schemeClr val="lt1"/>
+          </a:fontRef>
+        </p:style>
+        <p:txBody>
+          <a:bodyPr lIns="109728" tIns="82296" rIns="109728" bIns="54864" rtlCol="0" anchor="ctr"/>
+          <a:lstStyle/>
+          <a:p>
+            <a:pPr algn="ctr">
+              <a:defRPr sz="1150" b="1">
                 <a:solidFill>
                   <a:srgbClr val="FFFFFF"/>
                 </a:solidFill>
-              </a:rPr>
-              <a:t>PySpark</a:t>
-            </a:r>
-            <a:endParaRPr lang="en-US" sz="1400" dirty="0"/>
-          </a:p>
-        </p:txBody>
-      </p:sp>
-      <p:sp>
-        <p:nvSpPr>
-          <p:cNvPr id="18" name="Text 16"/>
-          <p:cNvSpPr/>
-          <p:nvPr/>
-        </p:nvSpPr>
-        <p:spPr>
-          <a:xfrm>
-            <a:off x="7424928" y="2468880"/>
-            <a:ext cx="1645920" cy="182880"/>
-          </a:xfrm>
-          <a:prstGeom prst="rect">
-            <a:avLst/>
-          </a:prstGeom>
-          <a:noFill/>
-          <a:ln/>
-        </p:spPr>
-        <p:txBody>
-          <a:bodyPr wrap="square" lIns="0" tIns="0" rIns="0" bIns="0" rtlCol="0" anchor="ctr"/>
-          <a:lstStyle/>
-          <a:p>
-            <a:pPr marL="0" indent="0" algn="ctr">
-              <a:buNone/>
-            </a:pPr>
-            <a:r>
-              <a:rPr lang="en-US" sz="950" dirty="0">
+                <a:latin typeface="Aptos"/>
+              </a:defRPr>
+            </a:pPr>
+            <a:r>
+              <a:t>Spark Streaming</a:t>
+            </a:r>
+          </a:p>
+          <a:p>
+            <a:pPr algn="ctr">
+              <a:defRPr sz="950">
                 <a:solidFill>
                   <a:srgbClr val="FFFFFF"/>
                 </a:solidFill>
-              </a:rPr>
-              <a:t>Validation + enrichissement</a:t>
-            </a:r>
-            <a:endParaRPr lang="en-US" sz="950" dirty="0"/>
-          </a:p>
-        </p:txBody>
-      </p:sp>
-      <p:sp>
-        <p:nvSpPr>
-          <p:cNvPr id="19" name="Shape 17"/>
-          <p:cNvSpPr/>
-          <p:nvPr/>
-        </p:nvSpPr>
-        <p:spPr>
-          <a:xfrm>
-            <a:off x="9189720" y="2404872"/>
-            <a:ext cx="320040" cy="0"/>
+                <a:latin typeface="Aptos"/>
+              </a:defRPr>
+            </a:pPr>
+            <a:r>
+              <a:t>Traitement continu</a:t>
+            </a:r>
+            <a:br/>
+            <a:r>
+              <a:t>Validation + transformation</a:t>
+            </a:r>
+          </a:p>
+        </p:txBody>
+      </p:sp>
+      <p:cxnSp>
+        <p:nvCxnSpPr>
+          <p:cNvPr id="14" name="Connector 13"/>
+          <p:cNvCxnSpPr/>
+          <p:nvPr/>
+        </p:nvCxnSpPr>
+        <p:spPr>
+          <a:xfrm>
+            <a:off x="9235440" y="2450592"/>
+            <a:ext cx="594360" cy="0"/>
           </a:xfrm>
           <a:prstGeom prst="line">
             <a:avLst/>
           </a:prstGeom>
-          <a:noFill/>
-          <a:ln w="25400">
+          <a:ln w="19050">
             <a:solidFill>
-              <a:srgbClr val="8FA1B4"/>
+              <a:srgbClr val="3C4E6C"/>
             </a:solidFill>
-            <a:prstDash val="solid"/>
-            <a:headEnd type="none"/>
-            <a:tailEnd type="triangle"/>
-          </a:ln>
-        </p:spPr>
-      </p:sp>
-      <p:sp>
-        <p:nvSpPr>
-          <p:cNvPr id="20" name="Shape 18"/>
-          <p:cNvSpPr/>
-          <p:nvPr/>
-        </p:nvSpPr>
-        <p:spPr>
-          <a:xfrm>
-            <a:off x="9509760" y="1828800"/>
-            <a:ext cx="1874520" cy="1143000"/>
+          </a:ln>
+        </p:spPr>
+        <p:style>
+          <a:lnRef idx="2">
+            <a:schemeClr val="accent1"/>
+          </a:lnRef>
+          <a:fillRef idx="0">
+            <a:schemeClr val="accent1"/>
+          </a:fillRef>
+          <a:effectRef idx="1">
+            <a:schemeClr val="accent1"/>
+          </a:effectRef>
+          <a:fontRef idx="minor">
+            <a:schemeClr val="tx1"/>
+          </a:fontRef>
+        </p:style>
+      </p:cxnSp>
+      <p:sp>
+        <p:nvSpPr>
+          <p:cNvPr id="15" name="Rounded Rectangle 14"/>
+          <p:cNvSpPr/>
+          <p:nvPr/>
+        </p:nvSpPr>
+        <p:spPr>
+          <a:xfrm>
+            <a:off x="9829800" y="1874519"/>
+            <a:ext cx="1691640" cy="1143000"/>
           </a:xfrm>
           <a:prstGeom prst="roundRect">
-            <a:avLst>
-              <a:gd name="adj" fmla="val 6400"/>
-            </a:avLst>
+            <a:avLst/>
           </a:prstGeom>
           <a:solidFill>
-            <a:srgbClr val="29B6C8"/>
+            <a:srgbClr val="2575F0"/>
           </a:solidFill>
           <a:ln w="12700">
             <a:solidFill>
-              <a:srgbClr val="29B6C8"/>
+              <a:srgbClr val="E3E9F4"/>
             </a:solidFill>
-            <a:prstDash val="solid"/>
-          </a:ln>
-        </p:spPr>
-      </p:sp>
-      <p:sp>
-        <p:nvSpPr>
-          <p:cNvPr id="21" name="Text 19"/>
-          <p:cNvSpPr/>
-          <p:nvPr/>
-        </p:nvSpPr>
-        <p:spPr>
-          <a:xfrm>
-            <a:off x="9619488" y="2103120"/>
-            <a:ext cx="1645920" cy="228600"/>
-          </a:xfrm>
-          <a:prstGeom prst="rect">
-            <a:avLst/>
-          </a:prstGeom>
-          <a:noFill/>
-          <a:ln/>
-        </p:spPr>
-        <p:txBody>
-          <a:bodyPr wrap="square" lIns="0" tIns="0" rIns="0" bIns="0" rtlCol="0" anchor="ctr"/>
-          <a:lstStyle/>
-          <a:p>
-            <a:pPr marL="0" indent="0" algn="ctr">
-              <a:buNone/>
-            </a:pPr>
-            <a:r>
-              <a:rPr lang="en-US" sz="1400" b="1" dirty="0">
+          </a:ln>
+        </p:spPr>
+        <p:style>
+          <a:lnRef idx="1">
+            <a:schemeClr val="accent1"/>
+          </a:lnRef>
+          <a:fillRef idx="3">
+            <a:schemeClr val="accent1"/>
+          </a:fillRef>
+          <a:effectRef idx="2">
+            <a:schemeClr val="accent1"/>
+          </a:effectRef>
+          <a:fontRef idx="minor">
+            <a:schemeClr val="lt1"/>
+          </a:fontRef>
+        </p:style>
+        <p:txBody>
+          <a:bodyPr lIns="109728" tIns="82296" rIns="109728" bIns="54864" rtlCol="0" anchor="ctr"/>
+          <a:lstStyle/>
+          <a:p>
+            <a:pPr algn="ctr">
+              <a:defRPr sz="1150" b="1">
                 <a:solidFill>
                   <a:srgbClr val="FFFFFF"/>
                 </a:solidFill>
-              </a:rPr>
+                <a:latin typeface="Aptos"/>
+              </a:defRPr>
+            </a:pPr>
+            <a:r>
               <a:t>Delta Lake</a:t>
             </a:r>
-            <a:endParaRPr lang="en-US" sz="1400" dirty="0"/>
-          </a:p>
-        </p:txBody>
-      </p:sp>
-      <p:sp>
-        <p:nvSpPr>
-          <p:cNvPr id="22" name="Text 20"/>
-          <p:cNvSpPr/>
-          <p:nvPr/>
-        </p:nvSpPr>
-        <p:spPr>
-          <a:xfrm>
-            <a:off x="9619488" y="2468880"/>
-            <a:ext cx="1645920" cy="182880"/>
-          </a:xfrm>
-          <a:prstGeom prst="rect">
-            <a:avLst/>
-          </a:prstGeom>
-          <a:noFill/>
-          <a:ln/>
-        </p:spPr>
-        <p:txBody>
-          <a:bodyPr wrap="square" lIns="0" tIns="0" rIns="0" bIns="0" rtlCol="0" anchor="ctr"/>
-          <a:lstStyle/>
-          <a:p>
-            <a:pPr marL="0" indent="0" algn="ctr">
-              <a:buNone/>
-            </a:pPr>
-            <a:r>
-              <a:rPr lang="en-US" sz="950" dirty="0">
+          </a:p>
+          <a:p>
+            <a:pPr algn="ctr">
+              <a:defRPr sz="950">
                 <a:solidFill>
                   <a:srgbClr val="FFFFFF"/>
                 </a:solidFill>
-              </a:rPr>
-              <a:t>Historique analytique</a:t>
-            </a:r>
-            <a:endParaRPr lang="en-US" sz="950" dirty="0"/>
-          </a:p>
-        </p:txBody>
-      </p:sp>
-      <p:sp>
-        <p:nvSpPr>
-          <p:cNvPr id="23" name="Shape 21"/>
-          <p:cNvSpPr/>
-          <p:nvPr/>
-        </p:nvSpPr>
-        <p:spPr>
-          <a:xfrm>
-            <a:off x="960120" y="3886200"/>
-            <a:ext cx="2971800" cy="1417320"/>
+                <a:latin typeface="Aptos"/>
+              </a:defRPr>
+            </a:pPr>
+            <a:r>
+              <a:t>Stockage analytique</a:t>
+            </a:r>
+            <a:br/>
+            <a:r>
+              <a:t>Historique des activités</a:t>
+            </a:r>
+          </a:p>
+        </p:txBody>
+      </p:sp>
+      <p:sp>
+        <p:nvSpPr>
+          <p:cNvPr id="16" name="Rounded Rectangle 15"/>
+          <p:cNvSpPr/>
+          <p:nvPr/>
+        </p:nvSpPr>
+        <p:spPr>
+          <a:xfrm>
+            <a:off x="2971800" y="3703320"/>
+            <a:ext cx="6263640" cy="960120"/>
           </a:xfrm>
           <a:prstGeom prst="roundRect">
-            <a:avLst>
-              <a:gd name="adj" fmla="val 5161"/>
-            </a:avLst>
+            <a:avLst/>
           </a:prstGeom>
           <a:solidFill>
-            <a:srgbClr val="FFFFFF"/>
+            <a:srgbClr val="E2EBFC"/>
           </a:solidFill>
           <a:ln w="12700">
             <a:solidFill>
-              <a:srgbClr val="DCE5EF"/>
+              <a:srgbClr val="E3E9F4"/>
             </a:solidFill>
-            <a:prstDash val="solid"/>
-          </a:ln>
-        </p:spPr>
-      </p:sp>
-      <p:sp>
-        <p:nvSpPr>
-          <p:cNvPr id="24" name="Shape 22"/>
-          <p:cNvSpPr/>
-          <p:nvPr/>
-        </p:nvSpPr>
-        <p:spPr>
-          <a:xfrm>
-            <a:off x="960120" y="3886200"/>
-            <a:ext cx="73152" cy="1417320"/>
-          </a:xfrm>
-          <a:prstGeom prst="rect">
+          </a:ln>
+        </p:spPr>
+        <p:style>
+          <a:lnRef idx="1">
+            <a:schemeClr val="accent1"/>
+          </a:lnRef>
+          <a:fillRef idx="3">
+            <a:schemeClr val="accent1"/>
+          </a:fillRef>
+          <a:effectRef idx="2">
+            <a:schemeClr val="accent1"/>
+          </a:effectRef>
+          <a:fontRef idx="minor">
+            <a:schemeClr val="lt1"/>
+          </a:fontRef>
+        </p:style>
+        <p:txBody>
+          <a:bodyPr lIns="109728" tIns="82296" rIns="109728" bIns="54864" rtlCol="0" anchor="ctr"/>
+          <a:lstStyle/>
+          <a:p>
+            <a:pPr algn="ctr">
+              <a:defRPr sz="1300" b="1">
+                <a:solidFill>
+                  <a:srgbClr val="102F56"/>
+                </a:solidFill>
+                <a:latin typeface="Aptos"/>
+              </a:defRPr>
+            </a:pPr>
+            <a:r>
+              <a:t>DÉMO LIVE</a:t>
+            </a:r>
+          </a:p>
+          <a:p>
+            <a:pPr algn="ctr">
+              <a:defRPr sz="1200">
+                <a:solidFill>
+                  <a:srgbClr val="102F56"/>
+                </a:solidFill>
+                <a:latin typeface="Aptos"/>
+              </a:defRPr>
+            </a:pPr>
+            <a:r>
+              <a:t>1 INSERT PostgreSQL → propagation automatique jusqu’à Delta Lake</a:t>
+            </a:r>
+          </a:p>
+        </p:txBody>
+      </p:sp>
+      <p:sp>
+        <p:nvSpPr>
+          <p:cNvPr id="17" name="Rounded Rectangle 16"/>
+          <p:cNvSpPr/>
+          <p:nvPr/>
+        </p:nvSpPr>
+        <p:spPr>
+          <a:xfrm>
+            <a:off x="777240" y="5989320"/>
+            <a:ext cx="10652760" cy="438912"/>
+          </a:xfrm>
+          <a:prstGeom prst="roundRect">
             <a:avLst/>
           </a:prstGeom>
           <a:solidFill>
-            <a:srgbClr val="2F6BFF"/>
+            <a:srgbClr val="E2EBFC"/>
           </a:solidFill>
-          <a:ln w="12700">
-            <a:solidFill>
-              <a:srgbClr val="2F6BFF"/>
-            </a:solidFill>
-            <a:prstDash val="solid"/>
-          </a:ln>
-        </p:spPr>
-      </p:sp>
-      <p:sp>
-        <p:nvSpPr>
-          <p:cNvPr id="25" name="Text 23"/>
-          <p:cNvSpPr/>
-          <p:nvPr/>
-        </p:nvSpPr>
-        <p:spPr>
-          <a:xfrm>
-            <a:off x="1188720" y="4050792"/>
-            <a:ext cx="2587752" cy="256032"/>
-          </a:xfrm>
-          <a:prstGeom prst="rect">
-            <a:avLst/>
-          </a:prstGeom>
-          <a:noFill/>
-          <a:ln/>
-        </p:spPr>
-        <p:txBody>
-          <a:bodyPr wrap="square" lIns="0" tIns="0" rIns="0" bIns="0" rtlCol="0" anchor="ctr"/>
-          <a:lstStyle/>
-          <a:p>
-            <a:pPr marL="0" indent="0">
-              <a:buNone/>
-            </a:pPr>
-            <a:r>
-              <a:rPr lang="en-US" sz="1400" b="1" dirty="0">
-                <a:solidFill>
-                  <a:srgbClr val="17324D"/>
-                </a:solidFill>
-              </a:rPr>
-              <a:t>Démo live</a:t>
-            </a:r>
-            <a:endParaRPr lang="en-US" sz="1400" dirty="0"/>
-          </a:p>
-        </p:txBody>
-      </p:sp>
-      <p:sp>
-        <p:nvSpPr>
-          <p:cNvPr id="26" name="Text 24"/>
-          <p:cNvSpPr/>
-          <p:nvPr/>
-        </p:nvSpPr>
-        <p:spPr>
-          <a:xfrm>
-            <a:off x="1188720" y="4416552"/>
-            <a:ext cx="2587752" cy="758952"/>
-          </a:xfrm>
-          <a:prstGeom prst="rect">
-            <a:avLst/>
-          </a:prstGeom>
-          <a:noFill/>
-          <a:ln/>
-        </p:spPr>
-        <p:txBody>
-          <a:bodyPr wrap="square" lIns="254" tIns="254" rIns="254" bIns="254" rtlCol="0" anchor="t"/>
-          <a:lstStyle/>
-          <a:p>
-            <a:pPr marL="0" indent="0">
-              <a:buNone/>
-            </a:pPr>
-            <a:r>
-              <a:rPr lang="en-US" sz="1120" dirty="0">
-                <a:solidFill>
-                  <a:srgbClr val="243447"/>
-                </a:solidFill>
-              </a:rPr>
-              <a:t>Injection d’une activité dans PostgreSQL puis observation de sa propagation dans le flux.</a:t>
-            </a:r>
-            <a:endParaRPr lang="en-US" sz="1120" dirty="0"/>
-          </a:p>
-        </p:txBody>
-      </p:sp>
-      <p:sp>
-        <p:nvSpPr>
-          <p:cNvPr id="27" name="Shape 25"/>
-          <p:cNvSpPr/>
-          <p:nvPr/>
-        </p:nvSpPr>
-        <p:spPr>
-          <a:xfrm>
-            <a:off x="4617720" y="3886200"/>
-            <a:ext cx="2971800" cy="1417320"/>
-          </a:xfrm>
-          <a:prstGeom prst="roundRect">
-            <a:avLst>
-              <a:gd name="adj" fmla="val 5161"/>
-            </a:avLst>
-          </a:prstGeom>
-          <a:solidFill>
-            <a:srgbClr val="FFFFFF"/>
-          </a:solidFill>
-          <a:ln w="12700">
-            <a:solidFill>
-              <a:srgbClr val="DCE5EF"/>
-            </a:solidFill>
-            <a:prstDash val="solid"/>
-          </a:ln>
-        </p:spPr>
-      </p:sp>
-      <p:sp>
-        <p:nvSpPr>
-          <p:cNvPr id="28" name="Shape 26"/>
-          <p:cNvSpPr/>
-          <p:nvPr/>
-        </p:nvSpPr>
-        <p:spPr>
-          <a:xfrm>
-            <a:off x="4617720" y="3886200"/>
-            <a:ext cx="73152" cy="1417320"/>
-          </a:xfrm>
-          <a:prstGeom prst="rect">
-            <a:avLst/>
-          </a:prstGeom>
-          <a:solidFill>
-            <a:srgbClr val="F59E0B"/>
-          </a:solidFill>
-          <a:ln w="12700">
-            <a:solidFill>
-              <a:srgbClr val="F59E0B"/>
-            </a:solidFill>
-            <a:prstDash val="solid"/>
-          </a:ln>
-        </p:spPr>
-      </p:sp>
-      <p:sp>
-        <p:nvSpPr>
-          <p:cNvPr id="29" name="Text 27"/>
-          <p:cNvSpPr/>
-          <p:nvPr/>
-        </p:nvSpPr>
-        <p:spPr>
-          <a:xfrm>
-            <a:off x="4846320" y="4050792"/>
-            <a:ext cx="2587752" cy="256032"/>
-          </a:xfrm>
-          <a:prstGeom prst="rect">
-            <a:avLst/>
-          </a:prstGeom>
-          <a:noFill/>
-          <a:ln/>
-        </p:spPr>
-        <p:txBody>
-          <a:bodyPr wrap="square" lIns="0" tIns="0" rIns="0" bIns="0" rtlCol="0" anchor="ctr"/>
-          <a:lstStyle/>
-          <a:p>
-            <a:pPr marL="0" indent="0">
-              <a:buNone/>
-            </a:pPr>
-            <a:r>
-              <a:rPr lang="en-US" sz="1400" b="1" dirty="0">
-                <a:solidFill>
-                  <a:srgbClr val="17324D"/>
-                </a:solidFill>
-              </a:rPr>
-              <a:t>Qualité</a:t>
-            </a:r>
-            <a:endParaRPr lang="en-US" sz="1400" dirty="0"/>
-          </a:p>
-        </p:txBody>
-      </p:sp>
-      <p:sp>
-        <p:nvSpPr>
-          <p:cNvPr id="30" name="Text 28"/>
-          <p:cNvSpPr/>
-          <p:nvPr/>
-        </p:nvSpPr>
-        <p:spPr>
-          <a:xfrm>
-            <a:off x="4846320" y="4416552"/>
-            <a:ext cx="2587752" cy="758952"/>
-          </a:xfrm>
-          <a:prstGeom prst="rect">
-            <a:avLst/>
-          </a:prstGeom>
-          <a:noFill/>
-          <a:ln/>
-        </p:spPr>
-        <p:txBody>
-          <a:bodyPr wrap="square" lIns="254" tIns="254" rIns="254" bIns="254" rtlCol="0" anchor="t"/>
-          <a:lstStyle/>
-          <a:p>
-            <a:pPr marL="0" indent="0">
-              <a:buNone/>
-            </a:pPr>
-            <a:r>
-              <a:rPr lang="en-US" sz="1120" dirty="0">
-                <a:solidFill>
-                  <a:srgbClr val="243447"/>
-                </a:solidFill>
-              </a:rPr>
-              <a:t>Une distance négative est isolée comme donnée invalide avant la couche métier.</a:t>
-            </a:r>
-            <a:endParaRPr lang="en-US" sz="1120" dirty="0"/>
-          </a:p>
-        </p:txBody>
-      </p:sp>
-      <p:sp>
-        <p:nvSpPr>
-          <p:cNvPr id="31" name="Shape 29"/>
-          <p:cNvSpPr/>
-          <p:nvPr/>
-        </p:nvSpPr>
-        <p:spPr>
-          <a:xfrm>
-            <a:off x="8275320" y="3886200"/>
-            <a:ext cx="2971800" cy="1417320"/>
-          </a:xfrm>
-          <a:prstGeom prst="roundRect">
-            <a:avLst>
-              <a:gd name="adj" fmla="val 5161"/>
-            </a:avLst>
-          </a:prstGeom>
-          <a:solidFill>
-            <a:srgbClr val="FFFFFF"/>
-          </a:solidFill>
-          <a:ln w="12700">
-            <a:solidFill>
-              <a:srgbClr val="DCE5EF"/>
-            </a:solidFill>
-            <a:prstDash val="solid"/>
-          </a:ln>
-        </p:spPr>
-      </p:sp>
-      <p:sp>
-        <p:nvSpPr>
-          <p:cNvPr id="32" name="Shape 30"/>
-          <p:cNvSpPr/>
-          <p:nvPr/>
-        </p:nvSpPr>
-        <p:spPr>
-          <a:xfrm>
-            <a:off x="8275320" y="3886200"/>
-            <a:ext cx="73152" cy="1417320"/>
-          </a:xfrm>
-          <a:prstGeom prst="rect">
-            <a:avLst/>
-          </a:prstGeom>
-          <a:solidFill>
-            <a:srgbClr val="2BAE66"/>
-          </a:solidFill>
-          <a:ln w="12700">
-            <a:solidFill>
-              <a:srgbClr val="2BAE66"/>
-            </a:solidFill>
-            <a:prstDash val="solid"/>
-          </a:ln>
-        </p:spPr>
-      </p:sp>
-      <p:sp>
-        <p:nvSpPr>
-          <p:cNvPr id="33" name="Text 31"/>
-          <p:cNvSpPr/>
-          <p:nvPr/>
-        </p:nvSpPr>
-        <p:spPr>
-          <a:xfrm>
-            <a:off x="8503920" y="4050792"/>
-            <a:ext cx="2587752" cy="256032"/>
-          </a:xfrm>
-          <a:prstGeom prst="rect">
-            <a:avLst/>
-          </a:prstGeom>
-          <a:noFill/>
-          <a:ln/>
-        </p:spPr>
-        <p:txBody>
-          <a:bodyPr wrap="square" lIns="0" tIns="0" rIns="0" bIns="0" rtlCol="0" anchor="ctr"/>
-          <a:lstStyle/>
-          <a:p>
-            <a:pPr marL="0" indent="0">
-              <a:buNone/>
-            </a:pPr>
-            <a:r>
-              <a:rPr lang="en-US" sz="1400" b="1" dirty="0">
-                <a:solidFill>
-                  <a:srgbClr val="17324D"/>
-                </a:solidFill>
-              </a:rPr>
-              <a:t>Résultat</a:t>
-            </a:r>
-            <a:endParaRPr lang="en-US" sz="1400" dirty="0"/>
-          </a:p>
-        </p:txBody>
-      </p:sp>
-      <p:sp>
-        <p:nvSpPr>
-          <p:cNvPr id="34" name="Text 32"/>
-          <p:cNvSpPr/>
-          <p:nvPr/>
-        </p:nvSpPr>
-        <p:spPr>
-          <a:xfrm>
-            <a:off x="8503920" y="4416552"/>
-            <a:ext cx="2587752" cy="758952"/>
-          </a:xfrm>
-          <a:prstGeom prst="rect">
-            <a:avLst/>
-          </a:prstGeom>
-          <a:noFill/>
-          <a:ln/>
-        </p:spPr>
-        <p:txBody>
-          <a:bodyPr wrap="square" lIns="254" tIns="254" rIns="254" bIns="254" rtlCol="0" anchor="t"/>
-          <a:lstStyle/>
-          <a:p>
-            <a:pPr marL="0" indent="0">
-              <a:buNone/>
-            </a:pPr>
-            <a:r>
-              <a:rPr lang="en-US" sz="1120" dirty="0">
-                <a:solidFill>
-                  <a:srgbClr val="243447"/>
-                </a:solidFill>
-              </a:rPr>
-              <a:t>Les activités valides alimentent Delta et les traitements aval.</a:t>
-            </a:r>
-            <a:endParaRPr lang="en-US" sz="1120" dirty="0"/>
-          </a:p>
-        </p:txBody>
-      </p:sp>
-      <p:sp>
-        <p:nvSpPr>
-          <p:cNvPr id="35" name="Slide Number Placeholder 0"/>
-          <p:cNvSpPr>
-            <a:spLocks noGrp="1"/>
-          </p:cNvSpPr>
-          <p:nvPr>
-            <p:ph type="sldNum" sz="quarter" idx="4294967295"/>
-          </p:nvPr>
-        </p:nvSpPr>
-        <p:spPr>
-          <a:xfrm>
-            <a:off x="11631168" y="6473952"/>
-            <a:ext cx="800000" cy="300000"/>
-          </a:xfrm>
-          <a:prstGeom prst="rect">
-            <a:avLst/>
-          </a:prstGeom>
-          <a:extLst>
-            <a:ext uri="{C572A759-6A51-4108-AA02-DFA0A04FC94B}">
-              <ma14:wrappingTextBoxFlag xmlns:ma14="http://schemas.microsoft.com/office/mac/drawingml/2011/main" xmlns="" val="0"/>
-            </a:ext>
-          </a:extLst>
-        </p:spPr>
-        <p:txBody>
-          <a:bodyPr/>
-          <a:lstStyle>
-            <a:lvl1pPr>
-              <a:defRPr sz="800">
-                <a:solidFill>
-                  <a:srgbClr val="718096"/>
-                </a:solidFill>
+          <a:ln>
+            <a:noFill/>
+          </a:ln>
+        </p:spPr>
+        <p:style>
+          <a:lnRef idx="1">
+            <a:schemeClr val="accent1"/>
+          </a:lnRef>
+          <a:fillRef idx="3">
+            <a:schemeClr val="accent1"/>
+          </a:fillRef>
+          <a:effectRef idx="2">
+            <a:schemeClr val="accent1"/>
+          </a:effectRef>
+          <a:fontRef idx="minor">
+            <a:schemeClr val="lt1"/>
+          </a:fontRef>
+        </p:style>
+        <p:txBody>
+          <a:bodyPr rtlCol="0" anchor="ctr"/>
+          <a:lstStyle/>
+          <a:p>
+            <a:pPr algn="ctr">
+              <a:defRPr sz="1200" b="1">
+                <a:solidFill>
+                  <a:srgbClr val="102F56"/>
+                </a:solidFill>
+                <a:latin typeface="Aptos"/>
               </a:defRPr>
-            </a:lvl1pPr>
-          </a:lstStyle>
-          <a:p>
-            <a:pPr algn="l"/>
-            <a:fld id="{F7021451-1387-4CA6-816F-3879F97B5CBC}" type="slidenum">
-              <a:rPr lang="en-US" b="0"/>
-              <a:t>7</a:t>
-            </a:fld>
-            <a:endParaRPr lang="en-US"/>
+            </a:pPr>
+            <a:r>
+              <a:t>Aucun script Spark n’est lancé manuellement après l’arrivée de l’activité.</a:t>
+            </a:r>
           </a:p>
         </p:txBody>
       </p:sp>
@@ -10621,51 +11144,6 @@
           </a:p>
         </p:txBody>
       </p:sp>
-      <p:sp>
-        <p:nvSpPr>
-          <p:cNvPr id="25" name="Slide Number Placeholder 0"/>
-          <p:cNvSpPr>
-            <a:spLocks noGrp="1"/>
-          </p:cNvSpPr>
-          <p:nvPr>
-            <p:ph type="sldNum" sz="quarter" idx="4294967295"/>
-          </p:nvPr>
-        </p:nvSpPr>
-        <p:spPr>
-          <a:xfrm>
-            <a:off x="11631168" y="6473952"/>
-            <a:ext cx="800000" cy="300000"/>
-          </a:xfrm>
-          <a:prstGeom prst="rect">
-            <a:avLst/>
-          </a:prstGeom>
-          <a:extLst>
-            <a:ext uri="{C572A759-6A51-4108-AA02-DFA0A04FC94B}">
-              <ma14:wrappingTextBoxFlag xmlns:ma14="http://schemas.microsoft.com/office/mac/drawingml/2011/main" xmlns="" val="0"/>
-            </a:ext>
-          </a:extLst>
-        </p:spPr>
-        <p:txBody>
-          <a:bodyPr/>
-          <a:lstStyle>
-            <a:lvl1pPr>
-              <a:defRPr sz="800">
-                <a:solidFill>
-                  <a:srgbClr val="718096"/>
-                </a:solidFill>
-              </a:defRPr>
-            </a:lvl1pPr>
-          </a:lstStyle>
-          <a:p>
-            <a:pPr algn="l"/>
-            <a:fld id="{F7021451-1387-4CA6-816F-3879F97B5CBC}" type="slidenum">
-              <a:rPr lang="en-US" b="0"/>
-              <a:t>8</a:t>
-            </a:fld>
-            <a:endParaRPr lang="en-US"/>
-          </a:p>
-        </p:txBody>
-      </p:sp>
     </p:spTree>
   </p:cSld>
   <p:clrMapOvr>
@@ -10700,1139 +11178,754 @@
       </p:grpSpPr>
       <p:sp>
         <p:nvSpPr>
-          <p:cNvPr id="2" name="Text 0"/>
-          <p:cNvSpPr/>
-          <p:nvPr/>
-        </p:nvSpPr>
-        <p:spPr>
-          <a:xfrm>
-            <a:off x="594360" y="438912"/>
-            <a:ext cx="11018520" cy="438912"/>
+          <p:cNvPr id="2" name="Rectangle 1"/>
+          <p:cNvSpPr/>
+          <p:nvPr/>
+        </p:nvSpPr>
+        <p:spPr>
+          <a:xfrm>
+            <a:off x="0" y="0"/>
+            <a:ext cx="12192000" cy="182880"/>
+          </a:xfrm>
+          <a:prstGeom prst="rect">
+            <a:avLst/>
+          </a:prstGeom>
+          <a:solidFill>
+            <a:srgbClr val="2E65EB"/>
+          </a:solidFill>
+          <a:ln>
+            <a:noFill/>
+          </a:ln>
+        </p:spPr>
+        <p:style>
+          <a:lnRef idx="1">
+            <a:schemeClr val="accent1"/>
+          </a:lnRef>
+          <a:fillRef idx="3">
+            <a:schemeClr val="accent1"/>
+          </a:fillRef>
+          <a:effectRef idx="2">
+            <a:schemeClr val="accent1"/>
+          </a:effectRef>
+          <a:fontRef idx="minor">
+            <a:schemeClr val="lt1"/>
+          </a:fontRef>
+        </p:style>
+        <p:txBody>
+          <a:bodyPr rtlCol="0" anchor="ctr"/>
+          <a:lstStyle/>
+          <a:p>
+            <a:pPr algn="ctr"/>
+            <a:endParaRPr/>
+          </a:p>
+        </p:txBody>
+      </p:sp>
+      <p:sp>
+        <p:nvSpPr>
+          <p:cNvPr id="3" name="TextBox 2"/>
+          <p:cNvSpPr txBox="1"/>
+          <p:nvPr/>
+        </p:nvSpPr>
+        <p:spPr>
+          <a:xfrm>
+            <a:off x="566928" y="384048"/>
+            <a:ext cx="10972800" cy="502920"/>
           </a:xfrm>
           <a:prstGeom prst="rect">
             <a:avLst/>
           </a:prstGeom>
           <a:noFill/>
-          <a:ln/>
-        </p:spPr>
-        <p:txBody>
-          <a:bodyPr wrap="square" lIns="0" tIns="0" rIns="0" bIns="0" rtlCol="0" anchor="ctr"/>
-          <a:lstStyle/>
-          <a:p>
-            <a:pPr marL="0" indent="0">
-              <a:buNone/>
-            </a:pPr>
-            <a:r>
-              <a:rPr lang="en-US" sz="2600" b="1" dirty="0">
-                <a:solidFill>
-                  <a:srgbClr val="17324D"/>
-                </a:solidFill>
-              </a:rPr>
-              <a:t>8. Monitoring et qualité des données</a:t>
-            </a:r>
-            <a:endParaRPr lang="en-US" sz="2600" dirty="0"/>
-          </a:p>
-        </p:txBody>
-      </p:sp>
-      <p:sp>
-        <p:nvSpPr>
-          <p:cNvPr id="3" name="Text 1"/>
-          <p:cNvSpPr/>
-          <p:nvPr/>
-        </p:nvSpPr>
-        <p:spPr>
-          <a:xfrm>
-            <a:off x="612648" y="932688"/>
-            <a:ext cx="10789920" cy="292608"/>
+        </p:spPr>
+        <p:txBody>
+          <a:bodyPr wrap="none">
+            <a:spAutoFit/>
+          </a:bodyPr>
+          <a:lstStyle/>
+          <a:p>
+            <a:pPr>
+              <a:defRPr sz="2700" b="1">
+                <a:solidFill>
+                  <a:srgbClr val="102F56"/>
+                </a:solidFill>
+                <a:latin typeface="Aptos Display"/>
+              </a:defRPr>
+            </a:pPr>
+            <a:r>
+              <a:t>8. Monitoring, qualité et résilience</a:t>
+            </a:r>
+          </a:p>
+        </p:txBody>
+      </p:sp>
+      <p:sp>
+        <p:nvSpPr>
+          <p:cNvPr id="4" name="TextBox 3"/>
+          <p:cNvSpPr txBox="1"/>
+          <p:nvPr/>
+        </p:nvSpPr>
+        <p:spPr>
+          <a:xfrm>
+            <a:off x="576072" y="987552"/>
+            <a:ext cx="10972800" cy="438912"/>
           </a:xfrm>
           <a:prstGeom prst="rect">
             <a:avLst/>
           </a:prstGeom>
           <a:noFill/>
-          <a:ln/>
-        </p:spPr>
-        <p:txBody>
-          <a:bodyPr wrap="square" lIns="0" tIns="0" rIns="0" bIns="0" rtlCol="0" anchor="ctr"/>
-          <a:lstStyle/>
-          <a:p>
-            <a:pPr marL="0" indent="0">
-              <a:buNone/>
-            </a:pPr>
-            <a:r>
-              <a:rPr lang="en-US" sz="1150" dirty="0">
-                <a:solidFill>
-                  <a:srgbClr val="66788A"/>
-                </a:solidFill>
-              </a:rPr>
-              <a:t>Valider en continu l’intégration, la volumétrie et la cohérence du pipeline.</a:t>
-            </a:r>
-            <a:endParaRPr lang="en-US" sz="1150" dirty="0"/>
-          </a:p>
-        </p:txBody>
-      </p:sp>
-      <p:sp>
-        <p:nvSpPr>
-          <p:cNvPr id="4" name="Shape 2"/>
-          <p:cNvSpPr/>
-          <p:nvPr/>
-        </p:nvSpPr>
-        <p:spPr>
-          <a:xfrm>
-            <a:off x="731520" y="1417320"/>
-            <a:ext cx="1965960" cy="960120"/>
+        </p:spPr>
+        <p:txBody>
+          <a:bodyPr wrap="none">
+            <a:spAutoFit/>
+          </a:bodyPr>
+          <a:lstStyle/>
+          <a:p>
+            <a:pPr>
+              <a:defRPr sz="1300">
+                <a:solidFill>
+                  <a:srgbClr val="4E6080"/>
+                </a:solidFill>
+                <a:latin typeface="Aptos"/>
+              </a:defRPr>
+            </a:pPr>
+            <a:r>
+              <a:t>Contrôler la cohérence du pipeline et assurer la reprise automatique après incident.</a:t>
+            </a:r>
+          </a:p>
+        </p:txBody>
+      </p:sp>
+      <p:sp>
+        <p:nvSpPr>
+          <p:cNvPr id="7" name="Rounded Rectangle 6"/>
+          <p:cNvSpPr/>
+          <p:nvPr/>
+        </p:nvSpPr>
+        <p:spPr>
+          <a:xfrm>
+            <a:off x="594360" y="1600200"/>
+            <a:ext cx="1938528" cy="960120"/>
           </a:xfrm>
           <a:prstGeom prst="roundRect">
-            <a:avLst>
-              <a:gd name="adj" fmla="val 7619"/>
-            </a:avLst>
+            <a:avLst/>
           </a:prstGeom>
           <a:solidFill>
             <a:srgbClr val="FFFFFF"/>
           </a:solidFill>
           <a:ln w="12700">
             <a:solidFill>
-              <a:srgbClr val="DCE5EF"/>
+              <a:srgbClr val="E3E9F4"/>
             </a:solidFill>
-            <a:prstDash val="solid"/>
-          </a:ln>
-        </p:spPr>
-      </p:sp>
-      <p:sp>
-        <p:nvSpPr>
-          <p:cNvPr id="5" name="Text 3"/>
-          <p:cNvSpPr/>
-          <p:nvPr/>
-        </p:nvSpPr>
-        <p:spPr>
-          <a:xfrm>
-            <a:off x="868680" y="1545336"/>
-            <a:ext cx="1691640" cy="329184"/>
-          </a:xfrm>
-          <a:prstGeom prst="rect">
-            <a:avLst/>
-          </a:prstGeom>
-          <a:noFill/>
-          <a:ln/>
-        </p:spPr>
-        <p:txBody>
-          <a:bodyPr wrap="square" lIns="0" tIns="0" rIns="0" bIns="0" rtlCol="0" anchor="ctr"/>
-          <a:lstStyle/>
-          <a:p>
-            <a:pPr marL="0" indent="0" algn="ctr">
-              <a:buNone/>
-            </a:pPr>
-            <a:r>
-              <a:rPr lang="en-US" sz="2200" b="1" dirty="0">
-                <a:solidFill>
-                  <a:srgbClr val="2F6BFF"/>
-                </a:solidFill>
-              </a:rPr>
+          </a:ln>
+        </p:spPr>
+        <p:style>
+          <a:lnRef idx="1">
+            <a:schemeClr val="accent1"/>
+          </a:lnRef>
+          <a:fillRef idx="3">
+            <a:schemeClr val="accent1"/>
+          </a:fillRef>
+          <a:effectRef idx="2">
+            <a:schemeClr val="accent1"/>
+          </a:effectRef>
+          <a:fontRef idx="minor">
+            <a:schemeClr val="lt1"/>
+          </a:fontRef>
+        </p:style>
+        <p:txBody>
+          <a:bodyPr lIns="109728" tIns="82296" rIns="109728" bIns="54864" rtlCol="0" anchor="ctr"/>
+          <a:lstStyle/>
+          <a:p>
+            <a:pPr algn="ctr">
+              <a:defRPr sz="2000" b="1">
+                <a:solidFill>
+                  <a:srgbClr val="102F56"/>
+                </a:solidFill>
+                <a:latin typeface="Aptos"/>
+              </a:defRPr>
+            </a:pPr>
+            <a:r>
               <a:t>2 550</a:t>
             </a:r>
-            <a:endParaRPr lang="en-US" sz="2200" dirty="0"/>
-          </a:p>
-        </p:txBody>
-      </p:sp>
-      <p:sp>
-        <p:nvSpPr>
-          <p:cNvPr id="6" name="Text 4"/>
-          <p:cNvSpPr/>
-          <p:nvPr/>
-        </p:nvSpPr>
-        <p:spPr>
-          <a:xfrm>
-            <a:off x="841248" y="1956816"/>
-            <a:ext cx="1746504" cy="228600"/>
-          </a:xfrm>
-          <a:prstGeom prst="rect">
-            <a:avLst/>
-          </a:prstGeom>
-          <a:noFill/>
-          <a:ln/>
-        </p:spPr>
-        <p:txBody>
-          <a:bodyPr wrap="square" lIns="0" tIns="0" rIns="0" bIns="0" rtlCol="0" anchor="ctr"/>
-          <a:lstStyle/>
-          <a:p>
-            <a:pPr marL="0" indent="0" algn="ctr">
-              <a:buNone/>
-            </a:pPr>
-            <a:r>
-              <a:rPr lang="en-US" sz="980" dirty="0">
-                <a:solidFill>
-                  <a:srgbClr val="66788A"/>
-                </a:solidFill>
-              </a:rPr>
+          </a:p>
+          <a:p>
+            <a:pPr algn="ctr">
+              <a:defRPr sz="950">
+                <a:solidFill>
+                  <a:srgbClr val="4E6080"/>
+                </a:solidFill>
+                <a:latin typeface="Aptos"/>
+              </a:defRPr>
+            </a:pPr>
+            <a:r>
               <a:t>PostgreSQL</a:t>
             </a:r>
-            <a:endParaRPr lang="en-US" sz="980" dirty="0"/>
-          </a:p>
-        </p:txBody>
-      </p:sp>
-      <p:sp>
-        <p:nvSpPr>
-          <p:cNvPr id="7" name="Shape 5"/>
-          <p:cNvSpPr/>
-          <p:nvPr/>
-        </p:nvSpPr>
-        <p:spPr>
-          <a:xfrm>
-            <a:off x="2880360" y="1417320"/>
-            <a:ext cx="1965960" cy="960120"/>
+          </a:p>
+        </p:txBody>
+      </p:sp>
+      <p:sp>
+        <p:nvSpPr>
+          <p:cNvPr id="8" name="Rounded Rectangle 7"/>
+          <p:cNvSpPr/>
+          <p:nvPr/>
+        </p:nvSpPr>
+        <p:spPr>
+          <a:xfrm>
+            <a:off x="2862072" y="1600200"/>
+            <a:ext cx="1938528" cy="960120"/>
           </a:xfrm>
           <a:prstGeom prst="roundRect">
-            <a:avLst>
-              <a:gd name="adj" fmla="val 7619"/>
-            </a:avLst>
+            <a:avLst/>
           </a:prstGeom>
           <a:solidFill>
             <a:srgbClr val="FFFFFF"/>
           </a:solidFill>
           <a:ln w="12700">
             <a:solidFill>
-              <a:srgbClr val="DCE5EF"/>
+              <a:srgbClr val="E3E9F4"/>
             </a:solidFill>
-            <a:prstDash val="solid"/>
-          </a:ln>
-        </p:spPr>
-      </p:sp>
-      <p:sp>
-        <p:nvSpPr>
-          <p:cNvPr id="8" name="Text 6"/>
-          <p:cNvSpPr/>
-          <p:nvPr/>
-        </p:nvSpPr>
-        <p:spPr>
-          <a:xfrm>
-            <a:off x="3017520" y="1545336"/>
-            <a:ext cx="1691640" cy="329184"/>
-          </a:xfrm>
-          <a:prstGeom prst="rect">
-            <a:avLst/>
-          </a:prstGeom>
-          <a:noFill/>
-          <a:ln/>
-        </p:spPr>
-        <p:txBody>
-          <a:bodyPr wrap="square" lIns="0" tIns="0" rIns="0" bIns="0" rtlCol="0" anchor="ctr"/>
-          <a:lstStyle/>
-          <a:p>
-            <a:pPr marL="0" indent="0" algn="ctr">
-              <a:buNone/>
-            </a:pPr>
-            <a:r>
-              <a:rPr lang="en-US" sz="2200" b="1" dirty="0">
-                <a:solidFill>
-                  <a:srgbClr val="29B6C8"/>
-                </a:solidFill>
-              </a:rPr>
+          </a:ln>
+        </p:spPr>
+        <p:style>
+          <a:lnRef idx="1">
+            <a:schemeClr val="accent1"/>
+          </a:lnRef>
+          <a:fillRef idx="3">
+            <a:schemeClr val="accent1"/>
+          </a:fillRef>
+          <a:effectRef idx="2">
+            <a:schemeClr val="accent1"/>
+          </a:effectRef>
+          <a:fontRef idx="minor">
+            <a:schemeClr val="lt1"/>
+          </a:fontRef>
+        </p:style>
+        <p:txBody>
+          <a:bodyPr lIns="109728" tIns="82296" rIns="109728" bIns="54864" rtlCol="0" anchor="ctr"/>
+          <a:lstStyle/>
+          <a:p>
+            <a:pPr algn="ctr">
+              <a:defRPr sz="2000" b="1">
+                <a:solidFill>
+                  <a:srgbClr val="102F56"/>
+                </a:solidFill>
+                <a:latin typeface="Aptos"/>
+              </a:defRPr>
+            </a:pPr>
+            <a:r>
               <a:t>2 550</a:t>
             </a:r>
-            <a:endParaRPr lang="en-US" sz="2200" dirty="0"/>
-          </a:p>
-        </p:txBody>
-      </p:sp>
-      <p:sp>
-        <p:nvSpPr>
-          <p:cNvPr id="9" name="Text 7"/>
-          <p:cNvSpPr/>
-          <p:nvPr/>
-        </p:nvSpPr>
-        <p:spPr>
-          <a:xfrm>
-            <a:off x="2990088" y="1956816"/>
-            <a:ext cx="1746504" cy="228600"/>
-          </a:xfrm>
-          <a:prstGeom prst="rect">
-            <a:avLst/>
-          </a:prstGeom>
-          <a:noFill/>
-          <a:ln/>
-        </p:spPr>
-        <p:txBody>
-          <a:bodyPr wrap="square" lIns="0" tIns="0" rIns="0" bIns="0" rtlCol="0" anchor="ctr"/>
-          <a:lstStyle/>
-          <a:p>
-            <a:pPr marL="0" indent="0" algn="ctr">
-              <a:buNone/>
-            </a:pPr>
-            <a:r>
-              <a:rPr lang="en-US" sz="980" dirty="0">
-                <a:solidFill>
-                  <a:srgbClr val="66788A"/>
-                </a:solidFill>
-              </a:rPr>
+          </a:p>
+          <a:p>
+            <a:pPr algn="ctr">
+              <a:defRPr sz="950">
+                <a:solidFill>
+                  <a:srgbClr val="4E6080"/>
+                </a:solidFill>
+                <a:latin typeface="Aptos"/>
+              </a:defRPr>
+            </a:pPr>
+            <a:r>
               <a:t>Delta activities</a:t>
             </a:r>
-            <a:endParaRPr lang="en-US" sz="980" dirty="0"/>
-          </a:p>
-        </p:txBody>
-      </p:sp>
-      <p:sp>
-        <p:nvSpPr>
-          <p:cNvPr id="10" name="Shape 8"/>
-          <p:cNvSpPr/>
-          <p:nvPr/>
-        </p:nvSpPr>
-        <p:spPr>
-          <a:xfrm>
-            <a:off x="5029200" y="1417320"/>
-            <a:ext cx="1965960" cy="960120"/>
+          </a:p>
+        </p:txBody>
+      </p:sp>
+      <p:sp>
+        <p:nvSpPr>
+          <p:cNvPr id="9" name="Rounded Rectangle 8"/>
+          <p:cNvSpPr/>
+          <p:nvPr/>
+        </p:nvSpPr>
+        <p:spPr>
+          <a:xfrm>
+            <a:off x="5129784" y="1600200"/>
+            <a:ext cx="1938528" cy="960120"/>
           </a:xfrm>
           <a:prstGeom prst="roundRect">
-            <a:avLst>
-              <a:gd name="adj" fmla="val 7619"/>
-            </a:avLst>
+            <a:avLst/>
           </a:prstGeom>
           <a:solidFill>
             <a:srgbClr val="FFFFFF"/>
           </a:solidFill>
           <a:ln w="12700">
             <a:solidFill>
-              <a:srgbClr val="DCE5EF"/>
+              <a:srgbClr val="E3E9F4"/>
             </a:solidFill>
-            <a:prstDash val="solid"/>
-          </a:ln>
-        </p:spPr>
-      </p:sp>
-      <p:sp>
-        <p:nvSpPr>
-          <p:cNvPr id="11" name="Text 9"/>
-          <p:cNvSpPr/>
-          <p:nvPr/>
-        </p:nvSpPr>
-        <p:spPr>
-          <a:xfrm>
-            <a:off x="5166360" y="1545336"/>
-            <a:ext cx="1691640" cy="329184"/>
-          </a:xfrm>
-          <a:prstGeom prst="rect">
-            <a:avLst/>
-          </a:prstGeom>
-          <a:noFill/>
-          <a:ln/>
-        </p:spPr>
-        <p:txBody>
-          <a:bodyPr wrap="square" lIns="0" tIns="0" rIns="0" bIns="0" rtlCol="0" anchor="ctr"/>
-          <a:lstStyle/>
-          <a:p>
-            <a:pPr marL="0" indent="0" algn="ctr">
-              <a:buNone/>
-            </a:pPr>
-            <a:r>
-              <a:rPr lang="en-US" sz="2200" b="1" dirty="0">
-                <a:solidFill>
-                  <a:srgbClr val="2BAE66"/>
-                </a:solidFill>
-              </a:rPr>
+          </a:ln>
+        </p:spPr>
+        <p:style>
+          <a:lnRef idx="1">
+            <a:schemeClr val="accent1"/>
+          </a:lnRef>
+          <a:fillRef idx="3">
+            <a:schemeClr val="accent1"/>
+          </a:fillRef>
+          <a:effectRef idx="2">
+            <a:schemeClr val="accent1"/>
+          </a:effectRef>
+          <a:fontRef idx="minor">
+            <a:schemeClr val="lt1"/>
+          </a:fontRef>
+        </p:style>
+        <p:txBody>
+          <a:bodyPr lIns="109728" tIns="82296" rIns="109728" bIns="54864" rtlCol="0" anchor="ctr"/>
+          <a:lstStyle/>
+          <a:p>
+            <a:pPr algn="ctr">
+              <a:defRPr sz="2000" b="1">
+                <a:solidFill>
+                  <a:srgbClr val="102F56"/>
+                </a:solidFill>
+                <a:latin typeface="Aptos"/>
+              </a:defRPr>
+            </a:pPr>
+            <a:r>
               <a:t>0</a:t>
             </a:r>
-            <a:endParaRPr lang="en-US" sz="2200" dirty="0"/>
-          </a:p>
-        </p:txBody>
-      </p:sp>
-      <p:sp>
-        <p:nvSpPr>
-          <p:cNvPr id="12" name="Text 10"/>
-          <p:cNvSpPr/>
-          <p:nvPr/>
-        </p:nvSpPr>
-        <p:spPr>
-          <a:xfrm>
-            <a:off x="5138928" y="1956816"/>
-            <a:ext cx="1746504" cy="228600"/>
-          </a:xfrm>
-          <a:prstGeom prst="rect">
-            <a:avLst/>
-          </a:prstGeom>
-          <a:noFill/>
-          <a:ln/>
-        </p:spPr>
-        <p:txBody>
-          <a:bodyPr wrap="square" lIns="0" tIns="0" rIns="0" bIns="0" rtlCol="0" anchor="ctr"/>
-          <a:lstStyle/>
-          <a:p>
-            <a:pPr marL="0" indent="0" algn="ctr">
-              <a:buNone/>
-            </a:pPr>
-            <a:r>
-              <a:rPr lang="en-US" sz="980" dirty="0">
-                <a:solidFill>
-                  <a:srgbClr val="66788A"/>
-                </a:solidFill>
-              </a:rPr>
-              <a:t>écart de volume</a:t>
-            </a:r>
-            <a:endParaRPr lang="en-US" sz="980" dirty="0"/>
-          </a:p>
-        </p:txBody>
-      </p:sp>
-      <p:sp>
-        <p:nvSpPr>
-          <p:cNvPr id="13" name="Shape 11"/>
-          <p:cNvSpPr/>
-          <p:nvPr/>
-        </p:nvSpPr>
-        <p:spPr>
-          <a:xfrm>
-            <a:off x="7178040" y="1417320"/>
-            <a:ext cx="1965960" cy="960120"/>
+          </a:p>
+          <a:p>
+            <a:pPr algn="ctr">
+              <a:defRPr sz="950">
+                <a:solidFill>
+                  <a:srgbClr val="4E6080"/>
+                </a:solidFill>
+                <a:latin typeface="Aptos"/>
+              </a:defRPr>
+            </a:pPr>
+            <a:r>
+              <a:t>Écart de volume</a:t>
+            </a:r>
+          </a:p>
+        </p:txBody>
+      </p:sp>
+      <p:sp>
+        <p:nvSpPr>
+          <p:cNvPr id="10" name="Rounded Rectangle 9"/>
+          <p:cNvSpPr/>
+          <p:nvPr/>
+        </p:nvSpPr>
+        <p:spPr>
+          <a:xfrm>
+            <a:off x="7397496" y="1600200"/>
+            <a:ext cx="1938528" cy="960120"/>
           </a:xfrm>
           <a:prstGeom prst="roundRect">
-            <a:avLst>
-              <a:gd name="adj" fmla="val 7619"/>
-            </a:avLst>
+            <a:avLst/>
           </a:prstGeom>
           <a:solidFill>
             <a:srgbClr val="FFFFFF"/>
           </a:solidFill>
           <a:ln w="12700">
             <a:solidFill>
-              <a:srgbClr val="DCE5EF"/>
+              <a:srgbClr val="E3E9F4"/>
             </a:solidFill>
-            <a:prstDash val="solid"/>
-          </a:ln>
-        </p:spPr>
-      </p:sp>
-      <p:sp>
-        <p:nvSpPr>
-          <p:cNvPr id="14" name="Text 12"/>
-          <p:cNvSpPr/>
-          <p:nvPr/>
-        </p:nvSpPr>
-        <p:spPr>
-          <a:xfrm>
-            <a:off x="7315200" y="1545336"/>
-            <a:ext cx="1691640" cy="329184"/>
-          </a:xfrm>
-          <a:prstGeom prst="rect">
-            <a:avLst/>
-          </a:prstGeom>
-          <a:noFill/>
-          <a:ln/>
-        </p:spPr>
-        <p:txBody>
-          <a:bodyPr wrap="square" lIns="0" tIns="0" rIns="0" bIns="0" rtlCol="0" anchor="ctr"/>
-          <a:lstStyle/>
-          <a:p>
-            <a:pPr marL="0" indent="0" algn="ctr">
-              <a:buNone/>
-            </a:pPr>
-            <a:r>
-              <a:rPr lang="en-US" sz="2200" b="1" dirty="0">
-                <a:solidFill>
-                  <a:srgbClr val="7557D5"/>
-                </a:solidFill>
-              </a:rPr>
+          </a:ln>
+        </p:spPr>
+        <p:style>
+          <a:lnRef idx="1">
+            <a:schemeClr val="accent1"/>
+          </a:lnRef>
+          <a:fillRef idx="3">
+            <a:schemeClr val="accent1"/>
+          </a:fillRef>
+          <a:effectRef idx="2">
+            <a:schemeClr val="accent1"/>
+          </a:effectRef>
+          <a:fontRef idx="minor">
+            <a:schemeClr val="lt1"/>
+          </a:fontRef>
+        </p:style>
+        <p:txBody>
+          <a:bodyPr lIns="109728" tIns="82296" rIns="109728" bIns="54864" rtlCol="0" anchor="ctr"/>
+          <a:lstStyle/>
+          <a:p>
+            <a:pPr algn="ctr">
+              <a:defRPr sz="2000" b="1">
+                <a:solidFill>
+                  <a:srgbClr val="102F56"/>
+                </a:solidFill>
+                <a:latin typeface="Aptos"/>
+              </a:defRPr>
+            </a:pPr>
+            <a:r>
               <a:t>161</a:t>
             </a:r>
-            <a:endParaRPr lang="en-US" sz="2200" dirty="0"/>
-          </a:p>
-        </p:txBody>
-      </p:sp>
-      <p:sp>
-        <p:nvSpPr>
-          <p:cNvPr id="15" name="Text 13"/>
-          <p:cNvSpPr/>
-          <p:nvPr/>
-        </p:nvSpPr>
-        <p:spPr>
-          <a:xfrm>
-            <a:off x="7287768" y="1956816"/>
-            <a:ext cx="1746504" cy="228600"/>
-          </a:xfrm>
-          <a:prstGeom prst="rect">
-            <a:avLst/>
-          </a:prstGeom>
-          <a:noFill/>
-          <a:ln/>
-        </p:spPr>
-        <p:txBody>
-          <a:bodyPr wrap="square" lIns="0" tIns="0" rIns="0" bIns="0" rtlCol="0" anchor="ctr"/>
-          <a:lstStyle/>
-          <a:p>
-            <a:pPr marL="0" indent="0" algn="ctr">
-              <a:buNone/>
-            </a:pPr>
-            <a:r>
-              <a:rPr lang="en-US" sz="980" dirty="0">
-                <a:solidFill>
-                  <a:srgbClr val="66788A"/>
-                </a:solidFill>
-              </a:rPr>
+          </a:p>
+          <a:p>
+            <a:pPr algn="ctr">
+              <a:defRPr sz="950">
+                <a:solidFill>
+                  <a:srgbClr val="4E6080"/>
+                </a:solidFill>
+                <a:latin typeface="Aptos"/>
+              </a:defRPr>
+            </a:pPr>
+            <a:r>
               <a:t>employee_benefits</a:t>
             </a:r>
-            <a:endParaRPr lang="en-US" sz="980" dirty="0"/>
-          </a:p>
-        </p:txBody>
-      </p:sp>
-      <p:sp>
-        <p:nvSpPr>
-          <p:cNvPr id="16" name="Shape 14"/>
-          <p:cNvSpPr/>
-          <p:nvPr/>
-        </p:nvSpPr>
-        <p:spPr>
-          <a:xfrm>
-            <a:off x="9326880" y="1417320"/>
-            <a:ext cx="1965960" cy="960120"/>
+          </a:p>
+        </p:txBody>
+      </p:sp>
+      <p:sp>
+        <p:nvSpPr>
+          <p:cNvPr id="11" name="Rounded Rectangle 10"/>
+          <p:cNvSpPr/>
+          <p:nvPr/>
+        </p:nvSpPr>
+        <p:spPr>
+          <a:xfrm>
+            <a:off x="9665208" y="1600200"/>
+            <a:ext cx="1938528" cy="960120"/>
           </a:xfrm>
           <a:prstGeom prst="roundRect">
-            <a:avLst>
-              <a:gd name="adj" fmla="val 7619"/>
-            </a:avLst>
+            <a:avLst/>
           </a:prstGeom>
           <a:solidFill>
             <a:srgbClr val="FFFFFF"/>
           </a:solidFill>
           <a:ln w="12700">
             <a:solidFill>
-              <a:srgbClr val="DCE5EF"/>
+              <a:srgbClr val="E3E9F4"/>
             </a:solidFill>
-            <a:prstDash val="solid"/>
-          </a:ln>
-        </p:spPr>
-      </p:sp>
-      <p:sp>
-        <p:nvSpPr>
-          <p:cNvPr id="17" name="Text 15"/>
-          <p:cNvSpPr/>
-          <p:nvPr/>
-        </p:nvSpPr>
-        <p:spPr>
-          <a:xfrm>
-            <a:off x="9464040" y="1545336"/>
-            <a:ext cx="1691640" cy="329184"/>
-          </a:xfrm>
-          <a:prstGeom prst="rect">
-            <a:avLst/>
-          </a:prstGeom>
-          <a:noFill/>
-          <a:ln/>
-        </p:spPr>
-        <p:txBody>
-          <a:bodyPr wrap="square" lIns="0" tIns="0" rIns="0" bIns="0" rtlCol="0" anchor="ctr"/>
-          <a:lstStyle/>
-          <a:p>
-            <a:pPr marL="0" indent="0" algn="ctr">
-              <a:buNone/>
-            </a:pPr>
-            <a:r>
-              <a:rPr lang="en-US" sz="2200" b="1" dirty="0">
-                <a:solidFill>
-                  <a:srgbClr val="2BAE66"/>
-                </a:solidFill>
-              </a:rPr>
+          </a:ln>
+        </p:spPr>
+        <p:style>
+          <a:lnRef idx="1">
+            <a:schemeClr val="accent1"/>
+          </a:lnRef>
+          <a:fillRef idx="3">
+            <a:schemeClr val="accent1"/>
+          </a:fillRef>
+          <a:effectRef idx="2">
+            <a:schemeClr val="accent1"/>
+          </a:effectRef>
+          <a:fontRef idx="minor">
+            <a:schemeClr val="lt1"/>
+          </a:fontRef>
+        </p:style>
+        <p:txBody>
+          <a:bodyPr lIns="109728" tIns="82296" rIns="109728" bIns="54864" rtlCol="0" anchor="ctr"/>
+          <a:lstStyle/>
+          <a:p>
+            <a:pPr algn="ctr">
+              <a:defRPr sz="2000" b="1">
+                <a:solidFill>
+                  <a:srgbClr val="102F56"/>
+                </a:solidFill>
+                <a:latin typeface="Aptos"/>
+              </a:defRPr>
+            </a:pPr>
+            <a:r>
               <a:t>OK</a:t>
             </a:r>
-            <a:endParaRPr lang="en-US" sz="2200" dirty="0"/>
-          </a:p>
-        </p:txBody>
-      </p:sp>
-      <p:sp>
-        <p:nvSpPr>
-          <p:cNvPr id="18" name="Text 16"/>
-          <p:cNvSpPr/>
-          <p:nvPr/>
-        </p:nvSpPr>
-        <p:spPr>
-          <a:xfrm>
-            <a:off x="9436608" y="1956816"/>
-            <a:ext cx="1746504" cy="228600"/>
-          </a:xfrm>
-          <a:prstGeom prst="rect">
-            <a:avLst/>
-          </a:prstGeom>
-          <a:noFill/>
-          <a:ln/>
-        </p:spPr>
-        <p:txBody>
-          <a:bodyPr wrap="square" lIns="0" tIns="0" rIns="0" bIns="0" rtlCol="0" anchor="ctr"/>
-          <a:lstStyle/>
-          <a:p>
-            <a:pPr marL="0" indent="0" algn="ctr">
-              <a:buNone/>
-            </a:pPr>
-            <a:r>
-              <a:rPr lang="en-US" sz="980" dirty="0">
-                <a:solidFill>
-                  <a:srgbClr val="66788A"/>
-                </a:solidFill>
-              </a:rPr>
-              <a:t>état global</a:t>
-            </a:r>
-            <a:endParaRPr lang="en-US" sz="980" dirty="0"/>
-          </a:p>
-        </p:txBody>
-      </p:sp>
-      <p:sp>
-        <p:nvSpPr>
-          <p:cNvPr id="19" name="Text 17"/>
-          <p:cNvSpPr/>
-          <p:nvPr/>
-        </p:nvSpPr>
-        <p:spPr>
-          <a:xfrm>
-            <a:off x="731520" y="2880360"/>
-            <a:ext cx="2743200" cy="320040"/>
-          </a:xfrm>
-          <a:prstGeom prst="rect">
-            <a:avLst/>
-          </a:prstGeom>
-          <a:noFill/>
-          <a:ln/>
-        </p:spPr>
-        <p:txBody>
-          <a:bodyPr wrap="square" lIns="0" tIns="0" rIns="0" bIns="0" rtlCol="0" anchor="ctr"/>
-          <a:lstStyle/>
-          <a:p>
-            <a:pPr marL="0" indent="0">
-              <a:buNone/>
-            </a:pPr>
-            <a:r>
-              <a:rPr lang="en-US" sz="1700" b="1" dirty="0">
-                <a:solidFill>
-                  <a:srgbClr val="17324D"/>
-                </a:solidFill>
-              </a:rPr>
-              <a:t>7 contrôles historisés</a:t>
-            </a:r>
-            <a:endParaRPr lang="en-US" sz="1700" dirty="0"/>
-          </a:p>
-        </p:txBody>
-      </p:sp>
-      <p:sp>
-        <p:nvSpPr>
-          <p:cNvPr id="20" name="Shape 18"/>
-          <p:cNvSpPr/>
-          <p:nvPr/>
-        </p:nvSpPr>
-        <p:spPr>
-          <a:xfrm>
-            <a:off x="868680" y="3429000"/>
-            <a:ext cx="201168" cy="201168"/>
-          </a:xfrm>
-          <a:prstGeom prst="ellipse">
+          </a:p>
+          <a:p>
+            <a:pPr algn="ctr">
+              <a:defRPr sz="950">
+                <a:solidFill>
+                  <a:srgbClr val="4E6080"/>
+                </a:solidFill>
+                <a:latin typeface="Aptos"/>
+              </a:defRPr>
+            </a:pPr>
+            <a:r>
+              <a:t>État global</a:t>
+            </a:r>
+          </a:p>
+        </p:txBody>
+      </p:sp>
+      <p:sp>
+        <p:nvSpPr>
+          <p:cNvPr id="12" name="Rounded Rectangle 11"/>
+          <p:cNvSpPr/>
+          <p:nvPr/>
+        </p:nvSpPr>
+        <p:spPr>
+          <a:xfrm>
+            <a:off x="777240" y="2880360"/>
+            <a:ext cx="3291840" cy="2514600"/>
+          </a:xfrm>
+          <a:prstGeom prst="roundRect">
             <a:avLst/>
           </a:prstGeom>
           <a:solidFill>
-            <a:srgbClr val="2BAE66"/>
+            <a:srgbClr val="F5F8FD"/>
           </a:solidFill>
           <a:ln w="12700">
             <a:solidFill>
-              <a:srgbClr val="2BAE66"/>
+              <a:srgbClr val="E3E9F4"/>
             </a:solidFill>
-            <a:prstDash val="solid"/>
-          </a:ln>
-        </p:spPr>
-      </p:sp>
-      <p:sp>
-        <p:nvSpPr>
-          <p:cNvPr id="21" name="Text 19"/>
-          <p:cNvSpPr/>
-          <p:nvPr/>
-        </p:nvSpPr>
-        <p:spPr>
-          <a:xfrm>
-            <a:off x="1216152" y="3410712"/>
-            <a:ext cx="4480560" cy="228600"/>
-          </a:xfrm>
-          <a:prstGeom prst="rect">
-            <a:avLst/>
-          </a:prstGeom>
-          <a:noFill/>
-          <a:ln/>
-        </p:spPr>
-        <p:txBody>
-          <a:bodyPr wrap="square" lIns="0" tIns="0" rIns="0" bIns="0" rtlCol="0" anchor="ctr"/>
-          <a:lstStyle/>
-          <a:p>
-            <a:pPr marL="0" indent="0">
-              <a:buNone/>
-            </a:pPr>
-            <a:r>
-              <a:rPr lang="en-US" sz="1150" dirty="0">
-                <a:solidFill>
-                  <a:srgbClr val="243447"/>
-                </a:solidFill>
-              </a:rPr>
-              <a:t>0  Doublons activity_id</a:t>
-            </a:r>
-            <a:endParaRPr lang="en-US" sz="1150" dirty="0"/>
-          </a:p>
-        </p:txBody>
-      </p:sp>
-      <p:sp>
-        <p:nvSpPr>
-          <p:cNvPr id="22" name="Shape 20"/>
-          <p:cNvSpPr/>
-          <p:nvPr/>
-        </p:nvSpPr>
-        <p:spPr>
-          <a:xfrm>
-            <a:off x="868680" y="3931920"/>
-            <a:ext cx="201168" cy="201168"/>
-          </a:xfrm>
-          <a:prstGeom prst="ellipse">
+          </a:ln>
+        </p:spPr>
+        <p:style>
+          <a:lnRef idx="1">
+            <a:schemeClr val="accent1"/>
+          </a:lnRef>
+          <a:fillRef idx="3">
+            <a:schemeClr val="accent1"/>
+          </a:fillRef>
+          <a:effectRef idx="2">
+            <a:schemeClr val="accent1"/>
+          </a:effectRef>
+          <a:fontRef idx="minor">
+            <a:schemeClr val="lt1"/>
+          </a:fontRef>
+        </p:style>
+        <p:txBody>
+          <a:bodyPr lIns="109728" tIns="82296" rIns="109728" bIns="54864" rtlCol="0" anchor="ctr"/>
+          <a:lstStyle/>
+          <a:p>
+            <a:pPr algn="ctr">
+              <a:defRPr sz="1300" b="1">
+                <a:solidFill>
+                  <a:srgbClr val="102F56"/>
+                </a:solidFill>
+                <a:latin typeface="Aptos"/>
+              </a:defRPr>
+            </a:pPr>
+            <a:r>
+              <a:t>CONTRÔLES QUALITÉ</a:t>
+            </a:r>
+          </a:p>
+          <a:p>
+            <a:pPr algn="ctr">
+              <a:defRPr sz="1100">
+                <a:solidFill>
+                  <a:srgbClr val="4E6080"/>
+                </a:solidFill>
+                <a:latin typeface="Aptos"/>
+              </a:defRPr>
+            </a:pPr>
+            <a:r>
+              <a:t>✓ Doublons</a:t>
+            </a:r>
+            <a:br/>
+            <a:r>
+              <a:t>✓ Valeurs NULL</a:t>
+            </a:r>
+            <a:br/>
+            <a:r>
+              <a:t>✓ Dates incohérentes</a:t>
+            </a:r>
+            <a:br/>
+            <a:r>
+              <a:t>✓ Distances négatives</a:t>
+            </a:r>
+            <a:br/>
+            <a:r>
+              <a:t>✓ Cohérence employee_benefits</a:t>
+            </a:r>
+          </a:p>
+        </p:txBody>
+      </p:sp>
+      <p:sp>
+        <p:nvSpPr>
+          <p:cNvPr id="13" name="Rounded Rectangle 12"/>
+          <p:cNvSpPr/>
+          <p:nvPr/>
+        </p:nvSpPr>
+        <p:spPr>
+          <a:xfrm>
+            <a:off x="4434840" y="2880360"/>
+            <a:ext cx="3291840" cy="2514600"/>
+          </a:xfrm>
+          <a:prstGeom prst="roundRect">
             <a:avLst/>
           </a:prstGeom>
           <a:solidFill>
-            <a:srgbClr val="2BAE66"/>
+            <a:srgbClr val="F5F8FD"/>
           </a:solidFill>
           <a:ln w="12700">
             <a:solidFill>
-              <a:srgbClr val="2BAE66"/>
+              <a:srgbClr val="E3E9F4"/>
             </a:solidFill>
-            <a:prstDash val="solid"/>
-          </a:ln>
-        </p:spPr>
-      </p:sp>
-      <p:sp>
-        <p:nvSpPr>
-          <p:cNvPr id="23" name="Text 21"/>
-          <p:cNvSpPr/>
-          <p:nvPr/>
-        </p:nvSpPr>
-        <p:spPr>
-          <a:xfrm>
-            <a:off x="1216152" y="3913632"/>
-            <a:ext cx="4480560" cy="228600"/>
-          </a:xfrm>
-          <a:prstGeom prst="rect">
-            <a:avLst/>
-          </a:prstGeom>
-          <a:noFill/>
-          <a:ln/>
-        </p:spPr>
-        <p:txBody>
-          <a:bodyPr wrap="square" lIns="0" tIns="0" rIns="0" bIns="0" rtlCol="0" anchor="ctr"/>
-          <a:lstStyle/>
-          <a:p>
-            <a:pPr marL="0" indent="0">
-              <a:buNone/>
-            </a:pPr>
-            <a:r>
-              <a:rPr lang="en-US" sz="1150" dirty="0">
-                <a:solidFill>
-                  <a:srgbClr val="243447"/>
-                </a:solidFill>
-              </a:rPr>
-              <a:t>0  activity_id NULL</a:t>
-            </a:r>
-            <a:endParaRPr lang="en-US" sz="1150" dirty="0"/>
-          </a:p>
-        </p:txBody>
-      </p:sp>
-      <p:sp>
-        <p:nvSpPr>
-          <p:cNvPr id="24" name="Shape 22"/>
-          <p:cNvSpPr/>
-          <p:nvPr/>
-        </p:nvSpPr>
-        <p:spPr>
-          <a:xfrm>
-            <a:off x="868680" y="4434840"/>
-            <a:ext cx="201168" cy="201168"/>
-          </a:xfrm>
-          <a:prstGeom prst="ellipse">
+          </a:ln>
+        </p:spPr>
+        <p:style>
+          <a:lnRef idx="1">
+            <a:schemeClr val="accent1"/>
+          </a:lnRef>
+          <a:fillRef idx="3">
+            <a:schemeClr val="accent1"/>
+          </a:fillRef>
+          <a:effectRef idx="2">
+            <a:schemeClr val="accent1"/>
+          </a:effectRef>
+          <a:fontRef idx="minor">
+            <a:schemeClr val="lt1"/>
+          </a:fontRef>
+        </p:style>
+        <p:txBody>
+          <a:bodyPr lIns="109728" tIns="82296" rIns="109728" bIns="54864" rtlCol="0" anchor="ctr"/>
+          <a:lstStyle/>
+          <a:p>
+            <a:pPr algn="ctr">
+              <a:defRPr sz="1300" b="1">
+                <a:solidFill>
+                  <a:srgbClr val="102F56"/>
+                </a:solidFill>
+                <a:latin typeface="Aptos"/>
+              </a:defRPr>
+            </a:pPr>
+            <a:r>
+              <a:t>RÉSILIENCE</a:t>
+            </a:r>
+          </a:p>
+          <a:p>
+            <a:pPr algn="ctr">
+              <a:defRPr sz="1100">
+                <a:solidFill>
+                  <a:srgbClr val="4E6080"/>
+                </a:solidFill>
+                <a:latin typeface="Aptos"/>
+              </a:defRPr>
+            </a:pPr>
+            <a:r>
+              <a:t>✓ Checkpoints persistants</a:t>
+            </a:r>
+            <a:br/>
+            <a:r>
+              <a:t>✓ Retry automatique</a:t>
+            </a:r>
+            <a:br/>
+            <a:r>
+              <a:t>✓ Pas d’avancement en cas d’échec</a:t>
+            </a:r>
+            <a:br/>
+            <a:r>
+              <a:t>✓ Reprise après rétablissement</a:t>
+            </a:r>
+            <a:br/>
+            <a:r>
+              <a:t>✓ Restart policies Docker</a:t>
+            </a:r>
+          </a:p>
+        </p:txBody>
+      </p:sp>
+      <p:sp>
+        <p:nvSpPr>
+          <p:cNvPr id="14" name="Rounded Rectangle 13"/>
+          <p:cNvSpPr/>
+          <p:nvPr/>
+        </p:nvSpPr>
+        <p:spPr>
+          <a:xfrm>
+            <a:off x="8092440" y="2880360"/>
+            <a:ext cx="3291840" cy="2514600"/>
+          </a:xfrm>
+          <a:prstGeom prst="roundRect">
             <a:avLst/>
           </a:prstGeom>
           <a:solidFill>
-            <a:srgbClr val="2BAE66"/>
+            <a:srgbClr val="E2EBFC"/>
           </a:solidFill>
           <a:ln w="12700">
             <a:solidFill>
-              <a:srgbClr val="2BAE66"/>
+              <a:srgbClr val="E3E9F4"/>
             </a:solidFill>
-            <a:prstDash val="solid"/>
-          </a:ln>
-        </p:spPr>
-      </p:sp>
-      <p:sp>
-        <p:nvSpPr>
-          <p:cNvPr id="25" name="Text 23"/>
-          <p:cNvSpPr/>
-          <p:nvPr/>
-        </p:nvSpPr>
-        <p:spPr>
-          <a:xfrm>
-            <a:off x="1216152" y="4416552"/>
-            <a:ext cx="4480560" cy="228600"/>
-          </a:xfrm>
-          <a:prstGeom prst="rect">
-            <a:avLst/>
-          </a:prstGeom>
-          <a:noFill/>
-          <a:ln/>
-        </p:spPr>
-        <p:txBody>
-          <a:bodyPr wrap="square" lIns="0" tIns="0" rIns="0" bIns="0" rtlCol="0" anchor="ctr"/>
-          <a:lstStyle/>
-          <a:p>
-            <a:pPr marL="0" indent="0">
-              <a:buNone/>
-            </a:pPr>
-            <a:r>
-              <a:rPr lang="en-US" sz="1150" dirty="0">
-                <a:solidFill>
-                  <a:srgbClr val="243447"/>
-                </a:solidFill>
-              </a:rPr>
-              <a:t>0  employee_id NULL</a:t>
-            </a:r>
-            <a:endParaRPr lang="en-US" sz="1150" dirty="0"/>
-          </a:p>
-        </p:txBody>
-      </p:sp>
-      <p:sp>
-        <p:nvSpPr>
-          <p:cNvPr id="26" name="Shape 24"/>
-          <p:cNvSpPr/>
-          <p:nvPr/>
-        </p:nvSpPr>
-        <p:spPr>
-          <a:xfrm>
-            <a:off x="868680" y="4937760"/>
-            <a:ext cx="201168" cy="201168"/>
-          </a:xfrm>
-          <a:prstGeom prst="ellipse">
+          </a:ln>
+        </p:spPr>
+        <p:style>
+          <a:lnRef idx="1">
+            <a:schemeClr val="accent1"/>
+          </a:lnRef>
+          <a:fillRef idx="3">
+            <a:schemeClr val="accent1"/>
+          </a:fillRef>
+          <a:effectRef idx="2">
+            <a:schemeClr val="accent1"/>
+          </a:effectRef>
+          <a:fontRef idx="minor">
+            <a:schemeClr val="lt1"/>
+          </a:fontRef>
+        </p:style>
+        <p:txBody>
+          <a:bodyPr lIns="109728" tIns="82296" rIns="109728" bIns="54864" rtlCol="0" anchor="ctr"/>
+          <a:lstStyle/>
+          <a:p>
+            <a:pPr algn="ctr">
+              <a:defRPr sz="1300" b="1">
+                <a:solidFill>
+                  <a:srgbClr val="102F56"/>
+                </a:solidFill>
+                <a:latin typeface="Aptos"/>
+              </a:defRPr>
+            </a:pPr>
+            <a:r>
+              <a:t>PRINCIPE</a:t>
+            </a:r>
+          </a:p>
+          <a:p>
+            <a:pPr algn="ctr">
+              <a:defRPr sz="1100">
+                <a:solidFill>
+                  <a:srgbClr val="4E6080"/>
+                </a:solidFill>
+                <a:latin typeface="Aptos"/>
+              </a:defRPr>
+            </a:pPr>
+            <a:r>
+              <a:t>Une version Delta n’est validée qu’après succès du calcul métier et de l’export.</a:t>
+            </a:r>
+            <a:br/>
+            <a:r>
+              <a:t/>
+            </a:r>
+            <a:br/>
+            <a:r>
+              <a:t>En cas d’échec, elle reste à retraiter automatiquement.</a:t>
+            </a:r>
+          </a:p>
+        </p:txBody>
+      </p:sp>
+      <p:sp>
+        <p:nvSpPr>
+          <p:cNvPr id="15" name="Rounded Rectangle 14"/>
+          <p:cNvSpPr/>
+          <p:nvPr/>
+        </p:nvSpPr>
+        <p:spPr>
+          <a:xfrm>
+            <a:off x="777240" y="5989320"/>
+            <a:ext cx="10652760" cy="438912"/>
+          </a:xfrm>
+          <a:prstGeom prst="roundRect">
             <a:avLst/>
           </a:prstGeom>
           <a:solidFill>
-            <a:srgbClr val="2BAE66"/>
+            <a:srgbClr val="E2EBFC"/>
           </a:solidFill>
-          <a:ln w="12700">
-            <a:solidFill>
-              <a:srgbClr val="2BAE66"/>
-            </a:solidFill>
-            <a:prstDash val="solid"/>
-          </a:ln>
-        </p:spPr>
-      </p:sp>
-      <p:sp>
-        <p:nvSpPr>
-          <p:cNvPr id="27" name="Text 25"/>
-          <p:cNvSpPr/>
-          <p:nvPr/>
-        </p:nvSpPr>
-        <p:spPr>
-          <a:xfrm>
-            <a:off x="1216152" y="4919472"/>
-            <a:ext cx="4480560" cy="228600"/>
-          </a:xfrm>
-          <a:prstGeom prst="rect">
-            <a:avLst/>
-          </a:prstGeom>
-          <a:noFill/>
-          <a:ln/>
-        </p:spPr>
-        <p:txBody>
-          <a:bodyPr wrap="square" lIns="0" tIns="0" rIns="0" bIns="0" rtlCol="0" anchor="ctr"/>
-          <a:lstStyle/>
-          <a:p>
-            <a:pPr marL="0" indent="0">
-              <a:buNone/>
-            </a:pPr>
-            <a:r>
-              <a:rPr lang="en-US" sz="1150" dirty="0">
-                <a:solidFill>
-                  <a:srgbClr val="243447"/>
-                </a:solidFill>
-              </a:rPr>
-              <a:t>0  Dates incohérentes</a:t>
-            </a:r>
-            <a:endParaRPr lang="en-US" sz="1150" dirty="0"/>
-          </a:p>
-        </p:txBody>
-      </p:sp>
-      <p:sp>
-        <p:nvSpPr>
-          <p:cNvPr id="28" name="Shape 26"/>
-          <p:cNvSpPr/>
-          <p:nvPr/>
-        </p:nvSpPr>
-        <p:spPr>
-          <a:xfrm>
-            <a:off x="6263640" y="3429000"/>
-            <a:ext cx="201168" cy="201168"/>
-          </a:xfrm>
-          <a:prstGeom prst="ellipse">
-            <a:avLst/>
-          </a:prstGeom>
-          <a:solidFill>
-            <a:srgbClr val="2BAE66"/>
-          </a:solidFill>
-          <a:ln w="12700">
-            <a:solidFill>
-              <a:srgbClr val="2BAE66"/>
-            </a:solidFill>
-            <a:prstDash val="solid"/>
-          </a:ln>
-        </p:spPr>
-      </p:sp>
-      <p:sp>
-        <p:nvSpPr>
-          <p:cNvPr id="29" name="Text 27"/>
-          <p:cNvSpPr/>
-          <p:nvPr/>
-        </p:nvSpPr>
-        <p:spPr>
-          <a:xfrm>
-            <a:off x="6611112" y="3410712"/>
-            <a:ext cx="4480560" cy="228600"/>
-          </a:xfrm>
-          <a:prstGeom prst="rect">
-            <a:avLst/>
-          </a:prstGeom>
-          <a:noFill/>
-          <a:ln/>
-        </p:spPr>
-        <p:txBody>
-          <a:bodyPr wrap="square" lIns="0" tIns="0" rIns="0" bIns="0" rtlCol="0" anchor="ctr"/>
-          <a:lstStyle/>
-          <a:p>
-            <a:pPr marL="0" indent="0">
-              <a:buNone/>
-            </a:pPr>
-            <a:r>
-              <a:rPr lang="en-US" sz="1150" dirty="0">
-                <a:solidFill>
-                  <a:srgbClr val="243447"/>
-                </a:solidFill>
-              </a:rPr>
-              <a:t>0  Distances négatives</a:t>
-            </a:r>
-            <a:endParaRPr lang="en-US" sz="1150" dirty="0"/>
-          </a:p>
-        </p:txBody>
-      </p:sp>
-      <p:sp>
-        <p:nvSpPr>
-          <p:cNvPr id="30" name="Shape 28"/>
-          <p:cNvSpPr/>
-          <p:nvPr/>
-        </p:nvSpPr>
-        <p:spPr>
-          <a:xfrm>
-            <a:off x="6263640" y="3931920"/>
-            <a:ext cx="201168" cy="201168"/>
-          </a:xfrm>
-          <a:prstGeom prst="ellipse">
-            <a:avLst/>
-          </a:prstGeom>
-          <a:solidFill>
-            <a:srgbClr val="2BAE66"/>
-          </a:solidFill>
-          <a:ln w="12700">
-            <a:solidFill>
-              <a:srgbClr val="2BAE66"/>
-            </a:solidFill>
-            <a:prstDash val="solid"/>
-          </a:ln>
-        </p:spPr>
-      </p:sp>
-      <p:sp>
-        <p:nvSpPr>
-          <p:cNvPr id="31" name="Text 29"/>
-          <p:cNvSpPr/>
-          <p:nvPr/>
-        </p:nvSpPr>
-        <p:spPr>
-          <a:xfrm>
-            <a:off x="6611112" y="3913632"/>
-            <a:ext cx="4480560" cy="228600"/>
-          </a:xfrm>
-          <a:prstGeom prst="rect">
-            <a:avLst/>
-          </a:prstGeom>
-          <a:noFill/>
-          <a:ln/>
-        </p:spPr>
-        <p:txBody>
-          <a:bodyPr wrap="square" lIns="0" tIns="0" rIns="0" bIns="0" rtlCol="0" anchor="ctr"/>
-          <a:lstStyle/>
-          <a:p>
-            <a:pPr marL="0" indent="0">
-              <a:buNone/>
-            </a:pPr>
-            <a:r>
-              <a:rPr lang="en-US" sz="1150" dirty="0">
-                <a:solidFill>
-                  <a:srgbClr val="243447"/>
-                </a:solidFill>
-              </a:rPr>
-              <a:t>0  Doublons benefits</a:t>
-            </a:r>
-            <a:endParaRPr lang="en-US" sz="1150" dirty="0"/>
-          </a:p>
-        </p:txBody>
-      </p:sp>
-      <p:sp>
-        <p:nvSpPr>
-          <p:cNvPr id="32" name="Shape 30"/>
-          <p:cNvSpPr/>
-          <p:nvPr/>
-        </p:nvSpPr>
-        <p:spPr>
-          <a:xfrm>
-            <a:off x="6263640" y="4434840"/>
-            <a:ext cx="201168" cy="201168"/>
-          </a:xfrm>
-          <a:prstGeom prst="ellipse">
-            <a:avLst/>
-          </a:prstGeom>
-          <a:solidFill>
-            <a:srgbClr val="2BAE66"/>
-          </a:solidFill>
-          <a:ln w="12700">
-            <a:solidFill>
-              <a:srgbClr val="2BAE66"/>
-            </a:solidFill>
-            <a:prstDash val="solid"/>
-          </a:ln>
-        </p:spPr>
-      </p:sp>
-      <p:sp>
-        <p:nvSpPr>
-          <p:cNvPr id="33" name="Text 31"/>
-          <p:cNvSpPr/>
-          <p:nvPr/>
-        </p:nvSpPr>
-        <p:spPr>
-          <a:xfrm>
-            <a:off x="6611112" y="4416552"/>
-            <a:ext cx="4480560" cy="228600"/>
-          </a:xfrm>
-          <a:prstGeom prst="rect">
-            <a:avLst/>
-          </a:prstGeom>
-          <a:noFill/>
-          <a:ln/>
-        </p:spPr>
-        <p:txBody>
-          <a:bodyPr wrap="square" lIns="0" tIns="0" rIns="0" bIns="0" rtlCol="0" anchor="ctr"/>
-          <a:lstStyle/>
-          <a:p>
-            <a:pPr marL="0" indent="0">
-              <a:buNone/>
-            </a:pPr>
-            <a:r>
-              <a:rPr lang="en-US" sz="1150" dirty="0">
-                <a:solidFill>
-                  <a:srgbClr val="243447"/>
-                </a:solidFill>
-              </a:rPr>
-              <a:t>0  employee_id NULL benefits</a:t>
-            </a:r>
-            <a:endParaRPr lang="en-US" sz="1150" dirty="0"/>
-          </a:p>
-        </p:txBody>
-      </p:sp>
-      <p:sp>
-        <p:nvSpPr>
-          <p:cNvPr id="34" name="Shape 32"/>
-          <p:cNvSpPr/>
-          <p:nvPr/>
-        </p:nvSpPr>
-        <p:spPr>
-          <a:xfrm>
-            <a:off x="7406640" y="4983480"/>
-            <a:ext cx="3749040" cy="594360"/>
-          </a:xfrm>
-          <a:prstGeom prst="roundRect">
-            <a:avLst>
-              <a:gd name="adj" fmla="val 12308"/>
-            </a:avLst>
-          </a:prstGeom>
-          <a:solidFill>
-            <a:srgbClr val="EEF0FF"/>
-          </a:solidFill>
-          <a:ln w="12700">
-            <a:solidFill>
-              <a:srgbClr val="D5D9FF"/>
-            </a:solidFill>
-            <a:prstDash val="solid"/>
-          </a:ln>
-        </p:spPr>
-      </p:sp>
-      <p:sp>
-        <p:nvSpPr>
-          <p:cNvPr id="35" name="Text 33"/>
-          <p:cNvSpPr/>
-          <p:nvPr/>
-        </p:nvSpPr>
-        <p:spPr>
-          <a:xfrm>
-            <a:off x="7589520" y="5184648"/>
-            <a:ext cx="3383280" cy="182880"/>
-          </a:xfrm>
-          <a:prstGeom prst="rect">
-            <a:avLst/>
-          </a:prstGeom>
-          <a:noFill/>
-          <a:ln/>
-        </p:spPr>
-        <p:txBody>
-          <a:bodyPr wrap="square" lIns="0" tIns="0" rIns="0" bIns="0" rtlCol="0" anchor="ctr"/>
-          <a:lstStyle/>
-          <a:p>
-            <a:pPr marL="0" indent="0" algn="ctr">
-              <a:buNone/>
-            </a:pPr>
-            <a:r>
-              <a:rPr lang="en-US" sz="1050" b="1" dirty="0">
-                <a:solidFill>
-                  <a:srgbClr val="7557D5"/>
-                </a:solidFill>
-              </a:rPr>
-              <a:t>Historique → monitoring.data_quality_metrics</a:t>
-            </a:r>
-            <a:endParaRPr lang="en-US" sz="1050" dirty="0"/>
-          </a:p>
-        </p:txBody>
-      </p:sp>
-      <p:sp>
-        <p:nvSpPr>
-          <p:cNvPr id="36" name="Slide Number Placeholder 0"/>
-          <p:cNvSpPr>
-            <a:spLocks noGrp="1"/>
-          </p:cNvSpPr>
-          <p:nvPr>
-            <p:ph type="sldNum" sz="quarter" idx="4294967295"/>
-          </p:nvPr>
-        </p:nvSpPr>
-        <p:spPr>
-          <a:xfrm>
-            <a:off x="11631168" y="6473952"/>
-            <a:ext cx="800000" cy="300000"/>
-          </a:xfrm>
-          <a:prstGeom prst="rect">
-            <a:avLst/>
-          </a:prstGeom>
-          <a:extLst>
-            <a:ext uri="{C572A759-6A51-4108-AA02-DFA0A04FC94B}">
-              <ma14:wrappingTextBoxFlag xmlns:ma14="http://schemas.microsoft.com/office/mac/drawingml/2011/main" xmlns="" val="0"/>
-            </a:ext>
-          </a:extLst>
-        </p:spPr>
-        <p:txBody>
-          <a:bodyPr/>
-          <a:lstStyle>
-            <a:lvl1pPr>
-              <a:defRPr sz="800">
-                <a:solidFill>
-                  <a:srgbClr val="718096"/>
-                </a:solidFill>
+          <a:ln>
+            <a:noFill/>
+          </a:ln>
+        </p:spPr>
+        <p:style>
+          <a:lnRef idx="1">
+            <a:schemeClr val="accent1"/>
+          </a:lnRef>
+          <a:fillRef idx="3">
+            <a:schemeClr val="accent1"/>
+          </a:fillRef>
+          <a:effectRef idx="2">
+            <a:schemeClr val="accent1"/>
+          </a:effectRef>
+          <a:fontRef idx="minor">
+            <a:schemeClr val="lt1"/>
+          </a:fontRef>
+        </p:style>
+        <p:txBody>
+          <a:bodyPr rtlCol="0" anchor="ctr"/>
+          <a:lstStyle/>
+          <a:p>
+            <a:pPr algn="ctr">
+              <a:defRPr sz="1200" b="1">
+                <a:solidFill>
+                  <a:srgbClr val="102F56"/>
+                </a:solidFill>
+                <a:latin typeface="Aptos"/>
               </a:defRPr>
-            </a:lvl1pPr>
-          </a:lstStyle>
-          <a:p>
-            <a:pPr algn="l"/>
-            <a:fld id="{F7021451-1387-4CA6-816F-3879F97B5CBC}" type="slidenum">
-              <a:rPr lang="en-US" b="0"/>
-              <a:t>9</a:t>
-            </a:fld>
-            <a:endParaRPr lang="en-US"/>
+            </a:pPr>
+            <a:r>
+              <a:t>Une version n’est considérée comme traitée qu’après succès complet du pipeline.</a:t>
+            </a:r>
           </a:p>
         </p:txBody>
       </p:sp>
